--- a/202610_タナカホーム株式会社御中_LINE公式アカウント運用のご提案.pptx
+++ b/202610_タナカホーム株式会社御中_LINE公式アカウント運用のご提案.pptx
@@ -8,7 +8,7 @@
     <p:notesMasterId r:id="rId9"/>
   </p:notesMasterIdLst>
   <p:sldIdLst>
-    <p:sldId id="256" r:id="rId2"/>
+    <p:sldId id="319" r:id="rId22"/>
     <p:sldId id="311" r:id="rId6"/>
     <p:sldId id="305" r:id="rId3"/>
     <p:sldId id="312" r:id="rId15"/>
@@ -23,7 +23,6 @@
     <p:sldId id="309" r:id="rId7"/>
     <p:sldId id="318" r:id="rId21"/>
     <p:sldId id="301" r:id="rId8"/>
-    <p:sldId id="319" r:id="rId22"/>
     <p:sldId id="320" r:id="rId23"/>
     <p:sldId id="321" r:id="rId24"/>
     <p:sldId id="322" r:id="rId25"/>
@@ -36,6 +35,7 @@
     <p:sldId id="329" r:id="rId32"/>
     <p:sldId id="330" r:id="rId33"/>
     <p:sldId id="331" r:id="rId34"/>
+    <p:sldId id="332" r:id="rId35"/>
   </p:sldIdLst>
   <p:sldSz cx="9906000" cy="6858000" type="A4"/>
   <p:notesSz cx="6807200" cy="9939338"/>
@@ -3850,7 +3850,7 @@
         </p:nvGraphicFramePr>
         <p:xfrm>
           <a:off x="502920" y="1691640"/>
-          <a:ext cx="8897111" cy="3529584"/>
+          <a:ext cx="8897111" cy="2331720"/>
         </p:xfrm>
         <a:graphic>
           <a:graphicData uri="http://schemas.openxmlformats.org/drawingml/2006/table">
@@ -3862,7 +3862,7 @@
                 <a:gridCol w="2331720"/>
                 <a:gridCol w="3822191"/>
               </a:tblGrid>
-              <a:tr h="384048">
+              <a:tr h="365760">
                 <a:tc>
                   <a:txBody>
                     <a:bodyPr/>
@@ -4106,7 +4106,7 @@
                   </a:tcPr>
                 </a:tc>
               </a:tr>
-              <a:tr h="786384">
+              <a:tr h="457200">
                 <a:tc>
                   <a:txBody>
                     <a:bodyPr/>
@@ -4360,7 +4360,7 @@
                   </a:tcPr>
                 </a:tc>
               </a:tr>
-              <a:tr h="786384">
+              <a:tr h="502920">
                 <a:tc>
                   <a:txBody>
                     <a:bodyPr/>
@@ -4614,7 +4614,7 @@
                   </a:tcPr>
                 </a:tc>
               </a:tr>
-              <a:tr h="786384">
+              <a:tr h="502920">
                 <a:tc>
                   <a:txBody>
                     <a:bodyPr/>
@@ -4868,7 +4868,7 @@
                   </a:tcPr>
                 </a:tc>
               </a:tr>
-              <a:tr h="786384">
+              <a:tr h="502920">
                 <a:tc>
                   <a:txBody>
                     <a:bodyPr/>
@@ -5128,7 +5128,266 @@
       </p:graphicFrame>
       <p:sp>
         <p:nvSpPr>
-          <p:cNvPr id="8" name="注記"/>
+          <p:cNvPr id="8" name="実績 見出し"/>
+          <p:cNvSpPr/>
+          <p:nvPr/>
+        </p:nvSpPr>
+        <p:spPr>
+          <a:xfrm>
+            <a:off x="502920" y="4160520"/>
+            <a:ext cx="1737360" cy="914400"/>
+          </a:xfrm>
+          <a:prstGeom prst="rect">
+            <a:avLst/>
+          </a:prstGeom>
+          <a:solidFill>
+            <a:srgbClr val="1F285A"/>
+          </a:solidFill>
+          <a:ln>
+            <a:noFill/>
+          </a:ln>
+        </p:spPr>
+        <p:txBody>
+          <a:bodyPr wrap="square" lIns="73152" tIns="36576" rIns="73152" bIns="36576" rtlCol="0" anchor="ctr">
+            <a:noAutofit/>
+          </a:bodyPr>
+          <a:lstStyle/>
+          <a:p>
+            <a:pPr algn="ctr">
+              <a:buNone/>
+            </a:pPr>
+            <a:r>
+              <a:rPr lang="ja-JP" altLang="en-US" sz="1100" b="1" dirty="0">
+                <a:solidFill>
+                  <a:srgbClr val="FFFFFF"/>
+                </a:solidFill>
+                <a:latin typeface="メイリオ" panose="020B0604030504040204" pitchFamily="50" charset="-128"/>
+                <a:ea typeface="メイリオ" panose="020B0604030504040204" pitchFamily="50" charset="-128"/>
+              </a:rPr>
+              <a:t>弊社の導入実績</a:t>
+            </a:r>
+            <a:endParaRPr lang="ja-JP" altLang="en-US" sz="1200" dirty="0"/>
+          </a:p>
+        </p:txBody>
+      </p:sp>
+      <p:sp>
+        <p:nvSpPr>
+          <p:cNvPr id="9" name="実績 施策"/>
+          <p:cNvSpPr/>
+          <p:nvPr/>
+        </p:nvSpPr>
+        <p:spPr>
+          <a:xfrm>
+            <a:off x="2240280" y="4160520"/>
+            <a:ext cx="4206240" cy="914400"/>
+          </a:xfrm>
+          <a:prstGeom prst="rect">
+            <a:avLst/>
+          </a:prstGeom>
+          <a:solidFill>
+            <a:srgbClr val="F4F7FF"/>
+          </a:solidFill>
+          <a:ln>
+            <a:noFill/>
+          </a:ln>
+        </p:spPr>
+        <p:txBody>
+          <a:bodyPr wrap="square" lIns="137160" tIns="54864" rIns="91440" bIns="54864" rtlCol="0" anchor="ctr">
+            <a:noAutofit/>
+          </a:bodyPr>
+          <a:lstStyle/>
+          <a:p>
+            <a:pPr algn="l">
+              <a:lnSpc>
+                <a:spcPct val="120000"/>
+              </a:lnSpc>
+              <a:buNone/>
+            </a:pPr>
+            <a:r>
+              <a:rPr lang="ja-JP" altLang="en-US" sz="1100" b="1" dirty="0">
+                <a:solidFill>
+                  <a:srgbClr val="1F285A"/>
+                </a:solidFill>
+                <a:latin typeface="メイリオ" panose="020B0604030504040204" pitchFamily="50" charset="-128"/>
+                <a:ea typeface="メイリオ" panose="020B0604030504040204" pitchFamily="50" charset="-128"/>
+              </a:rPr>
+              <a:t>人材業界</a:t>
+            </a:r>
+            <a:endParaRPr lang="ja-JP" altLang="en-US" sz="1200" dirty="0"/>
+          </a:p>
+          <a:p>
+            <a:pPr algn="l">
+              <a:lnSpc>
+                <a:spcPct val="120000"/>
+              </a:lnSpc>
+              <a:buNone/>
+            </a:pPr>
+            <a:r>
+              <a:rPr lang="ja-JP" altLang="en-US" sz="1050" b="0" dirty="0">
+                <a:solidFill>
+                  <a:srgbClr val="333333"/>
+                </a:solidFill>
+                <a:latin typeface="メイリオ" panose="020B0604030504040204" pitchFamily="50" charset="-128"/>
+                <a:ea typeface="メイリオ" panose="020B0604030504040204" pitchFamily="50" charset="-128"/>
+              </a:rPr>
+              <a:t>サンクスLINE誘導ツールを導入</a:t>
+            </a:r>
+            <a:endParaRPr lang="ja-JP" altLang="en-US" sz="1200" dirty="0"/>
+          </a:p>
+          <a:p>
+            <a:pPr algn="l">
+              <a:lnSpc>
+                <a:spcPct val="120000"/>
+              </a:lnSpc>
+              <a:buNone/>
+            </a:pPr>
+            <a:r>
+              <a:rPr lang="ja-JP" altLang="en-US" sz="1050" b="0" dirty="0">
+                <a:solidFill>
+                  <a:srgbClr val="333333"/>
+                </a:solidFill>
+                <a:latin typeface="メイリオ" panose="020B0604030504040204" pitchFamily="50" charset="-128"/>
+                <a:ea typeface="メイリオ" panose="020B0604030504040204" pitchFamily="50" charset="-128"/>
+              </a:rPr>
+              <a:t>友だち増加数（3か月）1,532人 → 2,103人</a:t>
+            </a:r>
+            <a:endParaRPr lang="ja-JP" altLang="en-US" sz="1200" dirty="0"/>
+          </a:p>
+        </p:txBody>
+      </p:sp>
+      <p:sp>
+        <p:nvSpPr>
+          <p:cNvPr id="10" name="実績 数字"/>
+          <p:cNvSpPr/>
+          <p:nvPr/>
+        </p:nvSpPr>
+        <p:spPr>
+          <a:xfrm>
+            <a:off x="6446520" y="4160520"/>
+            <a:ext cx="2953512" cy="914400"/>
+          </a:xfrm>
+          <a:prstGeom prst="rect">
+            <a:avLst/>
+          </a:prstGeom>
+          <a:solidFill>
+            <a:srgbClr val="F4F7FF"/>
+          </a:solidFill>
+          <a:ln>
+            <a:noFill/>
+          </a:ln>
+        </p:spPr>
+        <p:txBody>
+          <a:bodyPr wrap="square" lIns="73152" tIns="36576" rIns="73152" bIns="36576" rtlCol="0" anchor="ctr">
+            <a:noAutofit/>
+          </a:bodyPr>
+          <a:lstStyle/>
+          <a:p>
+            <a:pPr algn="ctr">
+              <a:lnSpc>
+                <a:spcPct val="100000"/>
+              </a:lnSpc>
+              <a:buNone/>
+            </a:pPr>
+            <a:r>
+              <a:rPr lang="ja-JP" altLang="en-US" sz="1050" b="1" dirty="0">
+                <a:solidFill>
+                  <a:srgbClr val="1F285A"/>
+                </a:solidFill>
+                <a:latin typeface="メイリオ" panose="020B0604030504040204" pitchFamily="50" charset="-128"/>
+                <a:ea typeface="メイリオ" panose="020B0604030504040204" pitchFamily="50" charset="-128"/>
+              </a:rPr>
+              <a:t>友だち増加数</a:t>
+            </a:r>
+            <a:endParaRPr lang="ja-JP" altLang="en-US" sz="1200" dirty="0"/>
+          </a:p>
+          <a:p>
+            <a:pPr algn="ctr">
+              <a:lnSpc>
+                <a:spcPct val="100000"/>
+              </a:lnSpc>
+              <a:buNone/>
+            </a:pPr>
+            <a:r>
+              <a:rPr lang="ja-JP" altLang="en-US" sz="2000" b="1" dirty="0">
+                <a:solidFill>
+                  <a:srgbClr val="1F285A"/>
+                </a:solidFill>
+                <a:latin typeface="メイリオ" panose="020B0604030504040204" pitchFamily="50" charset="-128"/>
+                <a:ea typeface="メイリオ" panose="020B0604030504040204" pitchFamily="50" charset="-128"/>
+              </a:rPr>
+              <a:t>導入前比137.3%</a:t>
+            </a:r>
+            <a:endParaRPr lang="ja-JP" altLang="en-US" sz="1200" dirty="0"/>
+          </a:p>
+          <a:p>
+            <a:pPr algn="ctr">
+              <a:lnSpc>
+                <a:spcPct val="100000"/>
+              </a:lnSpc>
+              <a:buNone/>
+            </a:pPr>
+            <a:r>
+              <a:rPr lang="ja-JP" altLang="en-US" sz="1200" b="1" dirty="0">
+                <a:solidFill>
+                  <a:srgbClr val="1F285A"/>
+                </a:solidFill>
+                <a:latin typeface="メイリオ" panose="020B0604030504040204" pitchFamily="50" charset="-128"/>
+                <a:ea typeface="メイリオ" panose="020B0604030504040204" pitchFamily="50" charset="-128"/>
+              </a:rPr>
+              <a:t>前年比127.5%</a:t>
+            </a:r>
+            <a:endParaRPr lang="ja-JP" altLang="en-US" sz="1200" dirty="0"/>
+          </a:p>
+        </p:txBody>
+      </p:sp>
+      <p:sp>
+        <p:nvSpPr>
+          <p:cNvPr id="11" name="注記"/>
+          <p:cNvSpPr/>
+          <p:nvPr/>
+        </p:nvSpPr>
+        <p:spPr>
+          <a:xfrm>
+            <a:off x="502920" y="5166360"/>
+            <a:ext cx="8897112" cy="274320"/>
+          </a:xfrm>
+          <a:prstGeom prst="rect">
+            <a:avLst/>
+          </a:prstGeom>
+          <a:noFill/>
+          <a:ln>
+            <a:noFill/>
+          </a:ln>
+        </p:spPr>
+        <p:txBody>
+          <a:bodyPr wrap="square" lIns="0" tIns="0" rIns="0" bIns="0" rtlCol="0" anchor="t">
+            <a:noAutofit/>
+          </a:bodyPr>
+          <a:lstStyle/>
+          <a:p>
+            <a:pPr algn="l">
+              <a:lnSpc>
+                <a:spcPct val="115000"/>
+              </a:lnSpc>
+              <a:buNone/>
+            </a:pPr>
+            <a:r>
+              <a:rPr lang="ja-JP" altLang="en-US" sz="900" b="0" dirty="0">
+                <a:solidFill>
+                  <a:srgbClr val="7F7F7F"/>
+                </a:solidFill>
+                <a:latin typeface="メイリオ" panose="020B0604030504040204" pitchFamily="50" charset="-128"/>
+                <a:ea typeface="メイリオ" panose="020B0604030504040204" pitchFamily="50" charset="-128"/>
+              </a:rPr>
+              <a:t>※導入前の3か月・前年の同じ期間と比べた友だち増加数（他の施策や時期の影響も含む）</a:t>
+            </a:r>
+            <a:endParaRPr lang="ja-JP" altLang="en-US" sz="1200" dirty="0"/>
+          </a:p>
+        </p:txBody>
+      </p:sp>
+      <p:sp>
+        <p:nvSpPr>
+          <p:cNvPr id="12" name="注記"/>
           <p:cNvSpPr/>
           <p:nvPr/>
         </p:nvSpPr>
@@ -12777,6 +13036,307 @@
       <p:grpSpPr/>
       <p:sp>
         <p:nvSpPr>
+          <p:cNvPr id="26" name="正方形/長方形 1"/>
+          <p:cNvSpPr/>
+          <p:nvPr/>
+        </p:nvSpPr>
+        <p:spPr>
+          <a:xfrm>
+            <a:off x="1665660" y="2937630"/>
+            <a:ext cx="6573960" cy="584280"/>
+          </a:xfrm>
+          <a:prstGeom prst="rect">
+            <a:avLst/>
+          </a:prstGeom>
+          <a:noFill/>
+          <a:ln w="0">
+            <a:noFill/>
+          </a:ln>
+        </p:spPr>
+        <p:style>
+          <a:lnRef idx="0">
+            <a:scrgbClr r="0" g="0" b="0"/>
+          </a:lnRef>
+          <a:fillRef idx="0">
+            <a:scrgbClr r="0" g="0" b="0"/>
+          </a:fillRef>
+          <a:effectRef idx="0">
+            <a:scrgbClr r="0" g="0" b="0"/>
+          </a:effectRef>
+          <a:fontRef idx="minor"/>
+        </p:style>
+        <p:txBody>
+          <a:bodyPr wrap="none" lIns="90000" tIns="45000" rIns="90000" bIns="45000" anchor="t">
+            <a:spAutoFit/>
+          </a:bodyPr>
+          <a:lstStyle/>
+          <a:p>
+            <a:pPr algn="ctr" defTabSz="914400">
+              <a:lnSpc>
+                <a:spcPct val="100000"/>
+              </a:lnSpc>
+            </a:pPr>
+            <a:r>
+              <a:rPr lang="en-US" sz="3200" b="1" u="none" strike="noStrike" dirty="0">
+                <a:solidFill>
+                  <a:schemeClr val="dk1">
+                    <a:lumMod val="75000"/>
+                    <a:lumOff val="25000"/>
+                  </a:schemeClr>
+                </a:solidFill>
+                <a:effectLst/>
+                <a:uFillTx/>
+                <a:latin typeface="メイリオ"/>
+                <a:ea typeface="メイリオ"/>
+              </a:rPr>
+              <a:t>LINE公式アカウント運用のご提案</a:t>
+            </a:r>
+            <a:endParaRPr lang="en-US" sz="3200" b="0" u="none" strike="noStrike" dirty="0">
+              <a:solidFill>
+                <a:srgbClr val="000000"/>
+              </a:solidFill>
+              <a:effectLst/>
+              <a:uFillTx/>
+              <a:latin typeface="メイリオ"/>
+            </a:endParaRPr>
+          </a:p>
+        </p:txBody>
+      </p:sp>
+      <p:sp>
+        <p:nvSpPr>
+          <p:cNvPr id="27" name="正方形/長方形 5"/>
+          <p:cNvSpPr/>
+          <p:nvPr/>
+        </p:nvSpPr>
+        <p:spPr>
+          <a:xfrm>
+            <a:off x="1336792" y="1922429"/>
+            <a:ext cx="7231989" cy="1042415"/>
+          </a:xfrm>
+          <a:prstGeom prst="rect">
+            <a:avLst/>
+          </a:prstGeom>
+          <a:noFill/>
+          <a:ln w="0">
+            <a:noFill/>
+          </a:ln>
+        </p:spPr>
+        <p:style>
+          <a:lnRef idx="0">
+            <a:scrgbClr r="0" g="0" b="0"/>
+          </a:lnRef>
+          <a:fillRef idx="0">
+            <a:scrgbClr r="0" g="0" b="0"/>
+          </a:fillRef>
+          <a:effectRef idx="0">
+            <a:scrgbClr r="0" g="0" b="0"/>
+          </a:effectRef>
+          <a:fontRef idx="minor"/>
+        </p:style>
+        <p:txBody>
+          <a:bodyPr wrap="square" lIns="91440" tIns="45720" rIns="91440" bIns="45720" anchor="b">
+            <a:noAutofit/>
+          </a:bodyPr>
+          <a:lstStyle/>
+          <a:p>
+            <a:pPr algn="ctr"/>
+            <a:r>
+              <a:rPr lang="ja-JP" sz="1600" b="0" u="none" strike="noStrike" dirty="0">
+                <a:solidFill>
+                  <a:schemeClr val="dk1">
+                    <a:lumMod val="50000"/>
+                    <a:lumOff val="50000"/>
+                  </a:schemeClr>
+                </a:solidFill>
+                <a:effectLst/>
+                <a:uFillTx/>
+                <a:latin typeface="メイリオ"/>
+                <a:ea typeface="メイリオ"/>
+              </a:rPr>
+              <a:t>集めた見込み客を逃さずナーチャリングをし、</a:t>
+            </a:r>
+          </a:p>
+          <a:p>
+            <a:pPr algn="ctr"/>
+            <a:r>
+              <a:rPr lang="ja-JP" sz="1600" b="0" u="none" strike="noStrike" dirty="0">
+                <a:solidFill>
+                  <a:schemeClr val="dk1">
+                    <a:lumMod val="50000"/>
+                    <a:lumOff val="50000"/>
+                  </a:schemeClr>
+                </a:solidFill>
+                <a:effectLst/>
+                <a:uFillTx/>
+                <a:latin typeface="メイリオ"/>
+                <a:ea typeface="メイリオ"/>
+              </a:rPr>
+              <a:t>来場・契約へ変えるLINE仕組みの構築</a:t>
+            </a:r>
+          </a:p>
+        </p:txBody>
+      </p:sp>
+      <p:cxnSp>
+        <p:nvCxnSpPr>
+          <p:cNvPr id="28" name="直線コネクタ 4"/>
+          <p:cNvCxnSpPr/>
+          <p:nvPr/>
+        </p:nvCxnSpPr>
+        <p:spPr>
+          <a:xfrm>
+            <a:off x="1336980" y="3604491"/>
+            <a:ext cx="7232040" cy="0"/>
+          </a:xfrm>
+          <a:prstGeom prst="straightConnector1">
+            <a:avLst/>
+          </a:prstGeom>
+          <a:ln w="19050">
+            <a:solidFill>
+              <a:srgbClr val="000000">
+                <a:lumMod val="50000"/>
+                <a:lumOff val="50000"/>
+              </a:srgbClr>
+            </a:solidFill>
+            <a:round/>
+          </a:ln>
+        </p:spPr>
+      </p:cxnSp>
+      <p:pic>
+        <p:nvPicPr>
+          <p:cNvPr id="29" name="図 8" descr="背景パターン&#10;&#10;AI 生成コンテンツは誤りを含む可能性があります。"/>
+          <p:cNvPicPr/>
+          <p:nvPr/>
+        </p:nvPicPr>
+        <p:blipFill>
+          <a:blip r:embed="rId2"/>
+          <a:stretch/>
+        </p:blipFill>
+        <p:spPr>
+          <a:xfrm>
+            <a:off x="0" y="0"/>
+            <a:ext cx="8159400" cy="766080"/>
+          </a:xfrm>
+          <a:prstGeom prst="rect">
+            <a:avLst/>
+          </a:prstGeom>
+          <a:noFill/>
+          <a:ln w="0">
+            <a:noFill/>
+          </a:ln>
+        </p:spPr>
+      </p:pic>
+      <p:pic>
+        <p:nvPicPr>
+          <p:cNvPr id="30" name="図 9" descr="背景パターン&#10;&#10;AI 生成コンテンツは誤りを含む可能性があります。"/>
+          <p:cNvPicPr/>
+          <p:nvPr/>
+        </p:nvPicPr>
+        <p:blipFill>
+          <a:blip r:embed="rId2"/>
+          <a:stretch/>
+        </p:blipFill>
+        <p:spPr>
+          <a:xfrm>
+            <a:off x="7863840" y="494280"/>
+            <a:ext cx="2041920" cy="271800"/>
+          </a:xfrm>
+          <a:prstGeom prst="rect">
+            <a:avLst/>
+          </a:prstGeom>
+          <a:noFill/>
+          <a:ln w="0">
+            <a:noFill/>
+          </a:ln>
+        </p:spPr>
+      </p:pic>
+      <p:sp>
+        <p:nvSpPr>
+          <p:cNvPr id="31" name="テキスト ボックス 6"/>
+          <p:cNvSpPr/>
+          <p:nvPr/>
+        </p:nvSpPr>
+        <p:spPr>
+          <a:xfrm>
+            <a:off x="291960" y="263520"/>
+            <a:ext cx="4965480" cy="338040"/>
+          </a:xfrm>
+          <a:prstGeom prst="rect">
+            <a:avLst/>
+          </a:prstGeom>
+          <a:noFill/>
+          <a:ln w="0">
+            <a:noFill/>
+          </a:ln>
+        </p:spPr>
+        <p:style>
+          <a:lnRef idx="0">
+            <a:scrgbClr r="0" g="0" b="0"/>
+          </a:lnRef>
+          <a:fillRef idx="0">
+            <a:scrgbClr r="0" g="0" b="0"/>
+          </a:fillRef>
+          <a:effectRef idx="0">
+            <a:scrgbClr r="0" g="0" b="0"/>
+          </a:effectRef>
+          <a:fontRef idx="minor"/>
+        </p:style>
+        <p:txBody>
+          <a:bodyPr lIns="90000" tIns="45000" rIns="90000" bIns="45000" anchor="t">
+            <a:spAutoFit/>
+          </a:bodyPr>
+          <a:lstStyle/>
+          <a:p>
+            <a:pPr defTabSz="914400">
+              <a:lnSpc>
+                <a:spcPct val="100000"/>
+              </a:lnSpc>
+            </a:pPr>
+            <a:r>
+              <a:rPr lang="ja-JP" sz="1600" b="1" u="none" strike="noStrike">
+                <a:solidFill>
+                  <a:schemeClr val="dk1">
+                    <a:lumMod val="50000"/>
+                    <a:lumOff val="50000"/>
+                  </a:schemeClr>
+                </a:solidFill>
+                <a:effectLst/>
+                <a:uFillTx/>
+                <a:latin typeface="メイリオ"/>
+                <a:ea typeface="メイリオ"/>
+              </a:rPr>
+              <a:t>タナカホーム株式会社 御中</a:t>
+            </a:r>
+            <a:endParaRPr lang="en-US" sz="1600" b="0" u="none" strike="noStrike">
+              <a:solidFill>
+                <a:srgbClr val="000000"/>
+              </a:solidFill>
+              <a:effectLst/>
+              <a:uFillTx/>
+              <a:latin typeface="メイリオ"/>
+            </a:endParaRPr>
+          </a:p>
+        </p:txBody>
+      </p:sp>
+    </p:spTree>
+  </p:cSld>
+  <p:clrMapOvr>
+    <a:masterClrMapping/>
+  </p:clrMapOvr>
+</p:sld>
+</file>
+
+<file path=ppt/slides/slide17.xml><?xml version="1.0" encoding="utf-8"?>
+<p:sld xmlns:a="http://schemas.openxmlformats.org/drawingml/2006/main" xmlns:p="http://schemas.openxmlformats.org/presentationml/2006/main" xmlns:r="http://schemas.openxmlformats.org/officeDocument/2006/relationships">
+  <p:cSld>
+    <p:spTree>
+      <p:nvGrpSpPr>
+        <p:cNvPr id="1" name=""/>
+        <p:cNvGrpSpPr/>
+        <p:nvPr/>
+      </p:nvGrpSpPr>
+      <p:grpSpPr/>
+      <p:sp>
+        <p:nvSpPr>
           <p:cNvPr id="980" name="Google Shape;752;p28"/>
           <p:cNvSpPr/>
           <p:nvPr/>
@@ -12916,7 +13476,7 @@
 </p:sld>
 </file>
 
-<file path=ppt/slides/slide17.xml><?xml version="1.0" encoding="utf-8"?>
+<file path=ppt/slides/slide18.xml><?xml version="1.0" encoding="utf-8"?>
 <p:sld xmlns:a="http://schemas.openxmlformats.org/drawingml/2006/main" xmlns:p="http://schemas.openxmlformats.org/presentationml/2006/main" xmlns:r="http://schemas.openxmlformats.org/officeDocument/2006/relationships">
   <p:cSld>
     <p:spTree>
@@ -15674,7 +16234,7 @@
 </p:sld>
 </file>
 
-<file path=ppt/slides/slide18.xml><?xml version="1.0" encoding="utf-8"?>
+<file path=ppt/slides/slide19.xml><?xml version="1.0" encoding="utf-8"?>
 <p:sld xmlns:a="http://schemas.openxmlformats.org/drawingml/2006/main" xmlns:p="http://schemas.openxmlformats.org/presentationml/2006/main" xmlns:r="http://schemas.openxmlformats.org/officeDocument/2006/relationships">
   <p:cSld>
     <p:spTree>
@@ -18963,3636 +19523,6 @@
 </p:sld>
 </file>
 
-<file path=ppt/slides/slide19.xml><?xml version="1.0" encoding="utf-8"?>
-<p:sld xmlns:a="http://schemas.openxmlformats.org/drawingml/2006/main" xmlns:p="http://schemas.openxmlformats.org/presentationml/2006/main" xmlns:r="http://schemas.openxmlformats.org/officeDocument/2006/relationships">
-  <p:cSld>
-    <p:spTree>
-      <p:nvGrpSpPr>
-        <p:cNvPr id="1" name=""/>
-        <p:cNvGrpSpPr/>
-        <p:nvPr/>
-      </p:nvGrpSpPr>
-      <p:grpSpPr/>
-      <p:sp>
-        <p:nvSpPr>
-          <p:cNvPr id="871" name="正方形/長方形 2"/>
-          <p:cNvSpPr/>
-          <p:nvPr/>
-        </p:nvSpPr>
-        <p:spPr>
-          <a:xfrm>
-            <a:off x="0" y="577800"/>
-            <a:ext cx="9905760" cy="812520"/>
-          </a:xfrm>
-          <a:prstGeom prst="rect">
-            <a:avLst/>
-          </a:prstGeom>
-          <a:noFill/>
-          <a:ln>
-            <a:noFill/>
-          </a:ln>
-          <a:effectLst>
-            <a:outerShdw blurRad="39960" dist="23040" dir="5400000" rotWithShape="0">
-              <a:srgbClr val="000000">
-                <a:alpha val="35000"/>
-              </a:srgbClr>
-            </a:outerShdw>
-          </a:effectLst>
-        </p:spPr>
-        <p:style>
-          <a:lnRef idx="1">
-            <a:schemeClr val="accent1"/>
-          </a:lnRef>
-          <a:fillRef idx="3">
-            <a:schemeClr val="accent1"/>
-          </a:fillRef>
-          <a:effectRef idx="2">
-            <a:schemeClr val="accent1"/>
-          </a:effectRef>
-          <a:fontRef idx="minor"/>
-        </p:style>
-        <p:txBody>
-          <a:bodyPr lIns="90000" tIns="45000" rIns="90000" bIns="45000" anchor="ctr">
-            <a:noAutofit/>
-          </a:bodyPr>
-          <a:lstStyle/>
-          <a:p>
-            <a:pPr algn="ctr" defTabSz="914400">
-              <a:lnSpc>
-                <a:spcPct val="100000"/>
-              </a:lnSpc>
-            </a:pPr>
-            <a:endParaRPr lang="en-US" sz="1800" b="0" u="none" strike="noStrike">
-              <a:solidFill>
-                <a:schemeClr val="lt1"/>
-              </a:solidFill>
-              <a:effectLst/>
-              <a:uFillTx/>
-              <a:latin typeface="メイリオ"/>
-              <a:ea typeface="メイリオ"/>
-            </a:endParaRPr>
-          </a:p>
-        </p:txBody>
-      </p:sp>
-      <p:sp>
-        <p:nvSpPr>
-          <p:cNvPr id="872" name="正方形/長方形 3"/>
-          <p:cNvSpPr/>
-          <p:nvPr/>
-        </p:nvSpPr>
-        <p:spPr>
-          <a:xfrm>
-            <a:off x="796320" y="635040"/>
-            <a:ext cx="8327880" cy="698040"/>
-          </a:xfrm>
-          <a:prstGeom prst="rect">
-            <a:avLst/>
-          </a:prstGeom>
-          <a:noFill/>
-          <a:ln>
-            <a:noFill/>
-          </a:ln>
-        </p:spPr>
-        <p:style>
-          <a:lnRef idx="2">
-            <a:schemeClr val="accent1">
-              <a:shade val="50000"/>
-            </a:schemeClr>
-          </a:lnRef>
-          <a:fillRef idx="1">
-            <a:schemeClr val="accent1"/>
-          </a:fillRef>
-          <a:effectRef idx="0">
-            <a:schemeClr val="accent1"/>
-          </a:effectRef>
-          <a:fontRef idx="minor"/>
-        </p:style>
-        <p:txBody>
-          <a:bodyPr lIns="90000" tIns="90000" rIns="90000" bIns="45000" anchor="ctr">
-            <a:noAutofit/>
-          </a:bodyPr>
-          <a:lstStyle/>
-          <a:p>
-            <a:pPr algn="ctr" defTabSz="914400">
-              <a:lnSpc>
-                <a:spcPts val="2455"/>
-              </a:lnSpc>
-            </a:pPr>
-            <a:r>
-              <a:rPr lang="ja-JP" sz="1400" b="0" u="none" strike="noStrike">
-                <a:solidFill>
-                  <a:srgbClr val="343434"/>
-                </a:solidFill>
-                <a:effectLst/>
-                <a:uFillTx/>
-                <a:latin typeface="メイリオ"/>
-                <a:ea typeface="メイリオ"/>
-              </a:rPr>
-              <a:t>利用年齢層により変動はするものの、</a:t>
-            </a:r>
-            <a:r>
-              <a:rPr lang="en-US" sz="1400" b="0" u="none" strike="noStrike">
-                <a:solidFill>
-                  <a:srgbClr val="343434"/>
-                </a:solidFill>
-                <a:effectLst/>
-                <a:uFillTx/>
-                <a:latin typeface="メイリオ"/>
-                <a:ea typeface="メイリオ"/>
-              </a:rPr>
-              <a:t>10-40</a:t>
-            </a:r>
-            <a:r>
-              <a:rPr lang="ja-JP" sz="1400" b="0" u="none" strike="noStrike">
-                <a:solidFill>
-                  <a:srgbClr val="343434"/>
-                </a:solidFill>
-                <a:effectLst/>
-                <a:uFillTx/>
-                <a:latin typeface="メイリオ"/>
-                <a:ea typeface="メイリオ"/>
-              </a:rPr>
-              <a:t>代を中心に電話、メールを忌避する動きが強まっている。</a:t>
-            </a:r>
-            <a:endParaRPr lang="en-US" sz="1400" b="0" u="none" strike="noStrike">
-              <a:solidFill>
-                <a:srgbClr val="000000"/>
-              </a:solidFill>
-              <a:effectLst/>
-              <a:uFillTx/>
-              <a:latin typeface="Arial"/>
-            </a:endParaRPr>
-          </a:p>
-          <a:p>
-            <a:pPr algn="ctr" defTabSz="914400">
-              <a:lnSpc>
-                <a:spcPts val="2455"/>
-              </a:lnSpc>
-            </a:pPr>
-            <a:r>
-              <a:rPr lang="ja-JP" sz="1400" b="1" u="none" strike="noStrike">
-                <a:solidFill>
-                  <a:srgbClr val="343434"/>
-                </a:solidFill>
-                <a:effectLst/>
-                <a:uFillTx/>
-                <a:latin typeface="メイリオ"/>
-                <a:ea typeface="メイリオ"/>
-              </a:rPr>
-              <a:t>既存ユーザー以外の年齢層の獲得にあたって、利用率の高い</a:t>
-            </a:r>
-            <a:r>
-              <a:rPr lang="en-US" sz="1400" b="1" u="none" strike="noStrike">
-                <a:solidFill>
-                  <a:srgbClr val="343434"/>
-                </a:solidFill>
-                <a:effectLst/>
-                <a:uFillTx/>
-                <a:latin typeface="メイリオ"/>
-                <a:ea typeface="メイリオ"/>
-              </a:rPr>
-              <a:t>LINEOA</a:t>
-            </a:r>
-            <a:r>
-              <a:rPr lang="ja-JP" sz="1400" b="1" u="none" strike="noStrike">
-                <a:solidFill>
-                  <a:srgbClr val="343434"/>
-                </a:solidFill>
-                <a:effectLst/>
-                <a:uFillTx/>
-                <a:latin typeface="メイリオ"/>
-                <a:ea typeface="メイリオ"/>
-              </a:rPr>
-              <a:t>施策が非常に重要と想定</a:t>
-            </a:r>
-            <a:r>
-              <a:rPr lang="ja-JP" sz="1400" b="0" u="none" strike="noStrike">
-                <a:solidFill>
-                  <a:srgbClr val="343434"/>
-                </a:solidFill>
-                <a:effectLst/>
-                <a:uFillTx/>
-                <a:latin typeface="メイリオ"/>
-                <a:ea typeface="メイリオ"/>
-              </a:rPr>
-              <a:t>される。</a:t>
-            </a:r>
-            <a:endParaRPr lang="en-US" sz="1400" b="0" u="none" strike="noStrike">
-              <a:solidFill>
-                <a:srgbClr val="000000"/>
-              </a:solidFill>
-              <a:effectLst/>
-              <a:uFillTx/>
-              <a:latin typeface="Arial"/>
-            </a:endParaRPr>
-          </a:p>
-        </p:txBody>
-      </p:sp>
-      <p:cxnSp>
-        <p:nvCxnSpPr>
-          <p:cNvPr id="873" name="直線コネクタ 4"/>
-          <p:cNvCxnSpPr/>
-          <p:nvPr/>
-        </p:nvCxnSpPr>
-        <p:spPr>
-          <a:xfrm>
-            <a:off x="0" y="1390320"/>
-            <a:ext cx="9906120" cy="360"/>
-          </a:xfrm>
-          <a:prstGeom prst="straightConnector1">
-            <a:avLst/>
-          </a:prstGeom>
-          <a:ln w="19050">
-            <a:solidFill>
-              <a:schemeClr val="lt1">
-                <a:lumMod val="85000"/>
-                <a:alpha val="60000"/>
-              </a:schemeClr>
-            </a:solidFill>
-            <a:round/>
-          </a:ln>
-        </p:spPr>
-      </p:cxnSp>
-      <p:sp>
-        <p:nvSpPr>
-          <p:cNvPr id="874" name="Google Shape;156;p7"/>
-          <p:cNvSpPr/>
-          <p:nvPr/>
-        </p:nvSpPr>
-        <p:spPr>
-          <a:xfrm>
-            <a:off x="549000" y="138240"/>
-            <a:ext cx="6514560" cy="338040"/>
-          </a:xfrm>
-          <a:prstGeom prst="rect">
-            <a:avLst/>
-          </a:prstGeom>
-          <a:noFill/>
-          <a:ln w="19050">
-            <a:noFill/>
-          </a:ln>
-        </p:spPr>
-        <p:style>
-          <a:lnRef idx="0">
-            <a:scrgbClr r="0" g="0" b="0"/>
-          </a:lnRef>
-          <a:fillRef idx="0">
-            <a:scrgbClr r="0" g="0" b="0"/>
-          </a:fillRef>
-          <a:effectRef idx="0">
-            <a:scrgbClr r="0" g="0" b="0"/>
-          </a:effectRef>
-          <a:fontRef idx="minor"/>
-        </p:style>
-        <p:txBody>
-          <a:bodyPr anchor="ctr">
-            <a:spAutoFit/>
-          </a:bodyPr>
-          <a:lstStyle/>
-          <a:p>
-            <a:pPr defTabSz="914400">
-              <a:lnSpc>
-                <a:spcPct val="100000"/>
-              </a:lnSpc>
-              <a:tabLst>
-                <a:tab pos="0" algn="l"/>
-              </a:tabLst>
-            </a:pPr>
-            <a:r>
-              <a:rPr lang="en-US" sz="1600" b="1" u="none" strike="noStrike">
-                <a:solidFill>
-                  <a:srgbClr val="002060"/>
-                </a:solidFill>
-                <a:effectLst/>
-                <a:uFillTx/>
-                <a:latin typeface="Meiryo"/>
-                <a:ea typeface="Meiryo"/>
-              </a:rPr>
-              <a:t>LINE</a:t>
-            </a:r>
-            <a:r>
-              <a:rPr lang="ja-JP" sz="1600" b="1" u="none" strike="noStrike">
-                <a:solidFill>
-                  <a:srgbClr val="002060"/>
-                </a:solidFill>
-                <a:effectLst/>
-                <a:uFillTx/>
-                <a:latin typeface="Meiryo"/>
-                <a:ea typeface="Meiryo"/>
-              </a:rPr>
-              <a:t>公式アカウントを検討する背景</a:t>
-            </a:r>
-            <a:endParaRPr lang="en-US" sz="1600" b="0" u="none" strike="noStrike">
-              <a:solidFill>
-                <a:srgbClr val="000000"/>
-              </a:solidFill>
-              <a:effectLst/>
-              <a:uFillTx/>
-              <a:latin typeface="Arial"/>
-            </a:endParaRPr>
-          </a:p>
-        </p:txBody>
-      </p:sp>
-      <p:graphicFrame>
-        <p:nvGraphicFramePr>
-          <p:cNvPr id="875" name="表 49"/>
-          <p:cNvGraphicFramePr/>
-          <p:nvPr/>
-        </p:nvGraphicFramePr>
-        <p:xfrm>
-          <a:off x="367560" y="1662840"/>
-          <a:ext cx="9167400" cy="4493880"/>
-        </p:xfrm>
-        <a:graphic>
-          <a:graphicData uri="http://schemas.openxmlformats.org/drawingml/2006/table">
-            <a:tbl>
-              <a:tblPr/>
-              <a:tblGrid>
-                <a:gridCol w="1833480">
-                  <a:extLst>
-                    <a:ext uri="{9D8B030D-6E8A-4147-A177-3AD203B41FA5}">
-                      <a16:colId xmlns:a16="http://schemas.microsoft.com/office/drawing/2014/main" val="20000"/>
-                    </a:ext>
-                  </a:extLst>
-                </a:gridCol>
-                <a:gridCol w="1833480">
-                  <a:extLst>
-                    <a:ext uri="{9D8B030D-6E8A-4147-A177-3AD203B41FA5}">
-                      <a16:colId xmlns:a16="http://schemas.microsoft.com/office/drawing/2014/main" val="20001"/>
-                    </a:ext>
-                  </a:extLst>
-                </a:gridCol>
-                <a:gridCol w="1833480">
-                  <a:extLst>
-                    <a:ext uri="{9D8B030D-6E8A-4147-A177-3AD203B41FA5}">
-                      <a16:colId xmlns:a16="http://schemas.microsoft.com/office/drawing/2014/main" val="20002"/>
-                    </a:ext>
-                  </a:extLst>
-                </a:gridCol>
-                <a:gridCol w="1833480">
-                  <a:extLst>
-                    <a:ext uri="{9D8B030D-6E8A-4147-A177-3AD203B41FA5}">
-                      <a16:colId xmlns:a16="http://schemas.microsoft.com/office/drawing/2014/main" val="20003"/>
-                    </a:ext>
-                  </a:extLst>
-                </a:gridCol>
-                <a:gridCol w="1833480">
-                  <a:extLst>
-                    <a:ext uri="{9D8B030D-6E8A-4147-A177-3AD203B41FA5}">
-                      <a16:colId xmlns:a16="http://schemas.microsoft.com/office/drawing/2014/main" val="20004"/>
-                    </a:ext>
-                  </a:extLst>
-                </a:gridCol>
-              </a:tblGrid>
-              <a:tr h="499320">
-                <a:tc>
-                  <a:txBody>
-                    <a:bodyPr/>
-                    <a:lstStyle/>
-                    <a:p>
-                      <a:pPr algn="ctr" defTabSz="914400">
-                        <a:lnSpc>
-                          <a:spcPct val="100000"/>
-                        </a:lnSpc>
-                      </a:pPr>
-                      <a:r>
-                        <a:rPr lang="ja-JP" sz="1050" b="1" u="none" strike="noStrike">
-                          <a:solidFill>
-                            <a:srgbClr val="000000"/>
-                          </a:solidFill>
-                          <a:effectLst/>
-                          <a:uFillTx/>
-                          <a:latin typeface="メイリオ"/>
-                          <a:ea typeface="メイリオ"/>
-                        </a:rPr>
-                        <a:t>年齢層</a:t>
-                      </a:r>
-                      <a:endParaRPr lang="en-US" sz="1050" b="0" u="none" strike="noStrike">
-                        <a:solidFill>
-                          <a:srgbClr val="000000"/>
-                        </a:solidFill>
-                        <a:effectLst/>
-                        <a:uFillTx/>
-                        <a:latin typeface="Arial"/>
-                      </a:endParaRPr>
-                    </a:p>
-                  </a:txBody>
-                  <a:tcPr marL="6480" marR="6480" anchor="ctr">
-                    <a:lnL w="6480">
-                      <a:solidFill>
-                        <a:srgbClr val="000000"/>
-                      </a:solidFill>
-                      <a:prstDash val="solid"/>
-                    </a:lnL>
-                    <a:lnR w="6480">
-                      <a:solidFill>
-                        <a:srgbClr val="000000"/>
-                      </a:solidFill>
-                      <a:prstDash val="solid"/>
-                    </a:lnR>
-                    <a:lnT w="6480">
-                      <a:solidFill>
-                        <a:srgbClr val="000000"/>
-                      </a:solidFill>
-                      <a:prstDash val="solid"/>
-                    </a:lnT>
-                    <a:lnB w="6480">
-                      <a:solidFill>
-                        <a:srgbClr val="000000"/>
-                      </a:solidFill>
-                      <a:prstDash val="solid"/>
-                    </a:lnB>
-                    <a:solidFill>
-                      <a:srgbClr val="DAE9F8"/>
-                    </a:solidFill>
-                  </a:tcPr>
-                </a:tc>
-                <a:tc>
-                  <a:txBody>
-                    <a:bodyPr/>
-                    <a:lstStyle/>
-                    <a:p>
-                      <a:pPr algn="ctr" defTabSz="914400">
-                        <a:lnSpc>
-                          <a:spcPct val="100000"/>
-                        </a:lnSpc>
-                      </a:pPr>
-                      <a:r>
-                        <a:rPr lang="en-US" sz="1000" b="0" u="none" strike="noStrike">
-                          <a:solidFill>
-                            <a:srgbClr val="000000"/>
-                          </a:solidFill>
-                          <a:effectLst/>
-                          <a:uFillTx/>
-                          <a:latin typeface="メイリオ"/>
-                          <a:ea typeface="メイリオ"/>
-                        </a:rPr>
-                        <a:t>LINE</a:t>
-                      </a:r>
-                      <a:r>
-                        <a:rPr lang="ja-JP" sz="1000" b="0" u="none" strike="noStrike">
-                          <a:solidFill>
-                            <a:srgbClr val="000000"/>
-                          </a:solidFill>
-                          <a:effectLst/>
-                          <a:uFillTx/>
-                          <a:latin typeface="メイリオ"/>
-                          <a:ea typeface="メイリオ"/>
-                        </a:rPr>
-                        <a:t>・チャット系</a:t>
-                      </a:r>
-                      <a:endParaRPr lang="en-US" sz="1000" b="0" u="none" strike="noStrike">
-                        <a:solidFill>
-                          <a:srgbClr val="000000"/>
-                        </a:solidFill>
-                        <a:effectLst/>
-                        <a:uFillTx/>
-                        <a:latin typeface="Arial"/>
-                      </a:endParaRPr>
-                    </a:p>
-                    <a:p>
-                      <a:pPr algn="ctr" defTabSz="914400">
-                        <a:lnSpc>
-                          <a:spcPct val="100000"/>
-                        </a:lnSpc>
-                      </a:pPr>
-                      <a:endParaRPr lang="en-US" sz="1000" b="0" u="none" strike="noStrike">
-                        <a:solidFill>
-                          <a:srgbClr val="000000"/>
-                        </a:solidFill>
-                        <a:effectLst/>
-                        <a:uFillTx/>
-                        <a:latin typeface="Arial"/>
-                      </a:endParaRPr>
-                    </a:p>
-                  </a:txBody>
-                  <a:tcPr marL="6480" marR="6480" anchor="ctr">
-                    <a:lnL w="6480">
-                      <a:solidFill>
-                        <a:srgbClr val="000000"/>
-                      </a:solidFill>
-                      <a:prstDash val="solid"/>
-                    </a:lnL>
-                    <a:lnR w="6480">
-                      <a:solidFill>
-                        <a:srgbClr val="000000"/>
-                      </a:solidFill>
-                      <a:prstDash val="solid"/>
-                    </a:lnR>
-                    <a:lnT w="6480">
-                      <a:solidFill>
-                        <a:srgbClr val="000000"/>
-                      </a:solidFill>
-                      <a:prstDash val="solid"/>
-                    </a:lnT>
-                    <a:lnB w="6480">
-                      <a:solidFill>
-                        <a:srgbClr val="000000"/>
-                      </a:solidFill>
-                      <a:prstDash val="solid"/>
-                    </a:lnB>
-                    <a:solidFill>
-                      <a:srgbClr val="DAE9F8"/>
-                    </a:solidFill>
-                  </a:tcPr>
-                </a:tc>
-                <a:tc>
-                  <a:txBody>
-                    <a:bodyPr/>
-                    <a:lstStyle/>
-                    <a:p>
-                      <a:pPr algn="ctr" defTabSz="914400">
-                        <a:lnSpc>
-                          <a:spcPct val="100000"/>
-                        </a:lnSpc>
-                      </a:pPr>
-                      <a:r>
-                        <a:rPr lang="ja-JP" sz="1000" b="0" u="none" strike="noStrike">
-                          <a:solidFill>
-                            <a:srgbClr val="000000"/>
-                          </a:solidFill>
-                          <a:effectLst/>
-                          <a:uFillTx/>
-                          <a:latin typeface="メイリオ"/>
-                          <a:ea typeface="メイリオ"/>
-                        </a:rPr>
-                        <a:t>メール・メルマガ</a:t>
-                      </a:r>
-                      <a:endParaRPr lang="en-US" sz="1000" b="0" u="none" strike="noStrike">
-                        <a:solidFill>
-                          <a:srgbClr val="000000"/>
-                        </a:solidFill>
-                        <a:effectLst/>
-                        <a:uFillTx/>
-                        <a:latin typeface="Arial"/>
-                      </a:endParaRPr>
-                    </a:p>
-                    <a:p>
-                      <a:pPr algn="ctr" defTabSz="914400">
-                        <a:lnSpc>
-                          <a:spcPct val="100000"/>
-                        </a:lnSpc>
-                      </a:pPr>
-                      <a:endParaRPr lang="en-US" sz="1000" b="0" u="none" strike="noStrike">
-                        <a:solidFill>
-                          <a:srgbClr val="000000"/>
-                        </a:solidFill>
-                        <a:effectLst/>
-                        <a:uFillTx/>
-                        <a:latin typeface="Arial"/>
-                      </a:endParaRPr>
-                    </a:p>
-                  </a:txBody>
-                  <a:tcPr marL="6480" marR="6480" anchor="ctr">
-                    <a:lnL w="6480">
-                      <a:solidFill>
-                        <a:srgbClr val="000000"/>
-                      </a:solidFill>
-                      <a:prstDash val="solid"/>
-                    </a:lnL>
-                    <a:lnR w="6480">
-                      <a:solidFill>
-                        <a:srgbClr val="000000"/>
-                      </a:solidFill>
-                      <a:prstDash val="solid"/>
-                    </a:lnR>
-                    <a:lnT w="6480">
-                      <a:solidFill>
-                        <a:srgbClr val="000000"/>
-                      </a:solidFill>
-                      <a:prstDash val="solid"/>
-                    </a:lnT>
-                    <a:lnB w="6480">
-                      <a:solidFill>
-                        <a:srgbClr val="000000"/>
-                      </a:solidFill>
-                      <a:prstDash val="solid"/>
-                    </a:lnB>
-                    <a:solidFill>
-                      <a:srgbClr val="DAE9F8"/>
-                    </a:solidFill>
-                  </a:tcPr>
-                </a:tc>
-                <a:tc>
-                  <a:txBody>
-                    <a:bodyPr/>
-                    <a:lstStyle/>
-                    <a:p>
-                      <a:pPr algn="ctr" defTabSz="914400">
-                        <a:lnSpc>
-                          <a:spcPct val="100000"/>
-                        </a:lnSpc>
-                      </a:pPr>
-                      <a:r>
-                        <a:rPr lang="ja-JP" sz="1000" b="0" u="none" strike="noStrike">
-                          <a:solidFill>
-                            <a:srgbClr val="000000"/>
-                          </a:solidFill>
-                          <a:effectLst/>
-                          <a:uFillTx/>
-                          <a:latin typeface="メイリオ"/>
-                          <a:ea typeface="メイリオ"/>
-                        </a:rPr>
-                        <a:t>電話</a:t>
-                      </a:r>
-                      <a:endParaRPr lang="en-US" sz="1000" b="0" u="none" strike="noStrike">
-                        <a:solidFill>
-                          <a:srgbClr val="000000"/>
-                        </a:solidFill>
-                        <a:effectLst/>
-                        <a:uFillTx/>
-                        <a:latin typeface="Arial"/>
-                      </a:endParaRPr>
-                    </a:p>
-                    <a:p>
-                      <a:pPr algn="ctr" defTabSz="914400">
-                        <a:lnSpc>
-                          <a:spcPct val="100000"/>
-                        </a:lnSpc>
-                      </a:pPr>
-                      <a:endParaRPr lang="en-US" sz="1000" b="0" u="none" strike="noStrike">
-                        <a:solidFill>
-                          <a:srgbClr val="000000"/>
-                        </a:solidFill>
-                        <a:effectLst/>
-                        <a:uFillTx/>
-                        <a:latin typeface="Arial"/>
-                      </a:endParaRPr>
-                    </a:p>
-                  </a:txBody>
-                  <a:tcPr marL="6480" marR="6480" anchor="ctr">
-                    <a:lnL w="6480">
-                      <a:solidFill>
-                        <a:srgbClr val="000000"/>
-                      </a:solidFill>
-                      <a:prstDash val="solid"/>
-                    </a:lnL>
-                    <a:lnR w="6480">
-                      <a:solidFill>
-                        <a:srgbClr val="000000"/>
-                      </a:solidFill>
-                      <a:prstDash val="solid"/>
-                    </a:lnR>
-                    <a:lnT w="6480">
-                      <a:solidFill>
-                        <a:srgbClr val="000000"/>
-                      </a:solidFill>
-                      <a:prstDash val="solid"/>
-                    </a:lnT>
-                    <a:lnB w="6480">
-                      <a:solidFill>
-                        <a:srgbClr val="000000"/>
-                      </a:solidFill>
-                      <a:prstDash val="solid"/>
-                    </a:lnB>
-                    <a:solidFill>
-                      <a:srgbClr val="DAE9F8"/>
-                    </a:solidFill>
-                  </a:tcPr>
-                </a:tc>
-                <a:tc>
-                  <a:txBody>
-                    <a:bodyPr/>
-                    <a:lstStyle/>
-                    <a:p>
-                      <a:pPr algn="ctr" defTabSz="914400">
-                        <a:lnSpc>
-                          <a:spcPct val="100000"/>
-                        </a:lnSpc>
-                      </a:pPr>
-                      <a:r>
-                        <a:rPr lang="ja-JP" sz="1000" b="0" u="none" strike="noStrike">
-                          <a:solidFill>
-                            <a:srgbClr val="000000"/>
-                          </a:solidFill>
-                          <a:effectLst/>
-                          <a:uFillTx/>
-                          <a:latin typeface="メイリオ"/>
-                          <a:ea typeface="メイリオ"/>
-                        </a:rPr>
-                        <a:t>主要な特徴・</a:t>
-                      </a:r>
-                      <a:r>
-                        <a:rPr lang="en-US" sz="1000" b="0" u="none" strike="noStrike">
-                          <a:solidFill>
-                            <a:srgbClr val="000000"/>
-                          </a:solidFill>
-                          <a:effectLst/>
-                          <a:uFillTx/>
-                          <a:latin typeface="メイリオ"/>
-                          <a:ea typeface="メイリオ"/>
-                        </a:rPr>
-                        <a:t>SNS</a:t>
-                      </a:r>
-                      <a:endParaRPr lang="en-US" sz="1000" b="0" u="none" strike="noStrike">
-                        <a:solidFill>
-                          <a:srgbClr val="000000"/>
-                        </a:solidFill>
-                        <a:effectLst/>
-                        <a:uFillTx/>
-                        <a:latin typeface="Arial"/>
-                      </a:endParaRPr>
-                    </a:p>
-                    <a:p>
-                      <a:pPr algn="ctr" defTabSz="914400">
-                        <a:lnSpc>
-                          <a:spcPct val="100000"/>
-                        </a:lnSpc>
-                      </a:pPr>
-                      <a:endParaRPr lang="en-US" sz="1000" b="0" u="none" strike="noStrike">
-                        <a:solidFill>
-                          <a:srgbClr val="000000"/>
-                        </a:solidFill>
-                        <a:effectLst/>
-                        <a:uFillTx/>
-                        <a:latin typeface="Arial"/>
-                      </a:endParaRPr>
-                    </a:p>
-                  </a:txBody>
-                  <a:tcPr marL="6480" marR="6480" anchor="ctr">
-                    <a:lnL w="6480">
-                      <a:solidFill>
-                        <a:srgbClr val="000000"/>
-                      </a:solidFill>
-                      <a:prstDash val="solid"/>
-                    </a:lnL>
-                    <a:lnR w="6480">
-                      <a:solidFill>
-                        <a:srgbClr val="000000"/>
-                      </a:solidFill>
-                      <a:prstDash val="solid"/>
-                    </a:lnR>
-                    <a:lnT w="6480">
-                      <a:solidFill>
-                        <a:srgbClr val="000000"/>
-                      </a:solidFill>
-                      <a:prstDash val="solid"/>
-                    </a:lnT>
-                    <a:lnB w="6480">
-                      <a:solidFill>
-                        <a:srgbClr val="000000"/>
-                      </a:solidFill>
-                      <a:prstDash val="solid"/>
-                    </a:lnB>
-                    <a:solidFill>
-                      <a:srgbClr val="DAE9F8"/>
-                    </a:solidFill>
-                  </a:tcPr>
-                </a:tc>
-                <a:extLst>
-                  <a:ext uri="{0D108BD9-81ED-4DB2-BD59-A6C34878D82A}">
-                    <a16:rowId xmlns:a16="http://schemas.microsoft.com/office/drawing/2014/main" val="10000"/>
-                  </a:ext>
-                </a:extLst>
-              </a:tr>
-              <a:tr h="499320">
-                <a:tc rowSpan="2">
-                  <a:txBody>
-                    <a:bodyPr/>
-                    <a:lstStyle/>
-                    <a:p>
-                      <a:pPr defTabSz="914400">
-                        <a:lnSpc>
-                          <a:spcPct val="100000"/>
-                        </a:lnSpc>
-                      </a:pPr>
-                      <a:r>
-                        <a:rPr lang="ja-JP" sz="1050" b="1" u="none" strike="noStrike">
-                          <a:solidFill>
-                            <a:srgbClr val="000000"/>
-                          </a:solidFill>
-                          <a:effectLst/>
-                          <a:uFillTx/>
-                          <a:latin typeface="メイリオ"/>
-                          <a:ea typeface="メイリオ"/>
-                        </a:rPr>
-                        <a:t>　　　</a:t>
-                      </a:r>
-                      <a:r>
-                        <a:rPr lang="en-US" sz="1050" b="1" u="none" strike="noStrike">
-                          <a:solidFill>
-                            <a:srgbClr val="000000"/>
-                          </a:solidFill>
-                          <a:effectLst/>
-                          <a:uFillTx/>
-                          <a:latin typeface="メイリオ"/>
-                          <a:ea typeface="メイリオ"/>
-                        </a:rPr>
-                        <a:t>10</a:t>
-                      </a:r>
-                      <a:r>
-                        <a:rPr lang="ja-JP" sz="1050" b="1" u="none" strike="noStrike">
-                          <a:solidFill>
-                            <a:srgbClr val="000000"/>
-                          </a:solidFill>
-                          <a:effectLst/>
-                          <a:uFillTx/>
-                          <a:latin typeface="メイリオ"/>
-                          <a:ea typeface="メイリオ"/>
-                        </a:rPr>
-                        <a:t>代〜</a:t>
-                      </a:r>
-                      <a:r>
-                        <a:rPr lang="en-US" sz="1050" b="1" u="none" strike="noStrike">
-                          <a:solidFill>
-                            <a:srgbClr val="000000"/>
-                          </a:solidFill>
-                          <a:effectLst/>
-                          <a:uFillTx/>
-                          <a:latin typeface="メイリオ"/>
-                          <a:ea typeface="メイリオ"/>
-                        </a:rPr>
-                        <a:t>20</a:t>
-                      </a:r>
-                      <a:r>
-                        <a:rPr lang="ja-JP" sz="1050" b="1" u="none" strike="noStrike">
-                          <a:solidFill>
-                            <a:srgbClr val="000000"/>
-                          </a:solidFill>
-                          <a:effectLst/>
-                          <a:uFillTx/>
-                          <a:latin typeface="メイリオ"/>
-                          <a:ea typeface="メイリオ"/>
-                        </a:rPr>
-                        <a:t>代　</a:t>
-                      </a:r>
-                      <a:endParaRPr lang="en-US" sz="1050" b="0" u="none" strike="noStrike">
-                        <a:solidFill>
-                          <a:srgbClr val="000000"/>
-                        </a:solidFill>
-                        <a:effectLst/>
-                        <a:uFillTx/>
-                        <a:latin typeface="Arial"/>
-                      </a:endParaRPr>
-                    </a:p>
-                  </a:txBody>
-                  <a:tcPr marL="6480" marR="6480" anchor="ctr">
-                    <a:lnL w="6480">
-                      <a:solidFill>
-                        <a:srgbClr val="000000"/>
-                      </a:solidFill>
-                      <a:prstDash val="solid"/>
-                    </a:lnL>
-                    <a:lnR w="6480">
-                      <a:solidFill>
-                        <a:srgbClr val="000000"/>
-                      </a:solidFill>
-                      <a:prstDash val="solid"/>
-                    </a:lnR>
-                    <a:lnT w="6480">
-                      <a:solidFill>
-                        <a:srgbClr val="000000"/>
-                      </a:solidFill>
-                      <a:prstDash val="solid"/>
-                    </a:lnT>
-                    <a:lnB w="6480">
-                      <a:solidFill>
-                        <a:srgbClr val="000000"/>
-                      </a:solidFill>
-                      <a:prstDash val="solid"/>
-                    </a:lnB>
-                    <a:solidFill>
-                      <a:srgbClr val="DAE9F8"/>
-                    </a:solidFill>
-                  </a:tcPr>
-                </a:tc>
-                <a:tc>
-                  <a:txBody>
-                    <a:bodyPr/>
-                    <a:lstStyle/>
-                    <a:p>
-                      <a:pPr algn="ctr" defTabSz="914400">
-                        <a:lnSpc>
-                          <a:spcPct val="100000"/>
-                        </a:lnSpc>
-                      </a:pPr>
-                      <a:r>
-                        <a:rPr lang="ja-JP" sz="1000" b="1" u="none" strike="noStrike">
-                          <a:solidFill>
-                            <a:srgbClr val="000000"/>
-                          </a:solidFill>
-                          <a:effectLst/>
-                          <a:uFillTx/>
-                          <a:latin typeface="メイリオ"/>
-                          <a:ea typeface="メイリオ"/>
-                        </a:rPr>
-                        <a:t>利用率：</a:t>
-                      </a:r>
-                      <a:r>
-                        <a:rPr lang="en-US" sz="1000" b="1" u="none" strike="noStrike">
-                          <a:solidFill>
-                            <a:srgbClr val="000000"/>
-                          </a:solidFill>
-                          <a:effectLst/>
-                          <a:uFillTx/>
-                          <a:latin typeface="メイリオ"/>
-                          <a:ea typeface="メイリオ"/>
-                        </a:rPr>
-                        <a:t>90%</a:t>
-                      </a:r>
-                      <a:r>
-                        <a:rPr lang="ja-JP" sz="1000" b="1" u="none" strike="noStrike">
-                          <a:solidFill>
-                            <a:srgbClr val="000000"/>
-                          </a:solidFill>
-                          <a:effectLst/>
-                          <a:uFillTx/>
-                          <a:latin typeface="メイリオ"/>
-                          <a:ea typeface="メイリオ"/>
-                        </a:rPr>
-                        <a:t>以上</a:t>
-                      </a:r>
-                      <a:endParaRPr lang="en-US" sz="1000" b="0" u="none" strike="noStrike">
-                        <a:solidFill>
-                          <a:srgbClr val="000000"/>
-                        </a:solidFill>
-                        <a:effectLst/>
-                        <a:uFillTx/>
-                        <a:latin typeface="Arial"/>
-                      </a:endParaRPr>
-                    </a:p>
-                  </a:txBody>
-                  <a:tcPr marL="6480" marR="6480" anchor="ctr">
-                    <a:lnL w="6480">
-                      <a:solidFill>
-                        <a:srgbClr val="000000"/>
-                      </a:solidFill>
-                      <a:prstDash val="solid"/>
-                    </a:lnL>
-                    <a:lnR w="6480">
-                      <a:solidFill>
-                        <a:srgbClr val="000000"/>
-                      </a:solidFill>
-                      <a:prstDash val="solid"/>
-                    </a:lnR>
-                    <a:lnT w="6480">
-                      <a:solidFill>
-                        <a:srgbClr val="000000"/>
-                      </a:solidFill>
-                      <a:prstDash val="solid"/>
-                    </a:lnT>
-                    <a:lnB w="6480">
-                      <a:noFill/>
-                      <a:prstDash val="solid"/>
-                    </a:lnB>
-                    <a:solidFill>
-                      <a:srgbClr val="FFFF99"/>
-                    </a:solidFill>
-                  </a:tcPr>
-                </a:tc>
-                <a:tc>
-                  <a:txBody>
-                    <a:bodyPr/>
-                    <a:lstStyle/>
-                    <a:p>
-                      <a:pPr algn="ctr" defTabSz="914400">
-                        <a:lnSpc>
-                          <a:spcPct val="100000"/>
-                        </a:lnSpc>
-                      </a:pPr>
-                      <a:r>
-                        <a:rPr lang="ja-JP" sz="1000" b="1" u="none" strike="noStrike">
-                          <a:solidFill>
-                            <a:srgbClr val="000000"/>
-                          </a:solidFill>
-                          <a:effectLst/>
-                          <a:uFillTx/>
-                          <a:latin typeface="メイリオ"/>
-                          <a:ea typeface="メイリオ"/>
-                        </a:rPr>
-                        <a:t>利用率：低</a:t>
-                      </a:r>
-                      <a:endParaRPr lang="en-US" sz="1000" b="0" u="none" strike="noStrike">
-                        <a:solidFill>
-                          <a:srgbClr val="000000"/>
-                        </a:solidFill>
-                        <a:effectLst/>
-                        <a:uFillTx/>
-                        <a:latin typeface="Arial"/>
-                      </a:endParaRPr>
-                    </a:p>
-                  </a:txBody>
-                  <a:tcPr marL="6480" marR="6480" anchor="ctr">
-                    <a:lnL w="6480">
-                      <a:solidFill>
-                        <a:srgbClr val="000000"/>
-                      </a:solidFill>
-                      <a:prstDash val="solid"/>
-                    </a:lnL>
-                    <a:lnR w="6480">
-                      <a:solidFill>
-                        <a:srgbClr val="000000"/>
-                      </a:solidFill>
-                      <a:prstDash val="solid"/>
-                    </a:lnR>
-                    <a:lnT w="6480">
-                      <a:solidFill>
-                        <a:srgbClr val="000000"/>
-                      </a:solidFill>
-                      <a:prstDash val="solid"/>
-                    </a:lnT>
-                    <a:lnB w="6480">
-                      <a:noFill/>
-                      <a:prstDash val="solid"/>
-                    </a:lnB>
-                    <a:solidFill>
-                      <a:schemeClr val="lt1"/>
-                    </a:solidFill>
-                  </a:tcPr>
-                </a:tc>
-                <a:tc>
-                  <a:txBody>
-                    <a:bodyPr/>
-                    <a:lstStyle/>
-                    <a:p>
-                      <a:pPr algn="ctr" defTabSz="914400">
-                        <a:lnSpc>
-                          <a:spcPct val="100000"/>
-                        </a:lnSpc>
-                      </a:pPr>
-                      <a:r>
-                        <a:rPr lang="ja-JP" sz="1000" b="1" u="none" strike="noStrike">
-                          <a:solidFill>
-                            <a:srgbClr val="000000"/>
-                          </a:solidFill>
-                          <a:effectLst/>
-                          <a:uFillTx/>
-                          <a:latin typeface="メイリオ"/>
-                          <a:ea typeface="メイリオ"/>
-                        </a:rPr>
-                        <a:t>利用率：極めて低</a:t>
-                      </a:r>
-                      <a:endParaRPr lang="en-US" sz="1000" b="0" u="none" strike="noStrike">
-                        <a:solidFill>
-                          <a:srgbClr val="000000"/>
-                        </a:solidFill>
-                        <a:effectLst/>
-                        <a:uFillTx/>
-                        <a:latin typeface="Arial"/>
-                      </a:endParaRPr>
-                    </a:p>
-                  </a:txBody>
-                  <a:tcPr marL="6480" marR="6480" anchor="ctr">
-                    <a:lnL w="6480">
-                      <a:solidFill>
-                        <a:srgbClr val="000000"/>
-                      </a:solidFill>
-                      <a:prstDash val="solid"/>
-                    </a:lnL>
-                    <a:lnR w="6480">
-                      <a:solidFill>
-                        <a:srgbClr val="000000"/>
-                      </a:solidFill>
-                      <a:prstDash val="solid"/>
-                    </a:lnR>
-                    <a:lnT w="6480">
-                      <a:solidFill>
-                        <a:srgbClr val="000000"/>
-                      </a:solidFill>
-                      <a:prstDash val="solid"/>
-                    </a:lnT>
-                    <a:lnB w="6480">
-                      <a:noFill/>
-                      <a:prstDash val="solid"/>
-                    </a:lnB>
-                    <a:solidFill>
-                      <a:schemeClr val="lt1"/>
-                    </a:solidFill>
-                  </a:tcPr>
-                </a:tc>
-                <a:tc rowSpan="2">
-                  <a:txBody>
-                    <a:bodyPr/>
-                    <a:lstStyle/>
-                    <a:p>
-                      <a:pPr algn="ctr" defTabSz="914400">
-                        <a:lnSpc>
-                          <a:spcPct val="100000"/>
-                        </a:lnSpc>
-                      </a:pPr>
-                      <a:r>
-                        <a:rPr lang="en-US" sz="800" b="0" u="none" strike="noStrike">
-                          <a:solidFill>
-                            <a:srgbClr val="000000"/>
-                          </a:solidFill>
-                          <a:effectLst/>
-                          <a:uFillTx/>
-                          <a:latin typeface="メイリオ"/>
-                          <a:ea typeface="メイリオ"/>
-                        </a:rPr>
-                        <a:t>Tiktok YouTube</a:t>
-                      </a:r>
-                      <a:r>
-                        <a:rPr lang="ja-JP" sz="800" b="0" u="none" strike="noStrike">
-                          <a:solidFill>
-                            <a:srgbClr val="000000"/>
-                          </a:solidFill>
-                          <a:effectLst/>
-                          <a:uFillTx/>
-                          <a:latin typeface="メイリオ"/>
-                          <a:ea typeface="メイリオ"/>
-                        </a:rPr>
-                        <a:t>が情報収集の起点。</a:t>
-                      </a:r>
-                      <a:br>
-                        <a:rPr sz="800"/>
-                      </a:br>
-                      <a:r>
-                        <a:rPr lang="en-US" sz="800" b="0" u="none" strike="noStrike">
-                          <a:solidFill>
-                            <a:srgbClr val="000000"/>
-                          </a:solidFill>
-                          <a:effectLst/>
-                          <a:uFillTx/>
-                          <a:latin typeface="メイリオ"/>
-                          <a:ea typeface="メイリオ"/>
-                        </a:rPr>
-                        <a:t>Instagram</a:t>
-                      </a:r>
-                      <a:r>
-                        <a:rPr lang="ja-JP" sz="800" b="0" u="none" strike="noStrike">
-                          <a:solidFill>
-                            <a:srgbClr val="000000"/>
-                          </a:solidFill>
-                          <a:effectLst/>
-                          <a:uFillTx/>
-                          <a:latin typeface="メイリオ"/>
-                          <a:ea typeface="メイリオ"/>
-                        </a:rPr>
-                        <a:t>、</a:t>
-                      </a:r>
-                      <a:r>
-                        <a:rPr lang="en-US" sz="800" b="0" u="none" strike="noStrike">
-                          <a:solidFill>
-                            <a:srgbClr val="000000"/>
-                          </a:solidFill>
-                          <a:effectLst/>
-                          <a:uFillTx/>
-                          <a:latin typeface="メイリオ"/>
-                          <a:ea typeface="メイリオ"/>
-                        </a:rPr>
-                        <a:t>X</a:t>
-                      </a:r>
-                      <a:r>
-                        <a:rPr lang="ja-JP" sz="800" b="0" u="none" strike="noStrike">
-                          <a:solidFill>
-                            <a:srgbClr val="000000"/>
-                          </a:solidFill>
-                          <a:effectLst/>
-                          <a:uFillTx/>
-                          <a:latin typeface="メイリオ"/>
-                          <a:ea typeface="メイリオ"/>
-                        </a:rPr>
-                        <a:t>の</a:t>
-                      </a:r>
-                      <a:r>
-                        <a:rPr lang="en-US" sz="800" b="0" u="none" strike="noStrike">
-                          <a:solidFill>
-                            <a:srgbClr val="000000"/>
-                          </a:solidFill>
-                          <a:effectLst/>
-                          <a:uFillTx/>
-                          <a:latin typeface="メイリオ"/>
-                          <a:ea typeface="メイリオ"/>
-                        </a:rPr>
-                        <a:t>DM</a:t>
-                      </a:r>
-                      <a:r>
-                        <a:rPr lang="ja-JP" sz="800" b="0" u="none" strike="noStrike">
-                          <a:solidFill>
-                            <a:srgbClr val="000000"/>
-                          </a:solidFill>
-                          <a:effectLst/>
-                          <a:uFillTx/>
-                          <a:latin typeface="メイリオ"/>
-                          <a:ea typeface="メイリオ"/>
-                        </a:rPr>
-                        <a:t>も</a:t>
-                      </a:r>
-                      <a:endParaRPr lang="en-US" sz="800" b="0" u="none" strike="noStrike">
-                        <a:solidFill>
-                          <a:srgbClr val="000000"/>
-                        </a:solidFill>
-                        <a:effectLst/>
-                        <a:uFillTx/>
-                        <a:latin typeface="Arial"/>
-                      </a:endParaRPr>
-                    </a:p>
-                    <a:p>
-                      <a:pPr algn="ctr" defTabSz="914400">
-                        <a:lnSpc>
-                          <a:spcPct val="100000"/>
-                        </a:lnSpc>
-                      </a:pPr>
-                      <a:r>
-                        <a:rPr lang="ja-JP" sz="800" b="0" u="none" strike="noStrike">
-                          <a:solidFill>
-                            <a:srgbClr val="000000"/>
-                          </a:solidFill>
-                          <a:effectLst/>
-                          <a:uFillTx/>
-                          <a:latin typeface="メイリオ"/>
-                          <a:ea typeface="メイリオ"/>
-                        </a:rPr>
-                        <a:t>連絡網として活用。</a:t>
-                      </a:r>
-                      <a:endParaRPr lang="en-US" sz="800" b="0" u="none" strike="noStrike">
-                        <a:solidFill>
-                          <a:srgbClr val="000000"/>
-                        </a:solidFill>
-                        <a:effectLst/>
-                        <a:uFillTx/>
-                        <a:latin typeface="Arial"/>
-                      </a:endParaRPr>
-                    </a:p>
-                  </a:txBody>
-                  <a:tcPr marL="6480" marR="6480" anchor="ctr">
-                    <a:lnL w="6480">
-                      <a:solidFill>
-                        <a:srgbClr val="000000"/>
-                      </a:solidFill>
-                      <a:prstDash val="solid"/>
-                    </a:lnL>
-                    <a:lnR w="6480">
-                      <a:solidFill>
-                        <a:srgbClr val="000000"/>
-                      </a:solidFill>
-                      <a:prstDash val="solid"/>
-                    </a:lnR>
-                    <a:lnT w="6480">
-                      <a:solidFill>
-                        <a:srgbClr val="000000"/>
-                      </a:solidFill>
-                      <a:prstDash val="solid"/>
-                    </a:lnT>
-                    <a:lnB w="6480">
-                      <a:solidFill>
-                        <a:srgbClr val="000000"/>
-                      </a:solidFill>
-                      <a:prstDash val="solid"/>
-                    </a:lnB>
-                    <a:noFill/>
-                  </a:tcPr>
-                </a:tc>
-                <a:extLst>
-                  <a:ext uri="{0D108BD9-81ED-4DB2-BD59-A6C34878D82A}">
-                    <a16:rowId xmlns:a16="http://schemas.microsoft.com/office/drawing/2014/main" val="10001"/>
-                  </a:ext>
-                </a:extLst>
-              </a:tr>
-              <a:tr h="499320">
-                <a:tc vMerge="1">
-                  <a:txBody>
-                    <a:bodyPr/>
-                    <a:lstStyle/>
-                    <a:p>
-                      <a:endParaRPr lang="en-US" sz="1800" b="0" u="none" strike="noStrike">
-                        <a:solidFill>
-                          <a:srgbClr val="000000"/>
-                        </a:solidFill>
-                        <a:effectLst/>
-                        <a:uFillTx/>
-                        <a:latin typeface="Arial"/>
-                      </a:endParaRPr>
-                    </a:p>
-                  </a:txBody>
-                  <a:tcPr marL="90000" marR="90000">
-                    <a:lnL>
-                      <a:noFill/>
-                    </a:lnL>
-                    <a:lnR>
-                      <a:noFill/>
-                    </a:lnR>
-                    <a:lnT>
-                      <a:noFill/>
-                    </a:lnT>
-                    <a:lnB>
-                      <a:noFill/>
-                    </a:lnB>
-                    <a:solidFill>
-                      <a:srgbClr val="729FCF"/>
-                    </a:solidFill>
-                  </a:tcPr>
-                </a:tc>
-                <a:tc>
-                  <a:txBody>
-                    <a:bodyPr/>
-                    <a:lstStyle/>
-                    <a:p>
-                      <a:pPr algn="ctr" defTabSz="914400">
-                        <a:lnSpc>
-                          <a:spcPct val="100000"/>
-                        </a:lnSpc>
-                      </a:pPr>
-                      <a:r>
-                        <a:rPr lang="ja-JP" sz="800" b="0" u="none" strike="noStrike">
-                          <a:solidFill>
-                            <a:srgbClr val="000000"/>
-                          </a:solidFill>
-                          <a:effectLst/>
-                          <a:uFillTx/>
-                          <a:latin typeface="メイリオ"/>
-                          <a:ea typeface="メイリオ"/>
-                        </a:rPr>
-                        <a:t>日常連絡の絶対的インフラ。</a:t>
-                      </a:r>
-                      <a:endParaRPr lang="en-US" sz="800" b="0" u="none" strike="noStrike">
-                        <a:solidFill>
-                          <a:srgbClr val="000000"/>
-                        </a:solidFill>
-                        <a:effectLst/>
-                        <a:uFillTx/>
-                        <a:latin typeface="Arial"/>
-                      </a:endParaRPr>
-                    </a:p>
-                  </a:txBody>
-                  <a:tcPr marL="6480" marR="6480" anchor="ctr">
-                    <a:lnL w="6480">
-                      <a:solidFill>
-                        <a:srgbClr val="000000"/>
-                      </a:solidFill>
-                      <a:prstDash val="solid"/>
-                    </a:lnL>
-                    <a:lnR w="6480">
-                      <a:solidFill>
-                        <a:srgbClr val="000000"/>
-                      </a:solidFill>
-                      <a:prstDash val="solid"/>
-                    </a:lnR>
-                    <a:lnT w="12240">
-                      <a:noFill/>
-                      <a:prstDash val="solid"/>
-                    </a:lnT>
-                    <a:lnB w="6480">
-                      <a:solidFill>
-                        <a:srgbClr val="000000"/>
-                      </a:solidFill>
-                      <a:prstDash val="solid"/>
-                    </a:lnB>
-                    <a:solidFill>
-                      <a:srgbClr val="FFFF99"/>
-                    </a:solidFill>
-                  </a:tcPr>
-                </a:tc>
-                <a:tc>
-                  <a:txBody>
-                    <a:bodyPr/>
-                    <a:lstStyle/>
-                    <a:p>
-                      <a:pPr algn="ctr" defTabSz="914400">
-                        <a:lnSpc>
-                          <a:spcPct val="100000"/>
-                        </a:lnSpc>
-                      </a:pPr>
-                      <a:r>
-                        <a:rPr lang="ja-JP" sz="800" b="0" u="none" strike="noStrike">
-                          <a:solidFill>
-                            <a:srgbClr val="000000"/>
-                          </a:solidFill>
-                          <a:effectLst/>
-                          <a:uFillTx/>
-                          <a:latin typeface="メイリオ"/>
-                          <a:ea typeface="メイリオ"/>
-                        </a:rPr>
-                        <a:t>企業や公式からの連絡は</a:t>
-                      </a:r>
-                      <a:endParaRPr lang="en-US" sz="800" b="0" u="none" strike="noStrike">
-                        <a:solidFill>
-                          <a:srgbClr val="000000"/>
-                        </a:solidFill>
-                        <a:effectLst/>
-                        <a:uFillTx/>
-                        <a:latin typeface="Arial"/>
-                      </a:endParaRPr>
-                    </a:p>
-                    <a:p>
-                      <a:pPr algn="ctr" defTabSz="914400">
-                        <a:lnSpc>
-                          <a:spcPct val="100000"/>
-                        </a:lnSpc>
-                      </a:pPr>
-                      <a:r>
-                        <a:rPr lang="ja-JP" sz="800" b="0" u="none" strike="noStrike">
-                          <a:solidFill>
-                            <a:srgbClr val="000000"/>
-                          </a:solidFill>
-                          <a:effectLst/>
-                          <a:uFillTx/>
-                          <a:latin typeface="メイリオ"/>
-                          <a:ea typeface="メイリオ"/>
-                        </a:rPr>
-                        <a:t>読まれない傾向。</a:t>
-                      </a:r>
-                      <a:endParaRPr lang="en-US" sz="800" b="0" u="none" strike="noStrike">
-                        <a:solidFill>
-                          <a:srgbClr val="000000"/>
-                        </a:solidFill>
-                        <a:effectLst/>
-                        <a:uFillTx/>
-                        <a:latin typeface="Arial"/>
-                      </a:endParaRPr>
-                    </a:p>
-                  </a:txBody>
-                  <a:tcPr marL="6480" marR="6480" anchor="ctr">
-                    <a:lnL w="6480">
-                      <a:solidFill>
-                        <a:srgbClr val="000000"/>
-                      </a:solidFill>
-                      <a:prstDash val="solid"/>
-                    </a:lnL>
-                    <a:lnR w="6480">
-                      <a:solidFill>
-                        <a:srgbClr val="000000"/>
-                      </a:solidFill>
-                      <a:prstDash val="solid"/>
-                    </a:lnR>
-                    <a:lnT w="12240">
-                      <a:noFill/>
-                      <a:prstDash val="solid"/>
-                    </a:lnT>
-                    <a:lnB w="6480">
-                      <a:solidFill>
-                        <a:srgbClr val="000000"/>
-                      </a:solidFill>
-                      <a:prstDash val="solid"/>
-                    </a:lnB>
-                    <a:solidFill>
-                      <a:schemeClr val="lt1"/>
-                    </a:solidFill>
-                  </a:tcPr>
-                </a:tc>
-                <a:tc>
-                  <a:txBody>
-                    <a:bodyPr/>
-                    <a:lstStyle/>
-                    <a:p>
-                      <a:pPr algn="ctr" defTabSz="914400">
-                        <a:lnSpc>
-                          <a:spcPct val="100000"/>
-                        </a:lnSpc>
-                      </a:pPr>
-                      <a:r>
-                        <a:rPr lang="ja-JP" sz="800" b="0" u="none" strike="noStrike">
-                          <a:solidFill>
-                            <a:srgbClr val="000000"/>
-                          </a:solidFill>
-                          <a:effectLst/>
-                          <a:uFillTx/>
-                          <a:latin typeface="メイリオ"/>
-                          <a:ea typeface="メイリオ"/>
-                        </a:rPr>
-                        <a:t>「電話恐怖症」を持つ人も。</a:t>
-                      </a:r>
-                      <a:endParaRPr lang="en-US" sz="800" b="0" u="none" strike="noStrike">
-                        <a:solidFill>
-                          <a:srgbClr val="000000"/>
-                        </a:solidFill>
-                        <a:effectLst/>
-                        <a:uFillTx/>
-                        <a:latin typeface="Arial"/>
-                      </a:endParaRPr>
-                    </a:p>
-                  </a:txBody>
-                  <a:tcPr marL="6480" marR="6480" anchor="ctr">
-                    <a:lnL w="6480">
-                      <a:solidFill>
-                        <a:srgbClr val="000000"/>
-                      </a:solidFill>
-                      <a:prstDash val="solid"/>
-                    </a:lnL>
-                    <a:lnR w="6480">
-                      <a:solidFill>
-                        <a:srgbClr val="000000"/>
-                      </a:solidFill>
-                      <a:prstDash val="solid"/>
-                    </a:lnR>
-                    <a:lnT w="12240">
-                      <a:noFill/>
-                      <a:prstDash val="solid"/>
-                    </a:lnT>
-                    <a:lnB w="6480">
-                      <a:solidFill>
-                        <a:srgbClr val="000000"/>
-                      </a:solidFill>
-                      <a:prstDash val="solid"/>
-                    </a:lnB>
-                    <a:solidFill>
-                      <a:schemeClr val="lt1"/>
-                    </a:solidFill>
-                  </a:tcPr>
-                </a:tc>
-                <a:tc vMerge="1">
-                  <a:txBody>
-                    <a:bodyPr/>
-                    <a:lstStyle/>
-                    <a:p>
-                      <a:endParaRPr lang="en-US" sz="1800" b="0" u="none" strike="noStrike">
-                        <a:solidFill>
-                          <a:srgbClr val="000000"/>
-                        </a:solidFill>
-                        <a:effectLst/>
-                        <a:uFillTx/>
-                        <a:latin typeface="Arial"/>
-                      </a:endParaRPr>
-                    </a:p>
-                  </a:txBody>
-                  <a:tcPr marL="90000" marR="90000">
-                    <a:lnL>
-                      <a:noFill/>
-                    </a:lnL>
-                    <a:lnR>
-                      <a:noFill/>
-                    </a:lnR>
-                    <a:lnT>
-                      <a:noFill/>
-                    </a:lnT>
-                    <a:lnB>
-                      <a:noFill/>
-                    </a:lnB>
-                    <a:solidFill>
-                      <a:srgbClr val="729FCF"/>
-                    </a:solidFill>
-                  </a:tcPr>
-                </a:tc>
-                <a:extLst>
-                  <a:ext uri="{0D108BD9-81ED-4DB2-BD59-A6C34878D82A}">
-                    <a16:rowId xmlns:a16="http://schemas.microsoft.com/office/drawing/2014/main" val="10002"/>
-                  </a:ext>
-                </a:extLst>
-              </a:tr>
-              <a:tr h="499320">
-                <a:tc rowSpan="2">
-                  <a:txBody>
-                    <a:bodyPr/>
-                    <a:lstStyle/>
-                    <a:p>
-                      <a:pPr defTabSz="914400">
-                        <a:lnSpc>
-                          <a:spcPct val="100000"/>
-                        </a:lnSpc>
-                      </a:pPr>
-                      <a:r>
-                        <a:rPr lang="ja-JP" sz="1050" b="1" u="none" strike="noStrike">
-                          <a:solidFill>
-                            <a:srgbClr val="000000"/>
-                          </a:solidFill>
-                          <a:effectLst/>
-                          <a:uFillTx/>
-                          <a:latin typeface="メイリオ"/>
-                          <a:ea typeface="メイリオ"/>
-                        </a:rPr>
-                        <a:t>　　　</a:t>
-                      </a:r>
-                      <a:r>
-                        <a:rPr lang="en-US" sz="1050" b="1" u="none" strike="noStrike">
-                          <a:solidFill>
-                            <a:srgbClr val="000000"/>
-                          </a:solidFill>
-                          <a:effectLst/>
-                          <a:uFillTx/>
-                          <a:latin typeface="メイリオ"/>
-                          <a:ea typeface="メイリオ"/>
-                        </a:rPr>
-                        <a:t>30</a:t>
-                      </a:r>
-                      <a:r>
-                        <a:rPr lang="ja-JP" sz="1050" b="1" u="none" strike="noStrike">
-                          <a:solidFill>
-                            <a:srgbClr val="000000"/>
-                          </a:solidFill>
-                          <a:effectLst/>
-                          <a:uFillTx/>
-                          <a:latin typeface="メイリオ"/>
-                          <a:ea typeface="メイリオ"/>
-                        </a:rPr>
-                        <a:t>代〜</a:t>
-                      </a:r>
-                      <a:r>
-                        <a:rPr lang="en-US" sz="1050" b="1" u="none" strike="noStrike">
-                          <a:solidFill>
-                            <a:srgbClr val="000000"/>
-                          </a:solidFill>
-                          <a:effectLst/>
-                          <a:uFillTx/>
-                          <a:latin typeface="メイリオ"/>
-                          <a:ea typeface="メイリオ"/>
-                        </a:rPr>
-                        <a:t>40</a:t>
-                      </a:r>
-                      <a:r>
-                        <a:rPr lang="ja-JP" sz="1050" b="1" u="none" strike="noStrike">
-                          <a:solidFill>
-                            <a:srgbClr val="000000"/>
-                          </a:solidFill>
-                          <a:effectLst/>
-                          <a:uFillTx/>
-                          <a:latin typeface="メイリオ"/>
-                          <a:ea typeface="メイリオ"/>
-                        </a:rPr>
-                        <a:t>代</a:t>
-                      </a:r>
-                      <a:endParaRPr lang="en-US" sz="1050" b="0" u="none" strike="noStrike">
-                        <a:solidFill>
-                          <a:srgbClr val="000000"/>
-                        </a:solidFill>
-                        <a:effectLst/>
-                        <a:uFillTx/>
-                        <a:latin typeface="Arial"/>
-                      </a:endParaRPr>
-                    </a:p>
-                  </a:txBody>
-                  <a:tcPr marL="6480" marR="6480" anchor="ctr">
-                    <a:lnL w="6480">
-                      <a:solidFill>
-                        <a:srgbClr val="000000"/>
-                      </a:solidFill>
-                      <a:prstDash val="solid"/>
-                    </a:lnL>
-                    <a:lnR w="6480">
-                      <a:solidFill>
-                        <a:srgbClr val="000000"/>
-                      </a:solidFill>
-                      <a:prstDash val="solid"/>
-                    </a:lnR>
-                    <a:lnT w="6480">
-                      <a:solidFill>
-                        <a:srgbClr val="000000"/>
-                      </a:solidFill>
-                      <a:prstDash val="solid"/>
-                    </a:lnT>
-                    <a:lnB w="6480">
-                      <a:solidFill>
-                        <a:srgbClr val="000000"/>
-                      </a:solidFill>
-                      <a:prstDash val="solid"/>
-                    </a:lnB>
-                    <a:solidFill>
-                      <a:srgbClr val="DAE9F8"/>
-                    </a:solidFill>
-                  </a:tcPr>
-                </a:tc>
-                <a:tc>
-                  <a:txBody>
-                    <a:bodyPr/>
-                    <a:lstStyle/>
-                    <a:p>
-                      <a:pPr algn="ctr" defTabSz="914400">
-                        <a:lnSpc>
-                          <a:spcPct val="100000"/>
-                        </a:lnSpc>
-                      </a:pPr>
-                      <a:r>
-                        <a:rPr lang="ja-JP" sz="1000" b="1" u="none" strike="noStrike">
-                          <a:solidFill>
-                            <a:srgbClr val="000000"/>
-                          </a:solidFill>
-                          <a:effectLst/>
-                          <a:uFillTx/>
-                          <a:latin typeface="メイリオ"/>
-                          <a:ea typeface="メイリオ"/>
-                        </a:rPr>
-                        <a:t>利用率：</a:t>
-                      </a:r>
-                      <a:r>
-                        <a:rPr lang="en-US" sz="1000" b="1" u="none" strike="noStrike">
-                          <a:solidFill>
-                            <a:srgbClr val="000000"/>
-                          </a:solidFill>
-                          <a:effectLst/>
-                          <a:uFillTx/>
-                          <a:latin typeface="メイリオ"/>
-                          <a:ea typeface="メイリオ"/>
-                        </a:rPr>
-                        <a:t>90%</a:t>
-                      </a:r>
-                      <a:r>
-                        <a:rPr lang="ja-JP" sz="1000" b="1" u="none" strike="noStrike">
-                          <a:solidFill>
-                            <a:srgbClr val="000000"/>
-                          </a:solidFill>
-                          <a:effectLst/>
-                          <a:uFillTx/>
-                          <a:latin typeface="メイリオ"/>
-                          <a:ea typeface="メイリオ"/>
-                        </a:rPr>
-                        <a:t>以上</a:t>
-                      </a:r>
-                      <a:endParaRPr lang="en-US" sz="1000" b="0" u="none" strike="noStrike">
-                        <a:solidFill>
-                          <a:srgbClr val="000000"/>
-                        </a:solidFill>
-                        <a:effectLst/>
-                        <a:uFillTx/>
-                        <a:latin typeface="Arial"/>
-                      </a:endParaRPr>
-                    </a:p>
-                  </a:txBody>
-                  <a:tcPr marL="6480" marR="6480" anchor="ctr">
-                    <a:lnL w="6480">
-                      <a:solidFill>
-                        <a:srgbClr val="000000"/>
-                      </a:solidFill>
-                      <a:prstDash val="solid"/>
-                    </a:lnL>
-                    <a:lnR w="6480">
-                      <a:solidFill>
-                        <a:srgbClr val="000000"/>
-                      </a:solidFill>
-                      <a:prstDash val="solid"/>
-                    </a:lnR>
-                    <a:lnT w="6480">
-                      <a:solidFill>
-                        <a:srgbClr val="000000"/>
-                      </a:solidFill>
-                      <a:prstDash val="solid"/>
-                    </a:lnT>
-                    <a:lnB w="6480">
-                      <a:noFill/>
-                      <a:prstDash val="solid"/>
-                    </a:lnB>
-                    <a:solidFill>
-                      <a:srgbClr val="FFFF99"/>
-                    </a:solidFill>
-                  </a:tcPr>
-                </a:tc>
-                <a:tc>
-                  <a:txBody>
-                    <a:bodyPr/>
-                    <a:lstStyle/>
-                    <a:p>
-                      <a:pPr algn="ctr" defTabSz="914400">
-                        <a:lnSpc>
-                          <a:spcPct val="100000"/>
-                        </a:lnSpc>
-                      </a:pPr>
-                      <a:r>
-                        <a:rPr lang="ja-JP" sz="1000" b="1" u="none" strike="noStrike">
-                          <a:solidFill>
-                            <a:srgbClr val="000000"/>
-                          </a:solidFill>
-                          <a:effectLst/>
-                          <a:uFillTx/>
-                          <a:latin typeface="メイリオ"/>
-                          <a:ea typeface="メイリオ"/>
-                        </a:rPr>
-                        <a:t>利用率：中〜高</a:t>
-                      </a:r>
-                      <a:endParaRPr lang="en-US" sz="1000" b="0" u="none" strike="noStrike">
-                        <a:solidFill>
-                          <a:srgbClr val="000000"/>
-                        </a:solidFill>
-                        <a:effectLst/>
-                        <a:uFillTx/>
-                        <a:latin typeface="Arial"/>
-                      </a:endParaRPr>
-                    </a:p>
-                  </a:txBody>
-                  <a:tcPr marL="6480" marR="6480" anchor="ctr">
-                    <a:lnL w="6480">
-                      <a:solidFill>
-                        <a:srgbClr val="000000"/>
-                      </a:solidFill>
-                      <a:prstDash val="solid"/>
-                    </a:lnL>
-                    <a:lnR w="6480">
-                      <a:solidFill>
-                        <a:srgbClr val="000000"/>
-                      </a:solidFill>
-                      <a:prstDash val="solid"/>
-                    </a:lnR>
-                    <a:lnT w="6480">
-                      <a:solidFill>
-                        <a:srgbClr val="000000"/>
-                      </a:solidFill>
-                      <a:prstDash val="solid"/>
-                    </a:lnT>
-                    <a:lnB w="6480">
-                      <a:noFill/>
-                      <a:prstDash val="solid"/>
-                    </a:lnB>
-                    <a:solidFill>
-                      <a:schemeClr val="lt1"/>
-                    </a:solidFill>
-                  </a:tcPr>
-                </a:tc>
-                <a:tc>
-                  <a:txBody>
-                    <a:bodyPr/>
-                    <a:lstStyle/>
-                    <a:p>
-                      <a:pPr algn="ctr" defTabSz="914400">
-                        <a:lnSpc>
-                          <a:spcPct val="100000"/>
-                        </a:lnSpc>
-                      </a:pPr>
-                      <a:r>
-                        <a:rPr lang="ja-JP" sz="1000" b="1" u="none" strike="noStrike">
-                          <a:solidFill>
-                            <a:srgbClr val="000000"/>
-                          </a:solidFill>
-                          <a:effectLst/>
-                          <a:uFillTx/>
-                          <a:latin typeface="メイリオ"/>
-                          <a:ea typeface="メイリオ"/>
-                        </a:rPr>
-                        <a:t>利用率：中</a:t>
-                      </a:r>
-                      <a:endParaRPr lang="en-US" sz="1000" b="0" u="none" strike="noStrike">
-                        <a:solidFill>
-                          <a:srgbClr val="000000"/>
-                        </a:solidFill>
-                        <a:effectLst/>
-                        <a:uFillTx/>
-                        <a:latin typeface="Arial"/>
-                      </a:endParaRPr>
-                    </a:p>
-                  </a:txBody>
-                  <a:tcPr marL="6480" marR="6480" anchor="ctr">
-                    <a:lnL w="6480">
-                      <a:solidFill>
-                        <a:srgbClr val="000000"/>
-                      </a:solidFill>
-                      <a:prstDash val="solid"/>
-                    </a:lnL>
-                    <a:lnR w="6480">
-                      <a:solidFill>
-                        <a:srgbClr val="000000"/>
-                      </a:solidFill>
-                      <a:prstDash val="solid"/>
-                    </a:lnR>
-                    <a:lnT w="6480">
-                      <a:solidFill>
-                        <a:srgbClr val="000000"/>
-                      </a:solidFill>
-                      <a:prstDash val="solid"/>
-                    </a:lnT>
-                    <a:lnB w="6480">
-                      <a:noFill/>
-                      <a:prstDash val="solid"/>
-                    </a:lnB>
-                    <a:solidFill>
-                      <a:schemeClr val="lt1"/>
-                    </a:solidFill>
-                  </a:tcPr>
-                </a:tc>
-                <a:tc rowSpan="2">
-                  <a:txBody>
-                    <a:bodyPr/>
-                    <a:lstStyle/>
-                    <a:p>
-                      <a:pPr algn="ctr" defTabSz="914400">
-                        <a:lnSpc>
-                          <a:spcPct val="100000"/>
-                        </a:lnSpc>
-                      </a:pPr>
-                      <a:r>
-                        <a:rPr lang="en-US" sz="800" b="0" u="none" strike="noStrike">
-                          <a:solidFill>
-                            <a:srgbClr val="000000"/>
-                          </a:solidFill>
-                          <a:effectLst/>
-                          <a:uFillTx/>
-                          <a:latin typeface="メイリオ"/>
-                          <a:ea typeface="メイリオ"/>
-                        </a:rPr>
-                        <a:t>Facebook</a:t>
-                      </a:r>
-                      <a:r>
-                        <a:rPr lang="ja-JP" sz="800" b="0" u="none" strike="noStrike">
-                          <a:solidFill>
-                            <a:srgbClr val="000000"/>
-                          </a:solidFill>
-                          <a:effectLst/>
-                          <a:uFillTx/>
-                          <a:latin typeface="メイリオ"/>
-                          <a:ea typeface="メイリオ"/>
-                        </a:rPr>
-                        <a:t>や</a:t>
-                      </a:r>
-                      <a:r>
-                        <a:rPr lang="en-US" sz="800" b="0" u="none" strike="noStrike">
-                          <a:solidFill>
-                            <a:srgbClr val="000000"/>
-                          </a:solidFill>
-                          <a:effectLst/>
-                          <a:uFillTx/>
-                          <a:latin typeface="メイリオ"/>
-                          <a:ea typeface="メイリオ"/>
-                        </a:rPr>
-                        <a:t>X</a:t>
-                      </a:r>
-                      <a:r>
-                        <a:rPr lang="ja-JP" sz="800" b="0" u="none" strike="noStrike">
-                          <a:solidFill>
-                            <a:srgbClr val="000000"/>
-                          </a:solidFill>
-                          <a:effectLst/>
-                          <a:uFillTx/>
-                          <a:latin typeface="メイリオ"/>
-                          <a:ea typeface="メイリオ"/>
-                        </a:rPr>
-                        <a:t>での情報収集が活発。</a:t>
-                      </a:r>
-                      <a:endParaRPr lang="en-US" sz="800" b="0" u="none" strike="noStrike">
-                        <a:solidFill>
-                          <a:srgbClr val="000000"/>
-                        </a:solidFill>
-                        <a:effectLst/>
-                        <a:uFillTx/>
-                        <a:latin typeface="Arial"/>
-                      </a:endParaRPr>
-                    </a:p>
-                  </a:txBody>
-                  <a:tcPr marL="6480" marR="6480" anchor="ctr">
-                    <a:lnL w="6480">
-                      <a:solidFill>
-                        <a:srgbClr val="000000"/>
-                      </a:solidFill>
-                      <a:prstDash val="solid"/>
-                    </a:lnL>
-                    <a:lnR w="6480">
-                      <a:solidFill>
-                        <a:srgbClr val="000000"/>
-                      </a:solidFill>
-                      <a:prstDash val="solid"/>
-                    </a:lnR>
-                    <a:lnT w="6480">
-                      <a:solidFill>
-                        <a:srgbClr val="000000"/>
-                      </a:solidFill>
-                      <a:prstDash val="solid"/>
-                    </a:lnT>
-                    <a:lnB w="6480">
-                      <a:solidFill>
-                        <a:srgbClr val="000000"/>
-                      </a:solidFill>
-                      <a:prstDash val="solid"/>
-                    </a:lnB>
-                    <a:noFill/>
-                  </a:tcPr>
-                </a:tc>
-                <a:extLst>
-                  <a:ext uri="{0D108BD9-81ED-4DB2-BD59-A6C34878D82A}">
-                    <a16:rowId xmlns:a16="http://schemas.microsoft.com/office/drawing/2014/main" val="10003"/>
-                  </a:ext>
-                </a:extLst>
-              </a:tr>
-              <a:tr h="499320">
-                <a:tc vMerge="1">
-                  <a:txBody>
-                    <a:bodyPr/>
-                    <a:lstStyle/>
-                    <a:p>
-                      <a:endParaRPr lang="en-US" sz="1800" b="0" u="none" strike="noStrike">
-                        <a:solidFill>
-                          <a:srgbClr val="000000"/>
-                        </a:solidFill>
-                        <a:effectLst/>
-                        <a:uFillTx/>
-                        <a:latin typeface="Arial"/>
-                      </a:endParaRPr>
-                    </a:p>
-                  </a:txBody>
-                  <a:tcPr marL="90000" marR="90000">
-                    <a:lnL>
-                      <a:noFill/>
-                    </a:lnL>
-                    <a:lnR>
-                      <a:noFill/>
-                    </a:lnR>
-                    <a:lnT>
-                      <a:noFill/>
-                    </a:lnT>
-                    <a:lnB>
-                      <a:noFill/>
-                    </a:lnB>
-                    <a:solidFill>
-                      <a:srgbClr val="729FCF"/>
-                    </a:solidFill>
-                  </a:tcPr>
-                </a:tc>
-                <a:tc>
-                  <a:txBody>
-                    <a:bodyPr/>
-                    <a:lstStyle/>
-                    <a:p>
-                      <a:pPr algn="ctr" defTabSz="914400">
-                        <a:lnSpc>
-                          <a:spcPct val="100000"/>
-                        </a:lnSpc>
-                      </a:pPr>
-                      <a:r>
-                        <a:rPr lang="ja-JP" sz="800" b="0" u="none" strike="noStrike">
-                          <a:solidFill>
-                            <a:srgbClr val="000000"/>
-                          </a:solidFill>
-                          <a:effectLst/>
-                          <a:uFillTx/>
-                          <a:latin typeface="メイリオ"/>
-                          <a:ea typeface="メイリオ"/>
-                        </a:rPr>
-                        <a:t>プライベートの連絡網。</a:t>
-                      </a:r>
-                      <a:endParaRPr lang="en-US" sz="800" b="0" u="none" strike="noStrike">
-                        <a:solidFill>
-                          <a:srgbClr val="000000"/>
-                        </a:solidFill>
-                        <a:effectLst/>
-                        <a:uFillTx/>
-                        <a:latin typeface="Arial"/>
-                      </a:endParaRPr>
-                    </a:p>
-                  </a:txBody>
-                  <a:tcPr marL="6480" marR="6480" anchor="ctr">
-                    <a:lnL w="6480">
-                      <a:solidFill>
-                        <a:srgbClr val="000000"/>
-                      </a:solidFill>
-                      <a:prstDash val="solid"/>
-                    </a:lnL>
-                    <a:lnR w="6480">
-                      <a:solidFill>
-                        <a:srgbClr val="000000"/>
-                      </a:solidFill>
-                      <a:prstDash val="solid"/>
-                    </a:lnR>
-                    <a:lnT w="12240">
-                      <a:noFill/>
-                      <a:prstDash val="solid"/>
-                    </a:lnT>
-                    <a:lnB w="6480">
-                      <a:solidFill>
-                        <a:srgbClr val="000000"/>
-                      </a:solidFill>
-                      <a:prstDash val="solid"/>
-                    </a:lnB>
-                    <a:solidFill>
-                      <a:srgbClr val="FFFF99"/>
-                    </a:solidFill>
-                  </a:tcPr>
-                </a:tc>
-                <a:tc>
-                  <a:txBody>
-                    <a:bodyPr/>
-                    <a:lstStyle/>
-                    <a:p>
-                      <a:pPr algn="ctr" defTabSz="914400">
-                        <a:lnSpc>
-                          <a:spcPct val="100000"/>
-                        </a:lnSpc>
-                      </a:pPr>
-                      <a:r>
-                        <a:rPr lang="ja-JP" sz="800" b="0" u="none" strike="noStrike">
-                          <a:solidFill>
-                            <a:srgbClr val="000000"/>
-                          </a:solidFill>
-                          <a:effectLst/>
-                          <a:uFillTx/>
-                          <a:latin typeface="メイリオ"/>
-                          <a:ea typeface="メイリオ"/>
-                        </a:rPr>
-                        <a:t>仕事や、メルマガでの</a:t>
-                      </a:r>
-                      <a:endParaRPr lang="en-US" sz="800" b="0" u="none" strike="noStrike">
-                        <a:solidFill>
-                          <a:srgbClr val="000000"/>
-                        </a:solidFill>
-                        <a:effectLst/>
-                        <a:uFillTx/>
-                        <a:latin typeface="Arial"/>
-                      </a:endParaRPr>
-                    </a:p>
-                    <a:p>
-                      <a:pPr algn="ctr" defTabSz="914400">
-                        <a:lnSpc>
-                          <a:spcPct val="100000"/>
-                        </a:lnSpc>
-                      </a:pPr>
-                      <a:r>
-                        <a:rPr lang="ja-JP" sz="800" b="0" u="none" strike="noStrike">
-                          <a:solidFill>
-                            <a:srgbClr val="000000"/>
-                          </a:solidFill>
-                          <a:effectLst/>
-                          <a:uFillTx/>
-                          <a:latin typeface="メイリオ"/>
-                          <a:ea typeface="メイリオ"/>
-                        </a:rPr>
-                        <a:t>セールス情報に抵抗なし。</a:t>
-                      </a:r>
-                      <a:endParaRPr lang="en-US" sz="800" b="0" u="none" strike="noStrike">
-                        <a:solidFill>
-                          <a:srgbClr val="000000"/>
-                        </a:solidFill>
-                        <a:effectLst/>
-                        <a:uFillTx/>
-                        <a:latin typeface="Arial"/>
-                      </a:endParaRPr>
-                    </a:p>
-                  </a:txBody>
-                  <a:tcPr marL="6480" marR="6480" anchor="ctr">
-                    <a:lnL w="6480">
-                      <a:solidFill>
-                        <a:srgbClr val="000000"/>
-                      </a:solidFill>
-                      <a:prstDash val="solid"/>
-                    </a:lnL>
-                    <a:lnR w="6480">
-                      <a:solidFill>
-                        <a:srgbClr val="000000"/>
-                      </a:solidFill>
-                      <a:prstDash val="solid"/>
-                    </a:lnR>
-                    <a:lnT w="12240">
-                      <a:noFill/>
-                      <a:prstDash val="solid"/>
-                    </a:lnT>
-                    <a:lnB w="6480">
-                      <a:solidFill>
-                        <a:srgbClr val="000000"/>
-                      </a:solidFill>
-                      <a:prstDash val="solid"/>
-                    </a:lnB>
-                    <a:solidFill>
-                      <a:schemeClr val="lt1"/>
-                    </a:solidFill>
-                  </a:tcPr>
-                </a:tc>
-                <a:tc>
-                  <a:txBody>
-                    <a:bodyPr/>
-                    <a:lstStyle/>
-                    <a:p>
-                      <a:pPr algn="ctr" defTabSz="914400">
-                        <a:lnSpc>
-                          <a:spcPct val="100000"/>
-                        </a:lnSpc>
-                      </a:pPr>
-                      <a:r>
-                        <a:rPr lang="ja-JP" sz="800" b="0" u="none" strike="noStrike">
-                          <a:solidFill>
-                            <a:srgbClr val="000000"/>
-                          </a:solidFill>
-                          <a:effectLst/>
-                          <a:uFillTx/>
-                          <a:latin typeface="メイリオ"/>
-                          <a:ea typeface="メイリオ"/>
-                        </a:rPr>
-                        <a:t>プライベートでは減少傾向も</a:t>
-                      </a:r>
-                      <a:endParaRPr lang="en-US" sz="800" b="0" u="none" strike="noStrike">
-                        <a:solidFill>
-                          <a:srgbClr val="000000"/>
-                        </a:solidFill>
-                        <a:effectLst/>
-                        <a:uFillTx/>
-                        <a:latin typeface="Arial"/>
-                      </a:endParaRPr>
-                    </a:p>
-                    <a:p>
-                      <a:pPr algn="ctr" defTabSz="914400">
-                        <a:lnSpc>
-                          <a:spcPct val="100000"/>
-                        </a:lnSpc>
-                      </a:pPr>
-                      <a:r>
-                        <a:rPr lang="ja-JP" sz="800" b="0" u="none" strike="noStrike">
-                          <a:solidFill>
-                            <a:srgbClr val="000000"/>
-                          </a:solidFill>
-                          <a:effectLst/>
-                          <a:uFillTx/>
-                          <a:latin typeface="メイリオ"/>
-                          <a:ea typeface="メイリオ"/>
-                        </a:rPr>
-                        <a:t>仕事では必須。</a:t>
-                      </a:r>
-                      <a:endParaRPr lang="en-US" sz="800" b="0" u="none" strike="noStrike">
-                        <a:solidFill>
-                          <a:srgbClr val="000000"/>
-                        </a:solidFill>
-                        <a:effectLst/>
-                        <a:uFillTx/>
-                        <a:latin typeface="Arial"/>
-                      </a:endParaRPr>
-                    </a:p>
-                  </a:txBody>
-                  <a:tcPr marL="6480" marR="6480" anchor="ctr">
-                    <a:lnL w="6480">
-                      <a:solidFill>
-                        <a:srgbClr val="000000"/>
-                      </a:solidFill>
-                      <a:prstDash val="solid"/>
-                    </a:lnL>
-                    <a:lnR w="6480">
-                      <a:solidFill>
-                        <a:srgbClr val="000000"/>
-                      </a:solidFill>
-                      <a:prstDash val="solid"/>
-                    </a:lnR>
-                    <a:lnT w="12240">
-                      <a:noFill/>
-                      <a:prstDash val="solid"/>
-                    </a:lnT>
-                    <a:lnB w="6480">
-                      <a:solidFill>
-                        <a:srgbClr val="000000"/>
-                      </a:solidFill>
-                      <a:prstDash val="solid"/>
-                    </a:lnB>
-                    <a:solidFill>
-                      <a:schemeClr val="lt1"/>
-                    </a:solidFill>
-                  </a:tcPr>
-                </a:tc>
-                <a:tc vMerge="1">
-                  <a:txBody>
-                    <a:bodyPr/>
-                    <a:lstStyle/>
-                    <a:p>
-                      <a:endParaRPr lang="en-US" sz="1800" b="0" u="none" strike="noStrike">
-                        <a:solidFill>
-                          <a:srgbClr val="000000"/>
-                        </a:solidFill>
-                        <a:effectLst/>
-                        <a:uFillTx/>
-                        <a:latin typeface="Arial"/>
-                      </a:endParaRPr>
-                    </a:p>
-                  </a:txBody>
-                  <a:tcPr marL="90000" marR="90000">
-                    <a:lnL>
-                      <a:noFill/>
-                    </a:lnL>
-                    <a:lnR>
-                      <a:noFill/>
-                    </a:lnR>
-                    <a:lnT>
-                      <a:noFill/>
-                    </a:lnT>
-                    <a:lnB>
-                      <a:noFill/>
-                    </a:lnB>
-                    <a:solidFill>
-                      <a:srgbClr val="729FCF"/>
-                    </a:solidFill>
-                  </a:tcPr>
-                </a:tc>
-                <a:extLst>
-                  <a:ext uri="{0D108BD9-81ED-4DB2-BD59-A6C34878D82A}">
-                    <a16:rowId xmlns:a16="http://schemas.microsoft.com/office/drawing/2014/main" val="10004"/>
-                  </a:ext>
-                </a:extLst>
-              </a:tr>
-              <a:tr h="499320">
-                <a:tc rowSpan="2">
-                  <a:txBody>
-                    <a:bodyPr/>
-                    <a:lstStyle/>
-                    <a:p>
-                      <a:pPr defTabSz="914400">
-                        <a:lnSpc>
-                          <a:spcPct val="100000"/>
-                        </a:lnSpc>
-                      </a:pPr>
-                      <a:r>
-                        <a:rPr lang="ja-JP" sz="1050" b="1" u="none" strike="noStrike">
-                          <a:solidFill>
-                            <a:srgbClr val="000000"/>
-                          </a:solidFill>
-                          <a:effectLst/>
-                          <a:uFillTx/>
-                          <a:latin typeface="メイリオ"/>
-                          <a:ea typeface="メイリオ"/>
-                        </a:rPr>
-                        <a:t>　　　</a:t>
-                      </a:r>
-                      <a:r>
-                        <a:rPr lang="en-US" sz="1050" b="1" u="none" strike="noStrike">
-                          <a:solidFill>
-                            <a:srgbClr val="000000"/>
-                          </a:solidFill>
-                          <a:effectLst/>
-                          <a:uFillTx/>
-                          <a:latin typeface="メイリオ"/>
-                          <a:ea typeface="メイリオ"/>
-                        </a:rPr>
-                        <a:t>50</a:t>
-                      </a:r>
-                      <a:r>
-                        <a:rPr lang="ja-JP" sz="1050" b="1" u="none" strike="noStrike">
-                          <a:solidFill>
-                            <a:srgbClr val="000000"/>
-                          </a:solidFill>
-                          <a:effectLst/>
-                          <a:uFillTx/>
-                          <a:latin typeface="メイリオ"/>
-                          <a:ea typeface="メイリオ"/>
-                        </a:rPr>
-                        <a:t>代〜</a:t>
-                      </a:r>
-                      <a:r>
-                        <a:rPr lang="en-US" sz="1050" b="1" u="none" strike="noStrike">
-                          <a:solidFill>
-                            <a:srgbClr val="000000"/>
-                          </a:solidFill>
-                          <a:effectLst/>
-                          <a:uFillTx/>
-                          <a:latin typeface="メイリオ"/>
-                          <a:ea typeface="メイリオ"/>
-                        </a:rPr>
-                        <a:t>60</a:t>
-                      </a:r>
-                      <a:r>
-                        <a:rPr lang="ja-JP" sz="1050" b="1" u="none" strike="noStrike">
-                          <a:solidFill>
-                            <a:srgbClr val="000000"/>
-                          </a:solidFill>
-                          <a:effectLst/>
-                          <a:uFillTx/>
-                          <a:latin typeface="メイリオ"/>
-                          <a:ea typeface="メイリオ"/>
-                        </a:rPr>
-                        <a:t>代</a:t>
-                      </a:r>
-                      <a:endParaRPr lang="en-US" sz="1050" b="0" u="none" strike="noStrike">
-                        <a:solidFill>
-                          <a:srgbClr val="000000"/>
-                        </a:solidFill>
-                        <a:effectLst/>
-                        <a:uFillTx/>
-                        <a:latin typeface="Arial"/>
-                      </a:endParaRPr>
-                    </a:p>
-                  </a:txBody>
-                  <a:tcPr marL="6480" marR="6480" anchor="ctr">
-                    <a:lnL w="6480">
-                      <a:solidFill>
-                        <a:srgbClr val="000000"/>
-                      </a:solidFill>
-                      <a:prstDash val="solid"/>
-                    </a:lnL>
-                    <a:lnR w="6480">
-                      <a:solidFill>
-                        <a:srgbClr val="000000"/>
-                      </a:solidFill>
-                      <a:prstDash val="solid"/>
-                    </a:lnR>
-                    <a:lnT w="6480">
-                      <a:solidFill>
-                        <a:srgbClr val="000000"/>
-                      </a:solidFill>
-                      <a:prstDash val="solid"/>
-                    </a:lnT>
-                    <a:lnB w="6480">
-                      <a:solidFill>
-                        <a:srgbClr val="000000"/>
-                      </a:solidFill>
-                      <a:prstDash val="solid"/>
-                    </a:lnB>
-                    <a:solidFill>
-                      <a:srgbClr val="DAE9F8"/>
-                    </a:solidFill>
-                  </a:tcPr>
-                </a:tc>
-                <a:tc>
-                  <a:txBody>
-                    <a:bodyPr/>
-                    <a:lstStyle/>
-                    <a:p>
-                      <a:pPr algn="ctr" defTabSz="914400">
-                        <a:lnSpc>
-                          <a:spcPct val="100000"/>
-                        </a:lnSpc>
-                      </a:pPr>
-                      <a:r>
-                        <a:rPr lang="ja-JP" sz="1000" b="1" u="none" strike="noStrike">
-                          <a:solidFill>
-                            <a:srgbClr val="000000"/>
-                          </a:solidFill>
-                          <a:effectLst/>
-                          <a:uFillTx/>
-                          <a:latin typeface="メイリオ"/>
-                          <a:ea typeface="メイリオ"/>
-                        </a:rPr>
-                        <a:t>利用率：</a:t>
-                      </a:r>
-                      <a:r>
-                        <a:rPr lang="en-US" sz="1000" b="1" u="none" strike="noStrike">
-                          <a:solidFill>
-                            <a:srgbClr val="000000"/>
-                          </a:solidFill>
-                          <a:effectLst/>
-                          <a:uFillTx/>
-                          <a:latin typeface="メイリオ"/>
-                          <a:ea typeface="メイリオ"/>
-                        </a:rPr>
-                        <a:t>80%</a:t>
-                      </a:r>
-                      <a:r>
-                        <a:rPr lang="ja-JP" sz="1000" b="1" u="none" strike="noStrike">
-                          <a:solidFill>
-                            <a:srgbClr val="000000"/>
-                          </a:solidFill>
-                          <a:effectLst/>
-                          <a:uFillTx/>
-                          <a:latin typeface="メイリオ"/>
-                          <a:ea typeface="メイリオ"/>
-                        </a:rPr>
-                        <a:t>〜</a:t>
-                      </a:r>
-                      <a:r>
-                        <a:rPr lang="en-US" sz="1000" b="1" u="none" strike="noStrike">
-                          <a:solidFill>
-                            <a:srgbClr val="000000"/>
-                          </a:solidFill>
-                          <a:effectLst/>
-                          <a:uFillTx/>
-                          <a:latin typeface="メイリオ"/>
-                          <a:ea typeface="メイリオ"/>
-                        </a:rPr>
-                        <a:t>90%</a:t>
-                      </a:r>
-                      <a:endParaRPr lang="en-US" sz="1000" b="0" u="none" strike="noStrike">
-                        <a:solidFill>
-                          <a:srgbClr val="000000"/>
-                        </a:solidFill>
-                        <a:effectLst/>
-                        <a:uFillTx/>
-                        <a:latin typeface="Arial"/>
-                      </a:endParaRPr>
-                    </a:p>
-                  </a:txBody>
-                  <a:tcPr marL="6480" marR="6480" anchor="ctr">
-                    <a:lnL w="6480">
-                      <a:solidFill>
-                        <a:srgbClr val="000000"/>
-                      </a:solidFill>
-                      <a:prstDash val="solid"/>
-                    </a:lnL>
-                    <a:lnR w="6480">
-                      <a:solidFill>
-                        <a:srgbClr val="000000"/>
-                      </a:solidFill>
-                      <a:prstDash val="solid"/>
-                    </a:lnR>
-                    <a:lnT w="6480">
-                      <a:solidFill>
-                        <a:srgbClr val="000000"/>
-                      </a:solidFill>
-                      <a:prstDash val="solid"/>
-                    </a:lnT>
-                    <a:lnB w="6480">
-                      <a:noFill/>
-                      <a:prstDash val="solid"/>
-                    </a:lnB>
-                    <a:solidFill>
-                      <a:srgbClr val="FFFF99"/>
-                    </a:solidFill>
-                  </a:tcPr>
-                </a:tc>
-                <a:tc>
-                  <a:txBody>
-                    <a:bodyPr/>
-                    <a:lstStyle/>
-                    <a:p>
-                      <a:pPr algn="ctr" defTabSz="914400">
-                        <a:lnSpc>
-                          <a:spcPct val="100000"/>
-                        </a:lnSpc>
-                      </a:pPr>
-                      <a:r>
-                        <a:rPr lang="ja-JP" sz="1000" b="1" u="none" strike="noStrike">
-                          <a:solidFill>
-                            <a:srgbClr val="000000"/>
-                          </a:solidFill>
-                          <a:effectLst/>
-                          <a:uFillTx/>
-                          <a:latin typeface="メイリオ"/>
-                          <a:ea typeface="メイリオ"/>
-                        </a:rPr>
-                        <a:t>利用率：高い</a:t>
-                      </a:r>
-                      <a:endParaRPr lang="en-US" sz="1000" b="0" u="none" strike="noStrike">
-                        <a:solidFill>
-                          <a:srgbClr val="000000"/>
-                        </a:solidFill>
-                        <a:effectLst/>
-                        <a:uFillTx/>
-                        <a:latin typeface="Arial"/>
-                      </a:endParaRPr>
-                    </a:p>
-                  </a:txBody>
-                  <a:tcPr marL="6480" marR="6480" anchor="ctr">
-                    <a:lnL w="6480">
-                      <a:solidFill>
-                        <a:srgbClr val="000000"/>
-                      </a:solidFill>
-                      <a:prstDash val="solid"/>
-                    </a:lnL>
-                    <a:lnR w="6480">
-                      <a:solidFill>
-                        <a:srgbClr val="000000"/>
-                      </a:solidFill>
-                      <a:prstDash val="solid"/>
-                    </a:lnR>
-                    <a:lnT w="6480">
-                      <a:solidFill>
-                        <a:srgbClr val="000000"/>
-                      </a:solidFill>
-                      <a:prstDash val="solid"/>
-                    </a:lnT>
-                    <a:lnB w="6480">
-                      <a:noFill/>
-                      <a:prstDash val="solid"/>
-                    </a:lnB>
-                    <a:solidFill>
-                      <a:schemeClr val="lt1"/>
-                    </a:solidFill>
-                  </a:tcPr>
-                </a:tc>
-                <a:tc>
-                  <a:txBody>
-                    <a:bodyPr/>
-                    <a:lstStyle/>
-                    <a:p>
-                      <a:pPr algn="ctr" defTabSz="914400">
-                        <a:lnSpc>
-                          <a:spcPct val="100000"/>
-                        </a:lnSpc>
-                      </a:pPr>
-                      <a:r>
-                        <a:rPr lang="ja-JP" sz="1000" b="1" u="none" strike="noStrike">
-                          <a:solidFill>
-                            <a:srgbClr val="000000"/>
-                          </a:solidFill>
-                          <a:effectLst/>
-                          <a:uFillTx/>
-                          <a:latin typeface="メイリオ"/>
-                          <a:ea typeface="メイリオ"/>
-                        </a:rPr>
-                        <a:t>利用率：高い</a:t>
-                      </a:r>
-                      <a:endParaRPr lang="en-US" sz="1000" b="0" u="none" strike="noStrike">
-                        <a:solidFill>
-                          <a:srgbClr val="000000"/>
-                        </a:solidFill>
-                        <a:effectLst/>
-                        <a:uFillTx/>
-                        <a:latin typeface="Arial"/>
-                      </a:endParaRPr>
-                    </a:p>
-                  </a:txBody>
-                  <a:tcPr marL="6480" marR="6480" anchor="ctr">
-                    <a:lnL w="6480">
-                      <a:solidFill>
-                        <a:srgbClr val="000000"/>
-                      </a:solidFill>
-                      <a:prstDash val="solid"/>
-                    </a:lnL>
-                    <a:lnR w="6480">
-                      <a:solidFill>
-                        <a:srgbClr val="000000"/>
-                      </a:solidFill>
-                      <a:prstDash val="solid"/>
-                    </a:lnR>
-                    <a:lnT w="6480">
-                      <a:solidFill>
-                        <a:srgbClr val="000000"/>
-                      </a:solidFill>
-                      <a:prstDash val="solid"/>
-                    </a:lnT>
-                    <a:lnB w="6480">
-                      <a:noFill/>
-                      <a:prstDash val="solid"/>
-                    </a:lnB>
-                    <a:solidFill>
-                      <a:schemeClr val="lt1"/>
-                    </a:solidFill>
-                  </a:tcPr>
-                </a:tc>
-                <a:tc rowSpan="2">
-                  <a:txBody>
-                    <a:bodyPr/>
-                    <a:lstStyle/>
-                    <a:p>
-                      <a:pPr algn="ctr" defTabSz="914400">
-                        <a:lnSpc>
-                          <a:spcPct val="100000"/>
-                        </a:lnSpc>
-                      </a:pPr>
-                      <a:r>
-                        <a:rPr lang="en-US" sz="800" b="0" u="none" strike="noStrike">
-                          <a:solidFill>
-                            <a:srgbClr val="000000"/>
-                          </a:solidFill>
-                          <a:effectLst/>
-                          <a:uFillTx/>
-                          <a:latin typeface="メイリオ"/>
-                          <a:ea typeface="メイリオ"/>
-                        </a:rPr>
-                        <a:t>YouTube</a:t>
-                      </a:r>
-                      <a:r>
-                        <a:rPr lang="ja-JP" sz="800" b="0" u="none" strike="noStrike">
-                          <a:solidFill>
-                            <a:srgbClr val="000000"/>
-                          </a:solidFill>
-                          <a:effectLst/>
-                          <a:uFillTx/>
-                          <a:latin typeface="メイリオ"/>
-                          <a:ea typeface="メイリオ"/>
-                        </a:rPr>
-                        <a:t>での趣味動画視聴も普及。</a:t>
-                      </a:r>
-                      <a:endParaRPr lang="en-US" sz="800" b="0" u="none" strike="noStrike">
-                        <a:solidFill>
-                          <a:srgbClr val="000000"/>
-                        </a:solidFill>
-                        <a:effectLst/>
-                        <a:uFillTx/>
-                        <a:latin typeface="Arial"/>
-                      </a:endParaRPr>
-                    </a:p>
-                  </a:txBody>
-                  <a:tcPr marL="6480" marR="6480" anchor="ctr">
-                    <a:lnL w="6480">
-                      <a:solidFill>
-                        <a:srgbClr val="000000"/>
-                      </a:solidFill>
-                      <a:prstDash val="solid"/>
-                    </a:lnL>
-                    <a:lnR w="6480">
-                      <a:solidFill>
-                        <a:srgbClr val="000000"/>
-                      </a:solidFill>
-                      <a:prstDash val="solid"/>
-                    </a:lnR>
-                    <a:lnT w="6480">
-                      <a:solidFill>
-                        <a:srgbClr val="000000"/>
-                      </a:solidFill>
-                      <a:prstDash val="solid"/>
-                    </a:lnT>
-                    <a:lnB w="6480">
-                      <a:solidFill>
-                        <a:srgbClr val="000000"/>
-                      </a:solidFill>
-                      <a:prstDash val="solid"/>
-                    </a:lnB>
-                    <a:noFill/>
-                  </a:tcPr>
-                </a:tc>
-                <a:extLst>
-                  <a:ext uri="{0D108BD9-81ED-4DB2-BD59-A6C34878D82A}">
-                    <a16:rowId xmlns:a16="http://schemas.microsoft.com/office/drawing/2014/main" val="10005"/>
-                  </a:ext>
-                </a:extLst>
-              </a:tr>
-              <a:tr h="499320">
-                <a:tc vMerge="1">
-                  <a:txBody>
-                    <a:bodyPr/>
-                    <a:lstStyle/>
-                    <a:p>
-                      <a:endParaRPr lang="en-US" sz="1800" b="0" u="none" strike="noStrike">
-                        <a:solidFill>
-                          <a:srgbClr val="000000"/>
-                        </a:solidFill>
-                        <a:effectLst/>
-                        <a:uFillTx/>
-                        <a:latin typeface="Arial"/>
-                      </a:endParaRPr>
-                    </a:p>
-                  </a:txBody>
-                  <a:tcPr marL="90000" marR="90000">
-                    <a:lnL>
-                      <a:noFill/>
-                    </a:lnL>
-                    <a:lnR>
-                      <a:noFill/>
-                    </a:lnR>
-                    <a:lnT>
-                      <a:noFill/>
-                    </a:lnT>
-                    <a:lnB>
-                      <a:noFill/>
-                    </a:lnB>
-                    <a:solidFill>
-                      <a:srgbClr val="729FCF"/>
-                    </a:solidFill>
-                  </a:tcPr>
-                </a:tc>
-                <a:tc>
-                  <a:txBody>
-                    <a:bodyPr/>
-                    <a:lstStyle/>
-                    <a:p>
-                      <a:pPr algn="ctr" defTabSz="914400">
-                        <a:lnSpc>
-                          <a:spcPct val="100000"/>
-                        </a:lnSpc>
-                      </a:pPr>
-                      <a:r>
-                        <a:rPr lang="ja-JP" sz="800" b="0" u="none" strike="noStrike">
-                          <a:solidFill>
-                            <a:srgbClr val="000000"/>
-                          </a:solidFill>
-                          <a:effectLst/>
-                          <a:uFillTx/>
-                          <a:latin typeface="メイリオ"/>
-                          <a:ea typeface="メイリオ"/>
-                        </a:rPr>
-                        <a:t>家族や友人との連絡で定着。</a:t>
-                      </a:r>
-                      <a:endParaRPr lang="en-US" sz="800" b="0" u="none" strike="noStrike">
-                        <a:solidFill>
-                          <a:srgbClr val="000000"/>
-                        </a:solidFill>
-                        <a:effectLst/>
-                        <a:uFillTx/>
-                        <a:latin typeface="Arial"/>
-                      </a:endParaRPr>
-                    </a:p>
-                  </a:txBody>
-                  <a:tcPr marL="6480" marR="6480" anchor="ctr">
-                    <a:lnL w="6480">
-                      <a:solidFill>
-                        <a:srgbClr val="000000"/>
-                      </a:solidFill>
-                      <a:prstDash val="solid"/>
-                    </a:lnL>
-                    <a:lnR w="6480">
-                      <a:solidFill>
-                        <a:srgbClr val="000000"/>
-                      </a:solidFill>
-                      <a:prstDash val="solid"/>
-                    </a:lnR>
-                    <a:lnT w="12240">
-                      <a:noFill/>
-                      <a:prstDash val="solid"/>
-                    </a:lnT>
-                    <a:lnB w="6480">
-                      <a:solidFill>
-                        <a:srgbClr val="000000"/>
-                      </a:solidFill>
-                      <a:prstDash val="solid"/>
-                    </a:lnB>
-                    <a:solidFill>
-                      <a:srgbClr val="FFFF99"/>
-                    </a:solidFill>
-                  </a:tcPr>
-                </a:tc>
-                <a:tc>
-                  <a:txBody>
-                    <a:bodyPr/>
-                    <a:lstStyle/>
-                    <a:p>
-                      <a:pPr algn="ctr" defTabSz="914400">
-                        <a:lnSpc>
-                          <a:spcPct val="100000"/>
-                        </a:lnSpc>
-                      </a:pPr>
-                      <a:r>
-                        <a:rPr lang="ja-JP" sz="800" b="0" u="none" strike="noStrike">
-                          <a:solidFill>
-                            <a:srgbClr val="000000"/>
-                          </a:solidFill>
-                          <a:effectLst/>
-                          <a:uFillTx/>
-                          <a:latin typeface="メイリオ"/>
-                          <a:ea typeface="メイリオ"/>
-                        </a:rPr>
-                        <a:t>最も好まれる企業からの</a:t>
-                      </a:r>
-                      <a:endParaRPr lang="en-US" sz="800" b="0" u="none" strike="noStrike">
-                        <a:solidFill>
-                          <a:srgbClr val="000000"/>
-                        </a:solidFill>
-                        <a:effectLst/>
-                        <a:uFillTx/>
-                        <a:latin typeface="Arial"/>
-                      </a:endParaRPr>
-                    </a:p>
-                    <a:p>
-                      <a:pPr algn="ctr" defTabSz="914400">
-                        <a:lnSpc>
-                          <a:spcPct val="100000"/>
-                        </a:lnSpc>
-                      </a:pPr>
-                      <a:r>
-                        <a:rPr lang="ja-JP" sz="800" b="0" u="none" strike="noStrike">
-                          <a:solidFill>
-                            <a:srgbClr val="000000"/>
-                          </a:solidFill>
-                          <a:effectLst/>
-                          <a:uFillTx/>
-                          <a:latin typeface="メイリオ"/>
-                          <a:ea typeface="メイリオ"/>
-                        </a:rPr>
-                        <a:t>情報受取ツール。</a:t>
-                      </a:r>
-                      <a:endParaRPr lang="en-US" sz="800" b="0" u="none" strike="noStrike">
-                        <a:solidFill>
-                          <a:srgbClr val="000000"/>
-                        </a:solidFill>
-                        <a:effectLst/>
-                        <a:uFillTx/>
-                        <a:latin typeface="Arial"/>
-                      </a:endParaRPr>
-                    </a:p>
-                  </a:txBody>
-                  <a:tcPr marL="6480" marR="6480" anchor="ctr">
-                    <a:lnL w="6480">
-                      <a:solidFill>
-                        <a:srgbClr val="000000"/>
-                      </a:solidFill>
-                      <a:prstDash val="solid"/>
-                    </a:lnL>
-                    <a:lnR w="6480">
-                      <a:solidFill>
-                        <a:srgbClr val="000000"/>
-                      </a:solidFill>
-                      <a:prstDash val="solid"/>
-                    </a:lnR>
-                    <a:lnT w="12240">
-                      <a:noFill/>
-                      <a:prstDash val="solid"/>
-                    </a:lnT>
-                    <a:lnB w="6480">
-                      <a:solidFill>
-                        <a:srgbClr val="000000"/>
-                      </a:solidFill>
-                      <a:prstDash val="solid"/>
-                    </a:lnB>
-                    <a:solidFill>
-                      <a:schemeClr val="lt1"/>
-                    </a:solidFill>
-                  </a:tcPr>
-                </a:tc>
-                <a:tc>
-                  <a:txBody>
-                    <a:bodyPr/>
-                    <a:lstStyle/>
-                    <a:p>
-                      <a:pPr algn="ctr" defTabSz="914400">
-                        <a:lnSpc>
-                          <a:spcPct val="100000"/>
-                        </a:lnSpc>
-                      </a:pPr>
-                      <a:r>
-                        <a:rPr lang="ja-JP" sz="800" b="0" u="none" strike="noStrike">
-                          <a:solidFill>
-                            <a:srgbClr val="000000"/>
-                          </a:solidFill>
-                          <a:effectLst/>
-                          <a:uFillTx/>
-                          <a:latin typeface="メイリオ"/>
-                          <a:ea typeface="メイリオ"/>
-                        </a:rPr>
-                        <a:t>予約や急ぎの用件で信頼性が高い。</a:t>
-                      </a:r>
-                      <a:endParaRPr lang="en-US" sz="800" b="0" u="none" strike="noStrike">
-                        <a:solidFill>
-                          <a:srgbClr val="000000"/>
-                        </a:solidFill>
-                        <a:effectLst/>
-                        <a:uFillTx/>
-                        <a:latin typeface="Arial"/>
-                      </a:endParaRPr>
-                    </a:p>
-                  </a:txBody>
-                  <a:tcPr marL="6480" marR="6480" anchor="ctr">
-                    <a:lnL w="6480">
-                      <a:solidFill>
-                        <a:srgbClr val="000000"/>
-                      </a:solidFill>
-                      <a:prstDash val="solid"/>
-                    </a:lnL>
-                    <a:lnR w="6480">
-                      <a:solidFill>
-                        <a:srgbClr val="000000"/>
-                      </a:solidFill>
-                      <a:prstDash val="solid"/>
-                    </a:lnR>
-                    <a:lnT w="12240">
-                      <a:noFill/>
-                      <a:prstDash val="solid"/>
-                    </a:lnT>
-                    <a:lnB w="6480">
-                      <a:solidFill>
-                        <a:srgbClr val="000000"/>
-                      </a:solidFill>
-                      <a:prstDash val="solid"/>
-                    </a:lnB>
-                    <a:solidFill>
-                      <a:schemeClr val="lt1"/>
-                    </a:solidFill>
-                  </a:tcPr>
-                </a:tc>
-                <a:tc vMerge="1">
-                  <a:txBody>
-                    <a:bodyPr/>
-                    <a:lstStyle/>
-                    <a:p>
-                      <a:endParaRPr lang="en-US" sz="1800" b="0" u="none" strike="noStrike">
-                        <a:solidFill>
-                          <a:srgbClr val="000000"/>
-                        </a:solidFill>
-                        <a:effectLst/>
-                        <a:uFillTx/>
-                        <a:latin typeface="Arial"/>
-                      </a:endParaRPr>
-                    </a:p>
-                  </a:txBody>
-                  <a:tcPr marL="90000" marR="90000">
-                    <a:lnL>
-                      <a:noFill/>
-                    </a:lnL>
-                    <a:lnR>
-                      <a:noFill/>
-                    </a:lnR>
-                    <a:lnT>
-                      <a:noFill/>
-                    </a:lnT>
-                    <a:lnB>
-                      <a:noFill/>
-                    </a:lnB>
-                    <a:solidFill>
-                      <a:srgbClr val="729FCF"/>
-                    </a:solidFill>
-                  </a:tcPr>
-                </a:tc>
-                <a:extLst>
-                  <a:ext uri="{0D108BD9-81ED-4DB2-BD59-A6C34878D82A}">
-                    <a16:rowId xmlns:a16="http://schemas.microsoft.com/office/drawing/2014/main" val="10006"/>
-                  </a:ext>
-                </a:extLst>
-              </a:tr>
-              <a:tr h="499320">
-                <a:tc rowSpan="2">
-                  <a:txBody>
-                    <a:bodyPr/>
-                    <a:lstStyle/>
-                    <a:p>
-                      <a:pPr algn="ctr" defTabSz="914400">
-                        <a:lnSpc>
-                          <a:spcPct val="100000"/>
-                        </a:lnSpc>
-                      </a:pPr>
-                      <a:r>
-                        <a:rPr lang="en-US" sz="1050" b="1" u="none" strike="noStrike">
-                          <a:solidFill>
-                            <a:srgbClr val="000000"/>
-                          </a:solidFill>
-                          <a:effectLst/>
-                          <a:uFillTx/>
-                          <a:latin typeface="メイリオ"/>
-                          <a:ea typeface="メイリオ"/>
-                        </a:rPr>
-                        <a:t>70</a:t>
-                      </a:r>
-                      <a:r>
-                        <a:rPr lang="ja-JP" sz="1050" b="1" u="none" strike="noStrike">
-                          <a:solidFill>
-                            <a:srgbClr val="000000"/>
-                          </a:solidFill>
-                          <a:effectLst/>
-                          <a:uFillTx/>
-                          <a:latin typeface="メイリオ"/>
-                          <a:ea typeface="メイリオ"/>
-                        </a:rPr>
-                        <a:t>代以上</a:t>
-                      </a:r>
-                      <a:endParaRPr lang="en-US" sz="1050" b="0" u="none" strike="noStrike">
-                        <a:solidFill>
-                          <a:srgbClr val="000000"/>
-                        </a:solidFill>
-                        <a:effectLst/>
-                        <a:uFillTx/>
-                        <a:latin typeface="Arial"/>
-                      </a:endParaRPr>
-                    </a:p>
-                  </a:txBody>
-                  <a:tcPr marL="6480" marR="6480" anchor="ctr">
-                    <a:lnL w="6480">
-                      <a:solidFill>
-                        <a:srgbClr val="000000"/>
-                      </a:solidFill>
-                      <a:prstDash val="solid"/>
-                    </a:lnL>
-                    <a:lnR w="6480">
-                      <a:solidFill>
-                        <a:srgbClr val="000000"/>
-                      </a:solidFill>
-                      <a:prstDash val="solid"/>
-                    </a:lnR>
-                    <a:lnT w="6480">
-                      <a:solidFill>
-                        <a:srgbClr val="000000"/>
-                      </a:solidFill>
-                      <a:prstDash val="solid"/>
-                    </a:lnT>
-                    <a:lnB w="6480">
-                      <a:solidFill>
-                        <a:srgbClr val="000000"/>
-                      </a:solidFill>
-                      <a:prstDash val="solid"/>
-                    </a:lnB>
-                    <a:solidFill>
-                      <a:srgbClr val="DAE9F8"/>
-                    </a:solidFill>
-                  </a:tcPr>
-                </a:tc>
-                <a:tc>
-                  <a:txBody>
-                    <a:bodyPr/>
-                    <a:lstStyle/>
-                    <a:p>
-                      <a:pPr algn="ctr" defTabSz="914400">
-                        <a:lnSpc>
-                          <a:spcPct val="100000"/>
-                        </a:lnSpc>
-                      </a:pPr>
-                      <a:r>
-                        <a:rPr lang="ja-JP" sz="1000" b="1" u="none" strike="noStrike">
-                          <a:solidFill>
-                            <a:srgbClr val="000000"/>
-                          </a:solidFill>
-                          <a:effectLst/>
-                          <a:uFillTx/>
-                          <a:latin typeface="メイリオ"/>
-                          <a:ea typeface="メイリオ"/>
-                        </a:rPr>
-                        <a:t>利用率：</a:t>
-                      </a:r>
-                      <a:r>
-                        <a:rPr lang="en-US" sz="1000" b="1" u="none" strike="noStrike">
-                          <a:solidFill>
-                            <a:srgbClr val="000000"/>
-                          </a:solidFill>
-                          <a:effectLst/>
-                          <a:uFillTx/>
-                          <a:latin typeface="メイリオ"/>
-                          <a:ea typeface="メイリオ"/>
-                        </a:rPr>
-                        <a:t>70%</a:t>
-                      </a:r>
-                      <a:r>
-                        <a:rPr lang="ja-JP" sz="1000" b="1" u="none" strike="noStrike">
-                          <a:solidFill>
-                            <a:srgbClr val="000000"/>
-                          </a:solidFill>
-                          <a:effectLst/>
-                          <a:uFillTx/>
-                          <a:latin typeface="メイリオ"/>
-                          <a:ea typeface="メイリオ"/>
-                        </a:rPr>
-                        <a:t>前後</a:t>
-                      </a:r>
-                      <a:endParaRPr lang="en-US" sz="1000" b="0" u="none" strike="noStrike">
-                        <a:solidFill>
-                          <a:srgbClr val="000000"/>
-                        </a:solidFill>
-                        <a:effectLst/>
-                        <a:uFillTx/>
-                        <a:latin typeface="Arial"/>
-                      </a:endParaRPr>
-                    </a:p>
-                  </a:txBody>
-                  <a:tcPr marL="6480" marR="6480" anchor="ctr">
-                    <a:lnL w="6480">
-                      <a:solidFill>
-                        <a:srgbClr val="000000"/>
-                      </a:solidFill>
-                      <a:prstDash val="solid"/>
-                    </a:lnL>
-                    <a:lnR w="6480">
-                      <a:solidFill>
-                        <a:srgbClr val="000000"/>
-                      </a:solidFill>
-                      <a:prstDash val="solid"/>
-                    </a:lnR>
-                    <a:lnT w="6480">
-                      <a:solidFill>
-                        <a:srgbClr val="000000"/>
-                      </a:solidFill>
-                      <a:prstDash val="solid"/>
-                    </a:lnT>
-                    <a:lnB w="6480">
-                      <a:noFill/>
-                      <a:prstDash val="solid"/>
-                    </a:lnB>
-                    <a:solidFill>
-                      <a:srgbClr val="FFFF99"/>
-                    </a:solidFill>
-                  </a:tcPr>
-                </a:tc>
-                <a:tc>
-                  <a:txBody>
-                    <a:bodyPr/>
-                    <a:lstStyle/>
-                    <a:p>
-                      <a:pPr algn="ctr" defTabSz="914400">
-                        <a:lnSpc>
-                          <a:spcPct val="100000"/>
-                        </a:lnSpc>
-                      </a:pPr>
-                      <a:r>
-                        <a:rPr lang="ja-JP" sz="1000" b="1" u="none" strike="noStrike">
-                          <a:solidFill>
-                            <a:srgbClr val="000000"/>
-                          </a:solidFill>
-                          <a:effectLst/>
-                          <a:uFillTx/>
-                          <a:latin typeface="メイリオ"/>
-                          <a:ea typeface="メイリオ"/>
-                        </a:rPr>
-                        <a:t>利用率：低い</a:t>
-                      </a:r>
-                      <a:endParaRPr lang="en-US" sz="1000" b="0" u="none" strike="noStrike">
-                        <a:solidFill>
-                          <a:srgbClr val="000000"/>
-                        </a:solidFill>
-                        <a:effectLst/>
-                        <a:uFillTx/>
-                        <a:latin typeface="Arial"/>
-                      </a:endParaRPr>
-                    </a:p>
-                  </a:txBody>
-                  <a:tcPr marL="6480" marR="6480" anchor="ctr">
-                    <a:lnL w="6480">
-                      <a:solidFill>
-                        <a:srgbClr val="000000"/>
-                      </a:solidFill>
-                      <a:prstDash val="solid"/>
-                    </a:lnL>
-                    <a:lnR w="6480">
-                      <a:solidFill>
-                        <a:srgbClr val="000000"/>
-                      </a:solidFill>
-                      <a:prstDash val="solid"/>
-                    </a:lnR>
-                    <a:lnT w="6480">
-                      <a:solidFill>
-                        <a:srgbClr val="000000"/>
-                      </a:solidFill>
-                      <a:prstDash val="solid"/>
-                    </a:lnT>
-                    <a:lnB w="6480">
-                      <a:noFill/>
-                      <a:prstDash val="solid"/>
-                    </a:lnB>
-                    <a:solidFill>
-                      <a:schemeClr val="lt1"/>
-                    </a:solidFill>
-                  </a:tcPr>
-                </a:tc>
-                <a:tc>
-                  <a:txBody>
-                    <a:bodyPr/>
-                    <a:lstStyle/>
-                    <a:p>
-                      <a:pPr algn="ctr" defTabSz="914400">
-                        <a:lnSpc>
-                          <a:spcPct val="100000"/>
-                        </a:lnSpc>
-                      </a:pPr>
-                      <a:r>
-                        <a:rPr lang="ja-JP" sz="1000" b="1" u="none" strike="noStrike">
-                          <a:solidFill>
-                            <a:srgbClr val="000000"/>
-                          </a:solidFill>
-                          <a:effectLst/>
-                          <a:uFillTx/>
-                          <a:latin typeface="メイリオ"/>
-                          <a:ea typeface="メイリオ"/>
-                        </a:rPr>
-                        <a:t>利用率：最も高い</a:t>
-                      </a:r>
-                      <a:endParaRPr lang="en-US" sz="1000" b="0" u="none" strike="noStrike">
-                        <a:solidFill>
-                          <a:srgbClr val="000000"/>
-                        </a:solidFill>
-                        <a:effectLst/>
-                        <a:uFillTx/>
-                        <a:latin typeface="Arial"/>
-                      </a:endParaRPr>
-                    </a:p>
-                  </a:txBody>
-                  <a:tcPr marL="6480" marR="6480" anchor="ctr">
-                    <a:lnL w="6480">
-                      <a:solidFill>
-                        <a:srgbClr val="000000"/>
-                      </a:solidFill>
-                      <a:prstDash val="solid"/>
-                    </a:lnL>
-                    <a:lnR w="6480">
-                      <a:solidFill>
-                        <a:srgbClr val="000000"/>
-                      </a:solidFill>
-                      <a:prstDash val="solid"/>
-                    </a:lnR>
-                    <a:lnT w="6480">
-                      <a:solidFill>
-                        <a:srgbClr val="000000"/>
-                      </a:solidFill>
-                      <a:prstDash val="solid"/>
-                    </a:lnT>
-                    <a:lnB w="6480">
-                      <a:noFill/>
-                      <a:prstDash val="solid"/>
-                    </a:lnB>
-                    <a:solidFill>
-                      <a:schemeClr val="lt1"/>
-                    </a:solidFill>
-                  </a:tcPr>
-                </a:tc>
-                <a:tc rowSpan="2">
-                  <a:txBody>
-                    <a:bodyPr/>
-                    <a:lstStyle/>
-                    <a:p>
-                      <a:pPr algn="ctr" defTabSz="914400">
-                        <a:lnSpc>
-                          <a:spcPct val="100000"/>
-                        </a:lnSpc>
-                      </a:pPr>
-                      <a:r>
-                        <a:rPr lang="ja-JP" sz="800" b="0" u="none" strike="noStrike">
-                          <a:solidFill>
-                            <a:srgbClr val="000000"/>
-                          </a:solidFill>
-                          <a:effectLst/>
-                          <a:uFillTx/>
-                          <a:latin typeface="メイリオ"/>
-                          <a:ea typeface="メイリオ"/>
-                        </a:rPr>
-                        <a:t>連絡手段としての電話が</a:t>
-                      </a:r>
-                      <a:endParaRPr lang="en-US" sz="800" b="0" u="none" strike="noStrike">
-                        <a:solidFill>
-                          <a:srgbClr val="000000"/>
-                        </a:solidFill>
-                        <a:effectLst/>
-                        <a:uFillTx/>
-                        <a:latin typeface="Arial"/>
-                      </a:endParaRPr>
-                    </a:p>
-                    <a:p>
-                      <a:pPr algn="ctr" defTabSz="914400">
-                        <a:lnSpc>
-                          <a:spcPct val="100000"/>
-                        </a:lnSpc>
-                      </a:pPr>
-                      <a:r>
-                        <a:rPr lang="ja-JP" sz="800" b="0" u="none" strike="noStrike">
-                          <a:solidFill>
-                            <a:srgbClr val="000000"/>
-                          </a:solidFill>
-                          <a:effectLst/>
-                          <a:uFillTx/>
-                          <a:latin typeface="メイリオ"/>
-                          <a:ea typeface="メイリオ"/>
-                        </a:rPr>
-                        <a:t>最優先される層。</a:t>
-                      </a:r>
-                      <a:endParaRPr lang="en-US" sz="800" b="0" u="none" strike="noStrike">
-                        <a:solidFill>
-                          <a:srgbClr val="000000"/>
-                        </a:solidFill>
-                        <a:effectLst/>
-                        <a:uFillTx/>
-                        <a:latin typeface="Arial"/>
-                      </a:endParaRPr>
-                    </a:p>
-                  </a:txBody>
-                  <a:tcPr marL="6480" marR="6480" anchor="ctr">
-                    <a:lnL w="6480">
-                      <a:solidFill>
-                        <a:srgbClr val="000000"/>
-                      </a:solidFill>
-                      <a:prstDash val="solid"/>
-                    </a:lnL>
-                    <a:lnR w="6480">
-                      <a:solidFill>
-                        <a:srgbClr val="000000"/>
-                      </a:solidFill>
-                      <a:prstDash val="solid"/>
-                    </a:lnR>
-                    <a:lnT w="6480">
-                      <a:solidFill>
-                        <a:srgbClr val="000000"/>
-                      </a:solidFill>
-                      <a:prstDash val="solid"/>
-                    </a:lnT>
-                    <a:lnB w="6480">
-                      <a:solidFill>
-                        <a:srgbClr val="000000"/>
-                      </a:solidFill>
-                      <a:prstDash val="solid"/>
-                    </a:lnB>
-                    <a:noFill/>
-                  </a:tcPr>
-                </a:tc>
-                <a:extLst>
-                  <a:ext uri="{0D108BD9-81ED-4DB2-BD59-A6C34878D82A}">
-                    <a16:rowId xmlns:a16="http://schemas.microsoft.com/office/drawing/2014/main" val="10007"/>
-                  </a:ext>
-                </a:extLst>
-              </a:tr>
-              <a:tr h="499320">
-                <a:tc vMerge="1">
-                  <a:txBody>
-                    <a:bodyPr/>
-                    <a:lstStyle/>
-                    <a:p>
-                      <a:endParaRPr lang="en-US" sz="1800" b="0" u="none" strike="noStrike">
-                        <a:solidFill>
-                          <a:srgbClr val="000000"/>
-                        </a:solidFill>
-                        <a:effectLst/>
-                        <a:uFillTx/>
-                        <a:latin typeface="Arial"/>
-                      </a:endParaRPr>
-                    </a:p>
-                  </a:txBody>
-                  <a:tcPr marL="90000" marR="90000">
-                    <a:lnL>
-                      <a:noFill/>
-                    </a:lnL>
-                    <a:lnR>
-                      <a:noFill/>
-                    </a:lnR>
-                    <a:lnT>
-                      <a:noFill/>
-                    </a:lnT>
-                    <a:lnB>
-                      <a:noFill/>
-                    </a:lnB>
-                    <a:solidFill>
-                      <a:srgbClr val="729FCF"/>
-                    </a:solidFill>
-                  </a:tcPr>
-                </a:tc>
-                <a:tc>
-                  <a:txBody>
-                    <a:bodyPr/>
-                    <a:lstStyle/>
-                    <a:p>
-                      <a:pPr algn="ctr" defTabSz="914400">
-                        <a:lnSpc>
-                          <a:spcPct val="100000"/>
-                        </a:lnSpc>
-                      </a:pPr>
-                      <a:r>
-                        <a:rPr lang="ja-JP" sz="800" b="0" u="none" strike="noStrike">
-                          <a:solidFill>
-                            <a:srgbClr val="000000"/>
-                          </a:solidFill>
-                          <a:effectLst/>
-                          <a:uFillTx/>
-                          <a:latin typeface="メイリオ"/>
-                          <a:ea typeface="メイリオ"/>
-                        </a:rPr>
-                        <a:t>高齢者層にも普及が進む。</a:t>
-                      </a:r>
-                      <a:endParaRPr lang="en-US" sz="800" b="0" u="none" strike="noStrike">
-                        <a:solidFill>
-                          <a:srgbClr val="000000"/>
-                        </a:solidFill>
-                        <a:effectLst/>
-                        <a:uFillTx/>
-                        <a:latin typeface="Arial"/>
-                      </a:endParaRPr>
-                    </a:p>
-                  </a:txBody>
-                  <a:tcPr marL="6480" marR="6480" anchor="ctr">
-                    <a:lnL w="6480">
-                      <a:solidFill>
-                        <a:srgbClr val="000000"/>
-                      </a:solidFill>
-                      <a:prstDash val="solid"/>
-                    </a:lnL>
-                    <a:lnR w="6480">
-                      <a:solidFill>
-                        <a:srgbClr val="000000"/>
-                      </a:solidFill>
-                      <a:prstDash val="solid"/>
-                    </a:lnR>
-                    <a:lnT w="12240">
-                      <a:noFill/>
-                      <a:prstDash val="solid"/>
-                    </a:lnT>
-                    <a:lnB w="6480">
-                      <a:solidFill>
-                        <a:srgbClr val="000000"/>
-                      </a:solidFill>
-                      <a:prstDash val="solid"/>
-                    </a:lnB>
-                    <a:solidFill>
-                      <a:srgbClr val="FFFF99"/>
-                    </a:solidFill>
-                  </a:tcPr>
-                </a:tc>
-                <a:tc>
-                  <a:txBody>
-                    <a:bodyPr/>
-                    <a:lstStyle/>
-                    <a:p>
-                      <a:pPr algn="ctr" defTabSz="914400">
-                        <a:lnSpc>
-                          <a:spcPct val="100000"/>
-                        </a:lnSpc>
-                      </a:pPr>
-                      <a:r>
-                        <a:rPr lang="ja-JP" sz="800" b="0" u="none" strike="noStrike">
-                          <a:solidFill>
-                            <a:srgbClr val="000000"/>
-                          </a:solidFill>
-                          <a:effectLst/>
-                          <a:uFillTx/>
-                          <a:latin typeface="メイリオ"/>
-                          <a:ea typeface="メイリオ"/>
-                        </a:rPr>
-                        <a:t>操作に不慣れで到達率が下がる。</a:t>
-                      </a:r>
-                      <a:endParaRPr lang="en-US" sz="800" b="0" u="none" strike="noStrike">
-                        <a:solidFill>
-                          <a:srgbClr val="000000"/>
-                        </a:solidFill>
-                        <a:effectLst/>
-                        <a:uFillTx/>
-                        <a:latin typeface="Arial"/>
-                      </a:endParaRPr>
-                    </a:p>
-                  </a:txBody>
-                  <a:tcPr marL="6480" marR="6480" anchor="ctr">
-                    <a:lnL w="6480">
-                      <a:solidFill>
-                        <a:srgbClr val="000000"/>
-                      </a:solidFill>
-                      <a:prstDash val="solid"/>
-                    </a:lnL>
-                    <a:lnR w="6480">
-                      <a:solidFill>
-                        <a:srgbClr val="000000"/>
-                      </a:solidFill>
-                      <a:prstDash val="solid"/>
-                    </a:lnR>
-                    <a:lnT w="12240">
-                      <a:noFill/>
-                      <a:prstDash val="solid"/>
-                    </a:lnT>
-                    <a:lnB w="6480">
-                      <a:solidFill>
-                        <a:srgbClr val="000000"/>
-                      </a:solidFill>
-                      <a:prstDash val="solid"/>
-                    </a:lnB>
-                    <a:solidFill>
-                      <a:schemeClr val="lt1"/>
-                    </a:solidFill>
-                  </a:tcPr>
-                </a:tc>
-                <a:tc>
-                  <a:txBody>
-                    <a:bodyPr/>
-                    <a:lstStyle/>
-                    <a:p>
-                      <a:pPr algn="ctr" defTabSz="914400">
-                        <a:lnSpc>
-                          <a:spcPct val="100000"/>
-                        </a:lnSpc>
-                      </a:pPr>
-                      <a:r>
-                        <a:rPr lang="ja-JP" sz="800" b="0" u="none" strike="noStrike">
-                          <a:solidFill>
-                            <a:srgbClr val="000000"/>
-                          </a:solidFill>
-                          <a:effectLst/>
-                          <a:uFillTx/>
-                          <a:latin typeface="メイリオ"/>
-                          <a:ea typeface="メイリオ"/>
-                        </a:rPr>
-                        <a:t>重要な連絡や問い合わせは</a:t>
-                      </a:r>
-                      <a:endParaRPr lang="en-US" sz="800" b="0" u="none" strike="noStrike">
-                        <a:solidFill>
-                          <a:srgbClr val="000000"/>
-                        </a:solidFill>
-                        <a:effectLst/>
-                        <a:uFillTx/>
-                        <a:latin typeface="Arial"/>
-                      </a:endParaRPr>
-                    </a:p>
-                    <a:p>
-                      <a:pPr algn="ctr" defTabSz="914400">
-                        <a:lnSpc>
-                          <a:spcPct val="100000"/>
-                        </a:lnSpc>
-                      </a:pPr>
-                      <a:r>
-                        <a:rPr lang="ja-JP" sz="800" b="0" u="none" strike="noStrike">
-                          <a:solidFill>
-                            <a:srgbClr val="000000"/>
-                          </a:solidFill>
-                          <a:effectLst/>
-                          <a:uFillTx/>
-                          <a:latin typeface="メイリオ"/>
-                          <a:ea typeface="メイリオ"/>
-                        </a:rPr>
-                        <a:t>電話がメイン。</a:t>
-                      </a:r>
-                      <a:endParaRPr lang="en-US" sz="800" b="0" u="none" strike="noStrike">
-                        <a:solidFill>
-                          <a:srgbClr val="000000"/>
-                        </a:solidFill>
-                        <a:effectLst/>
-                        <a:uFillTx/>
-                        <a:latin typeface="Arial"/>
-                      </a:endParaRPr>
-                    </a:p>
-                  </a:txBody>
-                  <a:tcPr marL="6480" marR="6480" anchor="ctr">
-                    <a:lnL w="6480">
-                      <a:solidFill>
-                        <a:srgbClr val="000000"/>
-                      </a:solidFill>
-                      <a:prstDash val="solid"/>
-                    </a:lnL>
-                    <a:lnR w="6480">
-                      <a:solidFill>
-                        <a:srgbClr val="000000"/>
-                      </a:solidFill>
-                      <a:prstDash val="solid"/>
-                    </a:lnR>
-                    <a:lnT w="12240">
-                      <a:noFill/>
-                      <a:prstDash val="solid"/>
-                    </a:lnT>
-                    <a:lnB w="6480">
-                      <a:solidFill>
-                        <a:srgbClr val="000000"/>
-                      </a:solidFill>
-                      <a:prstDash val="solid"/>
-                    </a:lnB>
-                    <a:solidFill>
-                      <a:schemeClr val="lt1"/>
-                    </a:solidFill>
-                  </a:tcPr>
-                </a:tc>
-                <a:tc vMerge="1">
-                  <a:txBody>
-                    <a:bodyPr/>
-                    <a:lstStyle/>
-                    <a:p>
-                      <a:endParaRPr lang="en-US" sz="1800" b="0" u="none" strike="noStrike">
-                        <a:solidFill>
-                          <a:srgbClr val="000000"/>
-                        </a:solidFill>
-                        <a:effectLst/>
-                        <a:uFillTx/>
-                        <a:latin typeface="Arial"/>
-                      </a:endParaRPr>
-                    </a:p>
-                  </a:txBody>
-                  <a:tcPr marL="90000" marR="90000">
-                    <a:lnL>
-                      <a:noFill/>
-                    </a:lnL>
-                    <a:lnR>
-                      <a:noFill/>
-                    </a:lnR>
-                    <a:lnT>
-                      <a:noFill/>
-                    </a:lnT>
-                    <a:lnB>
-                      <a:noFill/>
-                    </a:lnB>
-                    <a:solidFill>
-                      <a:srgbClr val="729FCF"/>
-                    </a:solidFill>
-                  </a:tcPr>
-                </a:tc>
-                <a:extLst>
-                  <a:ext uri="{0D108BD9-81ED-4DB2-BD59-A6C34878D82A}">
-                    <a16:rowId xmlns:a16="http://schemas.microsoft.com/office/drawing/2014/main" val="10008"/>
-                  </a:ext>
-                </a:extLst>
-              </a:tr>
-            </a:tbl>
-          </a:graphicData>
-        </a:graphic>
-      </p:graphicFrame>
-    </p:spTree>
-  </p:cSld>
-  <p:clrMapOvr>
-    <a:masterClrMapping/>
-  </p:clrMapOvr>
-</p:sld>
-</file>
-
 <file path=ppt/slides/slide2.xml><?xml version="1.0" encoding="utf-8"?>
 <p:sld xmlns:a="http://schemas.openxmlformats.org/drawingml/2006/main" xmlns:r="http://schemas.openxmlformats.org/officeDocument/2006/relationships" xmlns:p="http://schemas.openxmlformats.org/presentationml/2006/main">
   <p:cSld>
@@ -24006,6 +20936,3636 @@
       <p:grpSpPr/>
       <p:sp>
         <p:nvSpPr>
+          <p:cNvPr id="871" name="正方形/長方形 2"/>
+          <p:cNvSpPr/>
+          <p:nvPr/>
+        </p:nvSpPr>
+        <p:spPr>
+          <a:xfrm>
+            <a:off x="0" y="577800"/>
+            <a:ext cx="9905760" cy="812520"/>
+          </a:xfrm>
+          <a:prstGeom prst="rect">
+            <a:avLst/>
+          </a:prstGeom>
+          <a:noFill/>
+          <a:ln>
+            <a:noFill/>
+          </a:ln>
+          <a:effectLst>
+            <a:outerShdw blurRad="39960" dist="23040" dir="5400000" rotWithShape="0">
+              <a:srgbClr val="000000">
+                <a:alpha val="35000"/>
+              </a:srgbClr>
+            </a:outerShdw>
+          </a:effectLst>
+        </p:spPr>
+        <p:style>
+          <a:lnRef idx="1">
+            <a:schemeClr val="accent1"/>
+          </a:lnRef>
+          <a:fillRef idx="3">
+            <a:schemeClr val="accent1"/>
+          </a:fillRef>
+          <a:effectRef idx="2">
+            <a:schemeClr val="accent1"/>
+          </a:effectRef>
+          <a:fontRef idx="minor"/>
+        </p:style>
+        <p:txBody>
+          <a:bodyPr lIns="90000" tIns="45000" rIns="90000" bIns="45000" anchor="ctr">
+            <a:noAutofit/>
+          </a:bodyPr>
+          <a:lstStyle/>
+          <a:p>
+            <a:pPr algn="ctr" defTabSz="914400">
+              <a:lnSpc>
+                <a:spcPct val="100000"/>
+              </a:lnSpc>
+            </a:pPr>
+            <a:endParaRPr lang="en-US" sz="1800" b="0" u="none" strike="noStrike">
+              <a:solidFill>
+                <a:schemeClr val="lt1"/>
+              </a:solidFill>
+              <a:effectLst/>
+              <a:uFillTx/>
+              <a:latin typeface="メイリオ"/>
+              <a:ea typeface="メイリオ"/>
+            </a:endParaRPr>
+          </a:p>
+        </p:txBody>
+      </p:sp>
+      <p:sp>
+        <p:nvSpPr>
+          <p:cNvPr id="872" name="正方形/長方形 3"/>
+          <p:cNvSpPr/>
+          <p:nvPr/>
+        </p:nvSpPr>
+        <p:spPr>
+          <a:xfrm>
+            <a:off x="796320" y="635040"/>
+            <a:ext cx="8327880" cy="698040"/>
+          </a:xfrm>
+          <a:prstGeom prst="rect">
+            <a:avLst/>
+          </a:prstGeom>
+          <a:noFill/>
+          <a:ln>
+            <a:noFill/>
+          </a:ln>
+        </p:spPr>
+        <p:style>
+          <a:lnRef idx="2">
+            <a:schemeClr val="accent1">
+              <a:shade val="50000"/>
+            </a:schemeClr>
+          </a:lnRef>
+          <a:fillRef idx="1">
+            <a:schemeClr val="accent1"/>
+          </a:fillRef>
+          <a:effectRef idx="0">
+            <a:schemeClr val="accent1"/>
+          </a:effectRef>
+          <a:fontRef idx="minor"/>
+        </p:style>
+        <p:txBody>
+          <a:bodyPr lIns="90000" tIns="90000" rIns="90000" bIns="45000" anchor="ctr">
+            <a:noAutofit/>
+          </a:bodyPr>
+          <a:lstStyle/>
+          <a:p>
+            <a:pPr algn="ctr" defTabSz="914400">
+              <a:lnSpc>
+                <a:spcPts val="2455"/>
+              </a:lnSpc>
+            </a:pPr>
+            <a:r>
+              <a:rPr lang="ja-JP" sz="1400" b="0" u="none" strike="noStrike">
+                <a:solidFill>
+                  <a:srgbClr val="343434"/>
+                </a:solidFill>
+                <a:effectLst/>
+                <a:uFillTx/>
+                <a:latin typeface="メイリオ"/>
+                <a:ea typeface="メイリオ"/>
+              </a:rPr>
+              <a:t>利用年齢層により変動はするものの、</a:t>
+            </a:r>
+            <a:r>
+              <a:rPr lang="en-US" sz="1400" b="0" u="none" strike="noStrike">
+                <a:solidFill>
+                  <a:srgbClr val="343434"/>
+                </a:solidFill>
+                <a:effectLst/>
+                <a:uFillTx/>
+                <a:latin typeface="メイリオ"/>
+                <a:ea typeface="メイリオ"/>
+              </a:rPr>
+              <a:t>10-40</a:t>
+            </a:r>
+            <a:r>
+              <a:rPr lang="ja-JP" sz="1400" b="0" u="none" strike="noStrike">
+                <a:solidFill>
+                  <a:srgbClr val="343434"/>
+                </a:solidFill>
+                <a:effectLst/>
+                <a:uFillTx/>
+                <a:latin typeface="メイリオ"/>
+                <a:ea typeface="メイリオ"/>
+              </a:rPr>
+              <a:t>代を中心に電話、メールを忌避する動きが強まっている。</a:t>
+            </a:r>
+            <a:endParaRPr lang="en-US" sz="1400" b="0" u="none" strike="noStrike">
+              <a:solidFill>
+                <a:srgbClr val="000000"/>
+              </a:solidFill>
+              <a:effectLst/>
+              <a:uFillTx/>
+              <a:latin typeface="Arial"/>
+            </a:endParaRPr>
+          </a:p>
+          <a:p>
+            <a:pPr algn="ctr" defTabSz="914400">
+              <a:lnSpc>
+                <a:spcPts val="2455"/>
+              </a:lnSpc>
+            </a:pPr>
+            <a:r>
+              <a:rPr lang="ja-JP" sz="1400" b="1" u="none" strike="noStrike">
+                <a:solidFill>
+                  <a:srgbClr val="343434"/>
+                </a:solidFill>
+                <a:effectLst/>
+                <a:uFillTx/>
+                <a:latin typeface="メイリオ"/>
+                <a:ea typeface="メイリオ"/>
+              </a:rPr>
+              <a:t>既存ユーザー以外の年齢層の獲得にあたって、利用率の高い</a:t>
+            </a:r>
+            <a:r>
+              <a:rPr lang="en-US" sz="1400" b="1" u="none" strike="noStrike">
+                <a:solidFill>
+                  <a:srgbClr val="343434"/>
+                </a:solidFill>
+                <a:effectLst/>
+                <a:uFillTx/>
+                <a:latin typeface="メイリオ"/>
+                <a:ea typeface="メイリオ"/>
+              </a:rPr>
+              <a:t>LINEOA</a:t>
+            </a:r>
+            <a:r>
+              <a:rPr lang="ja-JP" sz="1400" b="1" u="none" strike="noStrike">
+                <a:solidFill>
+                  <a:srgbClr val="343434"/>
+                </a:solidFill>
+                <a:effectLst/>
+                <a:uFillTx/>
+                <a:latin typeface="メイリオ"/>
+                <a:ea typeface="メイリオ"/>
+              </a:rPr>
+              <a:t>施策が非常に重要と想定</a:t>
+            </a:r>
+            <a:r>
+              <a:rPr lang="ja-JP" sz="1400" b="0" u="none" strike="noStrike">
+                <a:solidFill>
+                  <a:srgbClr val="343434"/>
+                </a:solidFill>
+                <a:effectLst/>
+                <a:uFillTx/>
+                <a:latin typeface="メイリオ"/>
+                <a:ea typeface="メイリオ"/>
+              </a:rPr>
+              <a:t>される。</a:t>
+            </a:r>
+            <a:endParaRPr lang="en-US" sz="1400" b="0" u="none" strike="noStrike">
+              <a:solidFill>
+                <a:srgbClr val="000000"/>
+              </a:solidFill>
+              <a:effectLst/>
+              <a:uFillTx/>
+              <a:latin typeface="Arial"/>
+            </a:endParaRPr>
+          </a:p>
+        </p:txBody>
+      </p:sp>
+      <p:cxnSp>
+        <p:nvCxnSpPr>
+          <p:cNvPr id="873" name="直線コネクタ 4"/>
+          <p:cNvCxnSpPr/>
+          <p:nvPr/>
+        </p:nvCxnSpPr>
+        <p:spPr>
+          <a:xfrm>
+            <a:off x="0" y="1390320"/>
+            <a:ext cx="9906120" cy="360"/>
+          </a:xfrm>
+          <a:prstGeom prst="straightConnector1">
+            <a:avLst/>
+          </a:prstGeom>
+          <a:ln w="19050">
+            <a:solidFill>
+              <a:schemeClr val="lt1">
+                <a:lumMod val="85000"/>
+                <a:alpha val="60000"/>
+              </a:schemeClr>
+            </a:solidFill>
+            <a:round/>
+          </a:ln>
+        </p:spPr>
+      </p:cxnSp>
+      <p:sp>
+        <p:nvSpPr>
+          <p:cNvPr id="874" name="Google Shape;156;p7"/>
+          <p:cNvSpPr/>
+          <p:nvPr/>
+        </p:nvSpPr>
+        <p:spPr>
+          <a:xfrm>
+            <a:off x="549000" y="138240"/>
+            <a:ext cx="6514560" cy="338040"/>
+          </a:xfrm>
+          <a:prstGeom prst="rect">
+            <a:avLst/>
+          </a:prstGeom>
+          <a:noFill/>
+          <a:ln w="19050">
+            <a:noFill/>
+          </a:ln>
+        </p:spPr>
+        <p:style>
+          <a:lnRef idx="0">
+            <a:scrgbClr r="0" g="0" b="0"/>
+          </a:lnRef>
+          <a:fillRef idx="0">
+            <a:scrgbClr r="0" g="0" b="0"/>
+          </a:fillRef>
+          <a:effectRef idx="0">
+            <a:scrgbClr r="0" g="0" b="0"/>
+          </a:effectRef>
+          <a:fontRef idx="minor"/>
+        </p:style>
+        <p:txBody>
+          <a:bodyPr anchor="ctr">
+            <a:spAutoFit/>
+          </a:bodyPr>
+          <a:lstStyle/>
+          <a:p>
+            <a:pPr defTabSz="914400">
+              <a:lnSpc>
+                <a:spcPct val="100000"/>
+              </a:lnSpc>
+              <a:tabLst>
+                <a:tab pos="0" algn="l"/>
+              </a:tabLst>
+            </a:pPr>
+            <a:r>
+              <a:rPr lang="en-US" sz="1600" b="1" u="none" strike="noStrike">
+                <a:solidFill>
+                  <a:srgbClr val="002060"/>
+                </a:solidFill>
+                <a:effectLst/>
+                <a:uFillTx/>
+                <a:latin typeface="Meiryo"/>
+                <a:ea typeface="Meiryo"/>
+              </a:rPr>
+              <a:t>LINE</a:t>
+            </a:r>
+            <a:r>
+              <a:rPr lang="ja-JP" sz="1600" b="1" u="none" strike="noStrike">
+                <a:solidFill>
+                  <a:srgbClr val="002060"/>
+                </a:solidFill>
+                <a:effectLst/>
+                <a:uFillTx/>
+                <a:latin typeface="Meiryo"/>
+                <a:ea typeface="Meiryo"/>
+              </a:rPr>
+              <a:t>公式アカウントを検討する背景</a:t>
+            </a:r>
+            <a:endParaRPr lang="en-US" sz="1600" b="0" u="none" strike="noStrike">
+              <a:solidFill>
+                <a:srgbClr val="000000"/>
+              </a:solidFill>
+              <a:effectLst/>
+              <a:uFillTx/>
+              <a:latin typeface="Arial"/>
+            </a:endParaRPr>
+          </a:p>
+        </p:txBody>
+      </p:sp>
+      <p:graphicFrame>
+        <p:nvGraphicFramePr>
+          <p:cNvPr id="875" name="表 49"/>
+          <p:cNvGraphicFramePr/>
+          <p:nvPr/>
+        </p:nvGraphicFramePr>
+        <p:xfrm>
+          <a:off x="367560" y="1662840"/>
+          <a:ext cx="9167400" cy="4493880"/>
+        </p:xfrm>
+        <a:graphic>
+          <a:graphicData uri="http://schemas.openxmlformats.org/drawingml/2006/table">
+            <a:tbl>
+              <a:tblPr/>
+              <a:tblGrid>
+                <a:gridCol w="1833480">
+                  <a:extLst>
+                    <a:ext uri="{9D8B030D-6E8A-4147-A177-3AD203B41FA5}">
+                      <a16:colId xmlns:a16="http://schemas.microsoft.com/office/drawing/2014/main" val="20000"/>
+                    </a:ext>
+                  </a:extLst>
+                </a:gridCol>
+                <a:gridCol w="1833480">
+                  <a:extLst>
+                    <a:ext uri="{9D8B030D-6E8A-4147-A177-3AD203B41FA5}">
+                      <a16:colId xmlns:a16="http://schemas.microsoft.com/office/drawing/2014/main" val="20001"/>
+                    </a:ext>
+                  </a:extLst>
+                </a:gridCol>
+                <a:gridCol w="1833480">
+                  <a:extLst>
+                    <a:ext uri="{9D8B030D-6E8A-4147-A177-3AD203B41FA5}">
+                      <a16:colId xmlns:a16="http://schemas.microsoft.com/office/drawing/2014/main" val="20002"/>
+                    </a:ext>
+                  </a:extLst>
+                </a:gridCol>
+                <a:gridCol w="1833480">
+                  <a:extLst>
+                    <a:ext uri="{9D8B030D-6E8A-4147-A177-3AD203B41FA5}">
+                      <a16:colId xmlns:a16="http://schemas.microsoft.com/office/drawing/2014/main" val="20003"/>
+                    </a:ext>
+                  </a:extLst>
+                </a:gridCol>
+                <a:gridCol w="1833480">
+                  <a:extLst>
+                    <a:ext uri="{9D8B030D-6E8A-4147-A177-3AD203B41FA5}">
+                      <a16:colId xmlns:a16="http://schemas.microsoft.com/office/drawing/2014/main" val="20004"/>
+                    </a:ext>
+                  </a:extLst>
+                </a:gridCol>
+              </a:tblGrid>
+              <a:tr h="499320">
+                <a:tc>
+                  <a:txBody>
+                    <a:bodyPr/>
+                    <a:lstStyle/>
+                    <a:p>
+                      <a:pPr algn="ctr" defTabSz="914400">
+                        <a:lnSpc>
+                          <a:spcPct val="100000"/>
+                        </a:lnSpc>
+                      </a:pPr>
+                      <a:r>
+                        <a:rPr lang="ja-JP" sz="1050" b="1" u="none" strike="noStrike">
+                          <a:solidFill>
+                            <a:srgbClr val="000000"/>
+                          </a:solidFill>
+                          <a:effectLst/>
+                          <a:uFillTx/>
+                          <a:latin typeface="メイリオ"/>
+                          <a:ea typeface="メイリオ"/>
+                        </a:rPr>
+                        <a:t>年齢層</a:t>
+                      </a:r>
+                      <a:endParaRPr lang="en-US" sz="1050" b="0" u="none" strike="noStrike">
+                        <a:solidFill>
+                          <a:srgbClr val="000000"/>
+                        </a:solidFill>
+                        <a:effectLst/>
+                        <a:uFillTx/>
+                        <a:latin typeface="Arial"/>
+                      </a:endParaRPr>
+                    </a:p>
+                  </a:txBody>
+                  <a:tcPr marL="6480" marR="6480" anchor="ctr">
+                    <a:lnL w="6480">
+                      <a:solidFill>
+                        <a:srgbClr val="000000"/>
+                      </a:solidFill>
+                      <a:prstDash val="solid"/>
+                    </a:lnL>
+                    <a:lnR w="6480">
+                      <a:solidFill>
+                        <a:srgbClr val="000000"/>
+                      </a:solidFill>
+                      <a:prstDash val="solid"/>
+                    </a:lnR>
+                    <a:lnT w="6480">
+                      <a:solidFill>
+                        <a:srgbClr val="000000"/>
+                      </a:solidFill>
+                      <a:prstDash val="solid"/>
+                    </a:lnT>
+                    <a:lnB w="6480">
+                      <a:solidFill>
+                        <a:srgbClr val="000000"/>
+                      </a:solidFill>
+                      <a:prstDash val="solid"/>
+                    </a:lnB>
+                    <a:solidFill>
+                      <a:srgbClr val="DAE9F8"/>
+                    </a:solidFill>
+                  </a:tcPr>
+                </a:tc>
+                <a:tc>
+                  <a:txBody>
+                    <a:bodyPr/>
+                    <a:lstStyle/>
+                    <a:p>
+                      <a:pPr algn="ctr" defTabSz="914400">
+                        <a:lnSpc>
+                          <a:spcPct val="100000"/>
+                        </a:lnSpc>
+                      </a:pPr>
+                      <a:r>
+                        <a:rPr lang="en-US" sz="1000" b="0" u="none" strike="noStrike">
+                          <a:solidFill>
+                            <a:srgbClr val="000000"/>
+                          </a:solidFill>
+                          <a:effectLst/>
+                          <a:uFillTx/>
+                          <a:latin typeface="メイリオ"/>
+                          <a:ea typeface="メイリオ"/>
+                        </a:rPr>
+                        <a:t>LINE</a:t>
+                      </a:r>
+                      <a:r>
+                        <a:rPr lang="ja-JP" sz="1000" b="0" u="none" strike="noStrike">
+                          <a:solidFill>
+                            <a:srgbClr val="000000"/>
+                          </a:solidFill>
+                          <a:effectLst/>
+                          <a:uFillTx/>
+                          <a:latin typeface="メイリオ"/>
+                          <a:ea typeface="メイリオ"/>
+                        </a:rPr>
+                        <a:t>・チャット系</a:t>
+                      </a:r>
+                      <a:endParaRPr lang="en-US" sz="1000" b="0" u="none" strike="noStrike">
+                        <a:solidFill>
+                          <a:srgbClr val="000000"/>
+                        </a:solidFill>
+                        <a:effectLst/>
+                        <a:uFillTx/>
+                        <a:latin typeface="Arial"/>
+                      </a:endParaRPr>
+                    </a:p>
+                    <a:p>
+                      <a:pPr algn="ctr" defTabSz="914400">
+                        <a:lnSpc>
+                          <a:spcPct val="100000"/>
+                        </a:lnSpc>
+                      </a:pPr>
+                      <a:endParaRPr lang="en-US" sz="1000" b="0" u="none" strike="noStrike">
+                        <a:solidFill>
+                          <a:srgbClr val="000000"/>
+                        </a:solidFill>
+                        <a:effectLst/>
+                        <a:uFillTx/>
+                        <a:latin typeface="Arial"/>
+                      </a:endParaRPr>
+                    </a:p>
+                  </a:txBody>
+                  <a:tcPr marL="6480" marR="6480" anchor="ctr">
+                    <a:lnL w="6480">
+                      <a:solidFill>
+                        <a:srgbClr val="000000"/>
+                      </a:solidFill>
+                      <a:prstDash val="solid"/>
+                    </a:lnL>
+                    <a:lnR w="6480">
+                      <a:solidFill>
+                        <a:srgbClr val="000000"/>
+                      </a:solidFill>
+                      <a:prstDash val="solid"/>
+                    </a:lnR>
+                    <a:lnT w="6480">
+                      <a:solidFill>
+                        <a:srgbClr val="000000"/>
+                      </a:solidFill>
+                      <a:prstDash val="solid"/>
+                    </a:lnT>
+                    <a:lnB w="6480">
+                      <a:solidFill>
+                        <a:srgbClr val="000000"/>
+                      </a:solidFill>
+                      <a:prstDash val="solid"/>
+                    </a:lnB>
+                    <a:solidFill>
+                      <a:srgbClr val="DAE9F8"/>
+                    </a:solidFill>
+                  </a:tcPr>
+                </a:tc>
+                <a:tc>
+                  <a:txBody>
+                    <a:bodyPr/>
+                    <a:lstStyle/>
+                    <a:p>
+                      <a:pPr algn="ctr" defTabSz="914400">
+                        <a:lnSpc>
+                          <a:spcPct val="100000"/>
+                        </a:lnSpc>
+                      </a:pPr>
+                      <a:r>
+                        <a:rPr lang="ja-JP" sz="1000" b="0" u="none" strike="noStrike">
+                          <a:solidFill>
+                            <a:srgbClr val="000000"/>
+                          </a:solidFill>
+                          <a:effectLst/>
+                          <a:uFillTx/>
+                          <a:latin typeface="メイリオ"/>
+                          <a:ea typeface="メイリオ"/>
+                        </a:rPr>
+                        <a:t>メール・メルマガ</a:t>
+                      </a:r>
+                      <a:endParaRPr lang="en-US" sz="1000" b="0" u="none" strike="noStrike">
+                        <a:solidFill>
+                          <a:srgbClr val="000000"/>
+                        </a:solidFill>
+                        <a:effectLst/>
+                        <a:uFillTx/>
+                        <a:latin typeface="Arial"/>
+                      </a:endParaRPr>
+                    </a:p>
+                    <a:p>
+                      <a:pPr algn="ctr" defTabSz="914400">
+                        <a:lnSpc>
+                          <a:spcPct val="100000"/>
+                        </a:lnSpc>
+                      </a:pPr>
+                      <a:endParaRPr lang="en-US" sz="1000" b="0" u="none" strike="noStrike">
+                        <a:solidFill>
+                          <a:srgbClr val="000000"/>
+                        </a:solidFill>
+                        <a:effectLst/>
+                        <a:uFillTx/>
+                        <a:latin typeface="Arial"/>
+                      </a:endParaRPr>
+                    </a:p>
+                  </a:txBody>
+                  <a:tcPr marL="6480" marR="6480" anchor="ctr">
+                    <a:lnL w="6480">
+                      <a:solidFill>
+                        <a:srgbClr val="000000"/>
+                      </a:solidFill>
+                      <a:prstDash val="solid"/>
+                    </a:lnL>
+                    <a:lnR w="6480">
+                      <a:solidFill>
+                        <a:srgbClr val="000000"/>
+                      </a:solidFill>
+                      <a:prstDash val="solid"/>
+                    </a:lnR>
+                    <a:lnT w="6480">
+                      <a:solidFill>
+                        <a:srgbClr val="000000"/>
+                      </a:solidFill>
+                      <a:prstDash val="solid"/>
+                    </a:lnT>
+                    <a:lnB w="6480">
+                      <a:solidFill>
+                        <a:srgbClr val="000000"/>
+                      </a:solidFill>
+                      <a:prstDash val="solid"/>
+                    </a:lnB>
+                    <a:solidFill>
+                      <a:srgbClr val="DAE9F8"/>
+                    </a:solidFill>
+                  </a:tcPr>
+                </a:tc>
+                <a:tc>
+                  <a:txBody>
+                    <a:bodyPr/>
+                    <a:lstStyle/>
+                    <a:p>
+                      <a:pPr algn="ctr" defTabSz="914400">
+                        <a:lnSpc>
+                          <a:spcPct val="100000"/>
+                        </a:lnSpc>
+                      </a:pPr>
+                      <a:r>
+                        <a:rPr lang="ja-JP" sz="1000" b="0" u="none" strike="noStrike">
+                          <a:solidFill>
+                            <a:srgbClr val="000000"/>
+                          </a:solidFill>
+                          <a:effectLst/>
+                          <a:uFillTx/>
+                          <a:latin typeface="メイリオ"/>
+                          <a:ea typeface="メイリオ"/>
+                        </a:rPr>
+                        <a:t>電話</a:t>
+                      </a:r>
+                      <a:endParaRPr lang="en-US" sz="1000" b="0" u="none" strike="noStrike">
+                        <a:solidFill>
+                          <a:srgbClr val="000000"/>
+                        </a:solidFill>
+                        <a:effectLst/>
+                        <a:uFillTx/>
+                        <a:latin typeface="Arial"/>
+                      </a:endParaRPr>
+                    </a:p>
+                    <a:p>
+                      <a:pPr algn="ctr" defTabSz="914400">
+                        <a:lnSpc>
+                          <a:spcPct val="100000"/>
+                        </a:lnSpc>
+                      </a:pPr>
+                      <a:endParaRPr lang="en-US" sz="1000" b="0" u="none" strike="noStrike">
+                        <a:solidFill>
+                          <a:srgbClr val="000000"/>
+                        </a:solidFill>
+                        <a:effectLst/>
+                        <a:uFillTx/>
+                        <a:latin typeface="Arial"/>
+                      </a:endParaRPr>
+                    </a:p>
+                  </a:txBody>
+                  <a:tcPr marL="6480" marR="6480" anchor="ctr">
+                    <a:lnL w="6480">
+                      <a:solidFill>
+                        <a:srgbClr val="000000"/>
+                      </a:solidFill>
+                      <a:prstDash val="solid"/>
+                    </a:lnL>
+                    <a:lnR w="6480">
+                      <a:solidFill>
+                        <a:srgbClr val="000000"/>
+                      </a:solidFill>
+                      <a:prstDash val="solid"/>
+                    </a:lnR>
+                    <a:lnT w="6480">
+                      <a:solidFill>
+                        <a:srgbClr val="000000"/>
+                      </a:solidFill>
+                      <a:prstDash val="solid"/>
+                    </a:lnT>
+                    <a:lnB w="6480">
+                      <a:solidFill>
+                        <a:srgbClr val="000000"/>
+                      </a:solidFill>
+                      <a:prstDash val="solid"/>
+                    </a:lnB>
+                    <a:solidFill>
+                      <a:srgbClr val="DAE9F8"/>
+                    </a:solidFill>
+                  </a:tcPr>
+                </a:tc>
+                <a:tc>
+                  <a:txBody>
+                    <a:bodyPr/>
+                    <a:lstStyle/>
+                    <a:p>
+                      <a:pPr algn="ctr" defTabSz="914400">
+                        <a:lnSpc>
+                          <a:spcPct val="100000"/>
+                        </a:lnSpc>
+                      </a:pPr>
+                      <a:r>
+                        <a:rPr lang="ja-JP" sz="1000" b="0" u="none" strike="noStrike">
+                          <a:solidFill>
+                            <a:srgbClr val="000000"/>
+                          </a:solidFill>
+                          <a:effectLst/>
+                          <a:uFillTx/>
+                          <a:latin typeface="メイリオ"/>
+                          <a:ea typeface="メイリオ"/>
+                        </a:rPr>
+                        <a:t>主要な特徴・</a:t>
+                      </a:r>
+                      <a:r>
+                        <a:rPr lang="en-US" sz="1000" b="0" u="none" strike="noStrike">
+                          <a:solidFill>
+                            <a:srgbClr val="000000"/>
+                          </a:solidFill>
+                          <a:effectLst/>
+                          <a:uFillTx/>
+                          <a:latin typeface="メイリオ"/>
+                          <a:ea typeface="メイリオ"/>
+                        </a:rPr>
+                        <a:t>SNS</a:t>
+                      </a:r>
+                      <a:endParaRPr lang="en-US" sz="1000" b="0" u="none" strike="noStrike">
+                        <a:solidFill>
+                          <a:srgbClr val="000000"/>
+                        </a:solidFill>
+                        <a:effectLst/>
+                        <a:uFillTx/>
+                        <a:latin typeface="Arial"/>
+                      </a:endParaRPr>
+                    </a:p>
+                    <a:p>
+                      <a:pPr algn="ctr" defTabSz="914400">
+                        <a:lnSpc>
+                          <a:spcPct val="100000"/>
+                        </a:lnSpc>
+                      </a:pPr>
+                      <a:endParaRPr lang="en-US" sz="1000" b="0" u="none" strike="noStrike">
+                        <a:solidFill>
+                          <a:srgbClr val="000000"/>
+                        </a:solidFill>
+                        <a:effectLst/>
+                        <a:uFillTx/>
+                        <a:latin typeface="Arial"/>
+                      </a:endParaRPr>
+                    </a:p>
+                  </a:txBody>
+                  <a:tcPr marL="6480" marR="6480" anchor="ctr">
+                    <a:lnL w="6480">
+                      <a:solidFill>
+                        <a:srgbClr val="000000"/>
+                      </a:solidFill>
+                      <a:prstDash val="solid"/>
+                    </a:lnL>
+                    <a:lnR w="6480">
+                      <a:solidFill>
+                        <a:srgbClr val="000000"/>
+                      </a:solidFill>
+                      <a:prstDash val="solid"/>
+                    </a:lnR>
+                    <a:lnT w="6480">
+                      <a:solidFill>
+                        <a:srgbClr val="000000"/>
+                      </a:solidFill>
+                      <a:prstDash val="solid"/>
+                    </a:lnT>
+                    <a:lnB w="6480">
+                      <a:solidFill>
+                        <a:srgbClr val="000000"/>
+                      </a:solidFill>
+                      <a:prstDash val="solid"/>
+                    </a:lnB>
+                    <a:solidFill>
+                      <a:srgbClr val="DAE9F8"/>
+                    </a:solidFill>
+                  </a:tcPr>
+                </a:tc>
+                <a:extLst>
+                  <a:ext uri="{0D108BD9-81ED-4DB2-BD59-A6C34878D82A}">
+                    <a16:rowId xmlns:a16="http://schemas.microsoft.com/office/drawing/2014/main" val="10000"/>
+                  </a:ext>
+                </a:extLst>
+              </a:tr>
+              <a:tr h="499320">
+                <a:tc rowSpan="2">
+                  <a:txBody>
+                    <a:bodyPr/>
+                    <a:lstStyle/>
+                    <a:p>
+                      <a:pPr defTabSz="914400">
+                        <a:lnSpc>
+                          <a:spcPct val="100000"/>
+                        </a:lnSpc>
+                      </a:pPr>
+                      <a:r>
+                        <a:rPr lang="ja-JP" sz="1050" b="1" u="none" strike="noStrike">
+                          <a:solidFill>
+                            <a:srgbClr val="000000"/>
+                          </a:solidFill>
+                          <a:effectLst/>
+                          <a:uFillTx/>
+                          <a:latin typeface="メイリオ"/>
+                          <a:ea typeface="メイリオ"/>
+                        </a:rPr>
+                        <a:t>　　　</a:t>
+                      </a:r>
+                      <a:r>
+                        <a:rPr lang="en-US" sz="1050" b="1" u="none" strike="noStrike">
+                          <a:solidFill>
+                            <a:srgbClr val="000000"/>
+                          </a:solidFill>
+                          <a:effectLst/>
+                          <a:uFillTx/>
+                          <a:latin typeface="メイリオ"/>
+                          <a:ea typeface="メイリオ"/>
+                        </a:rPr>
+                        <a:t>10</a:t>
+                      </a:r>
+                      <a:r>
+                        <a:rPr lang="ja-JP" sz="1050" b="1" u="none" strike="noStrike">
+                          <a:solidFill>
+                            <a:srgbClr val="000000"/>
+                          </a:solidFill>
+                          <a:effectLst/>
+                          <a:uFillTx/>
+                          <a:latin typeface="メイリオ"/>
+                          <a:ea typeface="メイリオ"/>
+                        </a:rPr>
+                        <a:t>代〜</a:t>
+                      </a:r>
+                      <a:r>
+                        <a:rPr lang="en-US" sz="1050" b="1" u="none" strike="noStrike">
+                          <a:solidFill>
+                            <a:srgbClr val="000000"/>
+                          </a:solidFill>
+                          <a:effectLst/>
+                          <a:uFillTx/>
+                          <a:latin typeface="メイリオ"/>
+                          <a:ea typeface="メイリオ"/>
+                        </a:rPr>
+                        <a:t>20</a:t>
+                      </a:r>
+                      <a:r>
+                        <a:rPr lang="ja-JP" sz="1050" b="1" u="none" strike="noStrike">
+                          <a:solidFill>
+                            <a:srgbClr val="000000"/>
+                          </a:solidFill>
+                          <a:effectLst/>
+                          <a:uFillTx/>
+                          <a:latin typeface="メイリオ"/>
+                          <a:ea typeface="メイリオ"/>
+                        </a:rPr>
+                        <a:t>代　</a:t>
+                      </a:r>
+                      <a:endParaRPr lang="en-US" sz="1050" b="0" u="none" strike="noStrike">
+                        <a:solidFill>
+                          <a:srgbClr val="000000"/>
+                        </a:solidFill>
+                        <a:effectLst/>
+                        <a:uFillTx/>
+                        <a:latin typeface="Arial"/>
+                      </a:endParaRPr>
+                    </a:p>
+                  </a:txBody>
+                  <a:tcPr marL="6480" marR="6480" anchor="ctr">
+                    <a:lnL w="6480">
+                      <a:solidFill>
+                        <a:srgbClr val="000000"/>
+                      </a:solidFill>
+                      <a:prstDash val="solid"/>
+                    </a:lnL>
+                    <a:lnR w="6480">
+                      <a:solidFill>
+                        <a:srgbClr val="000000"/>
+                      </a:solidFill>
+                      <a:prstDash val="solid"/>
+                    </a:lnR>
+                    <a:lnT w="6480">
+                      <a:solidFill>
+                        <a:srgbClr val="000000"/>
+                      </a:solidFill>
+                      <a:prstDash val="solid"/>
+                    </a:lnT>
+                    <a:lnB w="6480">
+                      <a:solidFill>
+                        <a:srgbClr val="000000"/>
+                      </a:solidFill>
+                      <a:prstDash val="solid"/>
+                    </a:lnB>
+                    <a:solidFill>
+                      <a:srgbClr val="DAE9F8"/>
+                    </a:solidFill>
+                  </a:tcPr>
+                </a:tc>
+                <a:tc>
+                  <a:txBody>
+                    <a:bodyPr/>
+                    <a:lstStyle/>
+                    <a:p>
+                      <a:pPr algn="ctr" defTabSz="914400">
+                        <a:lnSpc>
+                          <a:spcPct val="100000"/>
+                        </a:lnSpc>
+                      </a:pPr>
+                      <a:r>
+                        <a:rPr lang="ja-JP" sz="1000" b="1" u="none" strike="noStrike">
+                          <a:solidFill>
+                            <a:srgbClr val="000000"/>
+                          </a:solidFill>
+                          <a:effectLst/>
+                          <a:uFillTx/>
+                          <a:latin typeface="メイリオ"/>
+                          <a:ea typeface="メイリオ"/>
+                        </a:rPr>
+                        <a:t>利用率：</a:t>
+                      </a:r>
+                      <a:r>
+                        <a:rPr lang="en-US" sz="1000" b="1" u="none" strike="noStrike">
+                          <a:solidFill>
+                            <a:srgbClr val="000000"/>
+                          </a:solidFill>
+                          <a:effectLst/>
+                          <a:uFillTx/>
+                          <a:latin typeface="メイリオ"/>
+                          <a:ea typeface="メイリオ"/>
+                        </a:rPr>
+                        <a:t>90%</a:t>
+                      </a:r>
+                      <a:r>
+                        <a:rPr lang="ja-JP" sz="1000" b="1" u="none" strike="noStrike">
+                          <a:solidFill>
+                            <a:srgbClr val="000000"/>
+                          </a:solidFill>
+                          <a:effectLst/>
+                          <a:uFillTx/>
+                          <a:latin typeface="メイリオ"/>
+                          <a:ea typeface="メイリオ"/>
+                        </a:rPr>
+                        <a:t>以上</a:t>
+                      </a:r>
+                      <a:endParaRPr lang="en-US" sz="1000" b="0" u="none" strike="noStrike">
+                        <a:solidFill>
+                          <a:srgbClr val="000000"/>
+                        </a:solidFill>
+                        <a:effectLst/>
+                        <a:uFillTx/>
+                        <a:latin typeface="Arial"/>
+                      </a:endParaRPr>
+                    </a:p>
+                  </a:txBody>
+                  <a:tcPr marL="6480" marR="6480" anchor="ctr">
+                    <a:lnL w="6480">
+                      <a:solidFill>
+                        <a:srgbClr val="000000"/>
+                      </a:solidFill>
+                      <a:prstDash val="solid"/>
+                    </a:lnL>
+                    <a:lnR w="6480">
+                      <a:solidFill>
+                        <a:srgbClr val="000000"/>
+                      </a:solidFill>
+                      <a:prstDash val="solid"/>
+                    </a:lnR>
+                    <a:lnT w="6480">
+                      <a:solidFill>
+                        <a:srgbClr val="000000"/>
+                      </a:solidFill>
+                      <a:prstDash val="solid"/>
+                    </a:lnT>
+                    <a:lnB w="6480">
+                      <a:noFill/>
+                      <a:prstDash val="solid"/>
+                    </a:lnB>
+                    <a:solidFill>
+                      <a:srgbClr val="FFFF99"/>
+                    </a:solidFill>
+                  </a:tcPr>
+                </a:tc>
+                <a:tc>
+                  <a:txBody>
+                    <a:bodyPr/>
+                    <a:lstStyle/>
+                    <a:p>
+                      <a:pPr algn="ctr" defTabSz="914400">
+                        <a:lnSpc>
+                          <a:spcPct val="100000"/>
+                        </a:lnSpc>
+                      </a:pPr>
+                      <a:r>
+                        <a:rPr lang="ja-JP" sz="1000" b="1" u="none" strike="noStrike">
+                          <a:solidFill>
+                            <a:srgbClr val="000000"/>
+                          </a:solidFill>
+                          <a:effectLst/>
+                          <a:uFillTx/>
+                          <a:latin typeface="メイリオ"/>
+                          <a:ea typeface="メイリオ"/>
+                        </a:rPr>
+                        <a:t>利用率：低</a:t>
+                      </a:r>
+                      <a:endParaRPr lang="en-US" sz="1000" b="0" u="none" strike="noStrike">
+                        <a:solidFill>
+                          <a:srgbClr val="000000"/>
+                        </a:solidFill>
+                        <a:effectLst/>
+                        <a:uFillTx/>
+                        <a:latin typeface="Arial"/>
+                      </a:endParaRPr>
+                    </a:p>
+                  </a:txBody>
+                  <a:tcPr marL="6480" marR="6480" anchor="ctr">
+                    <a:lnL w="6480">
+                      <a:solidFill>
+                        <a:srgbClr val="000000"/>
+                      </a:solidFill>
+                      <a:prstDash val="solid"/>
+                    </a:lnL>
+                    <a:lnR w="6480">
+                      <a:solidFill>
+                        <a:srgbClr val="000000"/>
+                      </a:solidFill>
+                      <a:prstDash val="solid"/>
+                    </a:lnR>
+                    <a:lnT w="6480">
+                      <a:solidFill>
+                        <a:srgbClr val="000000"/>
+                      </a:solidFill>
+                      <a:prstDash val="solid"/>
+                    </a:lnT>
+                    <a:lnB w="6480">
+                      <a:noFill/>
+                      <a:prstDash val="solid"/>
+                    </a:lnB>
+                    <a:solidFill>
+                      <a:schemeClr val="lt1"/>
+                    </a:solidFill>
+                  </a:tcPr>
+                </a:tc>
+                <a:tc>
+                  <a:txBody>
+                    <a:bodyPr/>
+                    <a:lstStyle/>
+                    <a:p>
+                      <a:pPr algn="ctr" defTabSz="914400">
+                        <a:lnSpc>
+                          <a:spcPct val="100000"/>
+                        </a:lnSpc>
+                      </a:pPr>
+                      <a:r>
+                        <a:rPr lang="ja-JP" sz="1000" b="1" u="none" strike="noStrike">
+                          <a:solidFill>
+                            <a:srgbClr val="000000"/>
+                          </a:solidFill>
+                          <a:effectLst/>
+                          <a:uFillTx/>
+                          <a:latin typeface="メイリオ"/>
+                          <a:ea typeface="メイリオ"/>
+                        </a:rPr>
+                        <a:t>利用率：極めて低</a:t>
+                      </a:r>
+                      <a:endParaRPr lang="en-US" sz="1000" b="0" u="none" strike="noStrike">
+                        <a:solidFill>
+                          <a:srgbClr val="000000"/>
+                        </a:solidFill>
+                        <a:effectLst/>
+                        <a:uFillTx/>
+                        <a:latin typeface="Arial"/>
+                      </a:endParaRPr>
+                    </a:p>
+                  </a:txBody>
+                  <a:tcPr marL="6480" marR="6480" anchor="ctr">
+                    <a:lnL w="6480">
+                      <a:solidFill>
+                        <a:srgbClr val="000000"/>
+                      </a:solidFill>
+                      <a:prstDash val="solid"/>
+                    </a:lnL>
+                    <a:lnR w="6480">
+                      <a:solidFill>
+                        <a:srgbClr val="000000"/>
+                      </a:solidFill>
+                      <a:prstDash val="solid"/>
+                    </a:lnR>
+                    <a:lnT w="6480">
+                      <a:solidFill>
+                        <a:srgbClr val="000000"/>
+                      </a:solidFill>
+                      <a:prstDash val="solid"/>
+                    </a:lnT>
+                    <a:lnB w="6480">
+                      <a:noFill/>
+                      <a:prstDash val="solid"/>
+                    </a:lnB>
+                    <a:solidFill>
+                      <a:schemeClr val="lt1"/>
+                    </a:solidFill>
+                  </a:tcPr>
+                </a:tc>
+                <a:tc rowSpan="2">
+                  <a:txBody>
+                    <a:bodyPr/>
+                    <a:lstStyle/>
+                    <a:p>
+                      <a:pPr algn="ctr" defTabSz="914400">
+                        <a:lnSpc>
+                          <a:spcPct val="100000"/>
+                        </a:lnSpc>
+                      </a:pPr>
+                      <a:r>
+                        <a:rPr lang="en-US" sz="800" b="0" u="none" strike="noStrike">
+                          <a:solidFill>
+                            <a:srgbClr val="000000"/>
+                          </a:solidFill>
+                          <a:effectLst/>
+                          <a:uFillTx/>
+                          <a:latin typeface="メイリオ"/>
+                          <a:ea typeface="メイリオ"/>
+                        </a:rPr>
+                        <a:t>Tiktok YouTube</a:t>
+                      </a:r>
+                      <a:r>
+                        <a:rPr lang="ja-JP" sz="800" b="0" u="none" strike="noStrike">
+                          <a:solidFill>
+                            <a:srgbClr val="000000"/>
+                          </a:solidFill>
+                          <a:effectLst/>
+                          <a:uFillTx/>
+                          <a:latin typeface="メイリオ"/>
+                          <a:ea typeface="メイリオ"/>
+                        </a:rPr>
+                        <a:t>が情報収集の起点。</a:t>
+                      </a:r>
+                      <a:br>
+                        <a:rPr sz="800"/>
+                      </a:br>
+                      <a:r>
+                        <a:rPr lang="en-US" sz="800" b="0" u="none" strike="noStrike">
+                          <a:solidFill>
+                            <a:srgbClr val="000000"/>
+                          </a:solidFill>
+                          <a:effectLst/>
+                          <a:uFillTx/>
+                          <a:latin typeface="メイリオ"/>
+                          <a:ea typeface="メイリオ"/>
+                        </a:rPr>
+                        <a:t>Instagram</a:t>
+                      </a:r>
+                      <a:r>
+                        <a:rPr lang="ja-JP" sz="800" b="0" u="none" strike="noStrike">
+                          <a:solidFill>
+                            <a:srgbClr val="000000"/>
+                          </a:solidFill>
+                          <a:effectLst/>
+                          <a:uFillTx/>
+                          <a:latin typeface="メイリオ"/>
+                          <a:ea typeface="メイリオ"/>
+                        </a:rPr>
+                        <a:t>、</a:t>
+                      </a:r>
+                      <a:r>
+                        <a:rPr lang="en-US" sz="800" b="0" u="none" strike="noStrike">
+                          <a:solidFill>
+                            <a:srgbClr val="000000"/>
+                          </a:solidFill>
+                          <a:effectLst/>
+                          <a:uFillTx/>
+                          <a:latin typeface="メイリオ"/>
+                          <a:ea typeface="メイリオ"/>
+                        </a:rPr>
+                        <a:t>X</a:t>
+                      </a:r>
+                      <a:r>
+                        <a:rPr lang="ja-JP" sz="800" b="0" u="none" strike="noStrike">
+                          <a:solidFill>
+                            <a:srgbClr val="000000"/>
+                          </a:solidFill>
+                          <a:effectLst/>
+                          <a:uFillTx/>
+                          <a:latin typeface="メイリオ"/>
+                          <a:ea typeface="メイリオ"/>
+                        </a:rPr>
+                        <a:t>の</a:t>
+                      </a:r>
+                      <a:r>
+                        <a:rPr lang="en-US" sz="800" b="0" u="none" strike="noStrike">
+                          <a:solidFill>
+                            <a:srgbClr val="000000"/>
+                          </a:solidFill>
+                          <a:effectLst/>
+                          <a:uFillTx/>
+                          <a:latin typeface="メイリオ"/>
+                          <a:ea typeface="メイリオ"/>
+                        </a:rPr>
+                        <a:t>DM</a:t>
+                      </a:r>
+                      <a:r>
+                        <a:rPr lang="ja-JP" sz="800" b="0" u="none" strike="noStrike">
+                          <a:solidFill>
+                            <a:srgbClr val="000000"/>
+                          </a:solidFill>
+                          <a:effectLst/>
+                          <a:uFillTx/>
+                          <a:latin typeface="メイリオ"/>
+                          <a:ea typeface="メイリオ"/>
+                        </a:rPr>
+                        <a:t>も</a:t>
+                      </a:r>
+                      <a:endParaRPr lang="en-US" sz="800" b="0" u="none" strike="noStrike">
+                        <a:solidFill>
+                          <a:srgbClr val="000000"/>
+                        </a:solidFill>
+                        <a:effectLst/>
+                        <a:uFillTx/>
+                        <a:latin typeface="Arial"/>
+                      </a:endParaRPr>
+                    </a:p>
+                    <a:p>
+                      <a:pPr algn="ctr" defTabSz="914400">
+                        <a:lnSpc>
+                          <a:spcPct val="100000"/>
+                        </a:lnSpc>
+                      </a:pPr>
+                      <a:r>
+                        <a:rPr lang="ja-JP" sz="800" b="0" u="none" strike="noStrike">
+                          <a:solidFill>
+                            <a:srgbClr val="000000"/>
+                          </a:solidFill>
+                          <a:effectLst/>
+                          <a:uFillTx/>
+                          <a:latin typeface="メイリオ"/>
+                          <a:ea typeface="メイリオ"/>
+                        </a:rPr>
+                        <a:t>連絡網として活用。</a:t>
+                      </a:r>
+                      <a:endParaRPr lang="en-US" sz="800" b="0" u="none" strike="noStrike">
+                        <a:solidFill>
+                          <a:srgbClr val="000000"/>
+                        </a:solidFill>
+                        <a:effectLst/>
+                        <a:uFillTx/>
+                        <a:latin typeface="Arial"/>
+                      </a:endParaRPr>
+                    </a:p>
+                  </a:txBody>
+                  <a:tcPr marL="6480" marR="6480" anchor="ctr">
+                    <a:lnL w="6480">
+                      <a:solidFill>
+                        <a:srgbClr val="000000"/>
+                      </a:solidFill>
+                      <a:prstDash val="solid"/>
+                    </a:lnL>
+                    <a:lnR w="6480">
+                      <a:solidFill>
+                        <a:srgbClr val="000000"/>
+                      </a:solidFill>
+                      <a:prstDash val="solid"/>
+                    </a:lnR>
+                    <a:lnT w="6480">
+                      <a:solidFill>
+                        <a:srgbClr val="000000"/>
+                      </a:solidFill>
+                      <a:prstDash val="solid"/>
+                    </a:lnT>
+                    <a:lnB w="6480">
+                      <a:solidFill>
+                        <a:srgbClr val="000000"/>
+                      </a:solidFill>
+                      <a:prstDash val="solid"/>
+                    </a:lnB>
+                    <a:noFill/>
+                  </a:tcPr>
+                </a:tc>
+                <a:extLst>
+                  <a:ext uri="{0D108BD9-81ED-4DB2-BD59-A6C34878D82A}">
+                    <a16:rowId xmlns:a16="http://schemas.microsoft.com/office/drawing/2014/main" val="10001"/>
+                  </a:ext>
+                </a:extLst>
+              </a:tr>
+              <a:tr h="499320">
+                <a:tc vMerge="1">
+                  <a:txBody>
+                    <a:bodyPr/>
+                    <a:lstStyle/>
+                    <a:p>
+                      <a:endParaRPr lang="en-US" sz="1800" b="0" u="none" strike="noStrike">
+                        <a:solidFill>
+                          <a:srgbClr val="000000"/>
+                        </a:solidFill>
+                        <a:effectLst/>
+                        <a:uFillTx/>
+                        <a:latin typeface="Arial"/>
+                      </a:endParaRPr>
+                    </a:p>
+                  </a:txBody>
+                  <a:tcPr marL="90000" marR="90000">
+                    <a:lnL>
+                      <a:noFill/>
+                    </a:lnL>
+                    <a:lnR>
+                      <a:noFill/>
+                    </a:lnR>
+                    <a:lnT>
+                      <a:noFill/>
+                    </a:lnT>
+                    <a:lnB>
+                      <a:noFill/>
+                    </a:lnB>
+                    <a:solidFill>
+                      <a:srgbClr val="729FCF"/>
+                    </a:solidFill>
+                  </a:tcPr>
+                </a:tc>
+                <a:tc>
+                  <a:txBody>
+                    <a:bodyPr/>
+                    <a:lstStyle/>
+                    <a:p>
+                      <a:pPr algn="ctr" defTabSz="914400">
+                        <a:lnSpc>
+                          <a:spcPct val="100000"/>
+                        </a:lnSpc>
+                      </a:pPr>
+                      <a:r>
+                        <a:rPr lang="ja-JP" sz="800" b="0" u="none" strike="noStrike">
+                          <a:solidFill>
+                            <a:srgbClr val="000000"/>
+                          </a:solidFill>
+                          <a:effectLst/>
+                          <a:uFillTx/>
+                          <a:latin typeface="メイリオ"/>
+                          <a:ea typeface="メイリオ"/>
+                        </a:rPr>
+                        <a:t>日常連絡の絶対的インフラ。</a:t>
+                      </a:r>
+                      <a:endParaRPr lang="en-US" sz="800" b="0" u="none" strike="noStrike">
+                        <a:solidFill>
+                          <a:srgbClr val="000000"/>
+                        </a:solidFill>
+                        <a:effectLst/>
+                        <a:uFillTx/>
+                        <a:latin typeface="Arial"/>
+                      </a:endParaRPr>
+                    </a:p>
+                  </a:txBody>
+                  <a:tcPr marL="6480" marR="6480" anchor="ctr">
+                    <a:lnL w="6480">
+                      <a:solidFill>
+                        <a:srgbClr val="000000"/>
+                      </a:solidFill>
+                      <a:prstDash val="solid"/>
+                    </a:lnL>
+                    <a:lnR w="6480">
+                      <a:solidFill>
+                        <a:srgbClr val="000000"/>
+                      </a:solidFill>
+                      <a:prstDash val="solid"/>
+                    </a:lnR>
+                    <a:lnT w="12240">
+                      <a:noFill/>
+                      <a:prstDash val="solid"/>
+                    </a:lnT>
+                    <a:lnB w="6480">
+                      <a:solidFill>
+                        <a:srgbClr val="000000"/>
+                      </a:solidFill>
+                      <a:prstDash val="solid"/>
+                    </a:lnB>
+                    <a:solidFill>
+                      <a:srgbClr val="FFFF99"/>
+                    </a:solidFill>
+                  </a:tcPr>
+                </a:tc>
+                <a:tc>
+                  <a:txBody>
+                    <a:bodyPr/>
+                    <a:lstStyle/>
+                    <a:p>
+                      <a:pPr algn="ctr" defTabSz="914400">
+                        <a:lnSpc>
+                          <a:spcPct val="100000"/>
+                        </a:lnSpc>
+                      </a:pPr>
+                      <a:r>
+                        <a:rPr lang="ja-JP" sz="800" b="0" u="none" strike="noStrike">
+                          <a:solidFill>
+                            <a:srgbClr val="000000"/>
+                          </a:solidFill>
+                          <a:effectLst/>
+                          <a:uFillTx/>
+                          <a:latin typeface="メイリオ"/>
+                          <a:ea typeface="メイリオ"/>
+                        </a:rPr>
+                        <a:t>企業や公式からの連絡は</a:t>
+                      </a:r>
+                      <a:endParaRPr lang="en-US" sz="800" b="0" u="none" strike="noStrike">
+                        <a:solidFill>
+                          <a:srgbClr val="000000"/>
+                        </a:solidFill>
+                        <a:effectLst/>
+                        <a:uFillTx/>
+                        <a:latin typeface="Arial"/>
+                      </a:endParaRPr>
+                    </a:p>
+                    <a:p>
+                      <a:pPr algn="ctr" defTabSz="914400">
+                        <a:lnSpc>
+                          <a:spcPct val="100000"/>
+                        </a:lnSpc>
+                      </a:pPr>
+                      <a:r>
+                        <a:rPr lang="ja-JP" sz="800" b="0" u="none" strike="noStrike">
+                          <a:solidFill>
+                            <a:srgbClr val="000000"/>
+                          </a:solidFill>
+                          <a:effectLst/>
+                          <a:uFillTx/>
+                          <a:latin typeface="メイリオ"/>
+                          <a:ea typeface="メイリオ"/>
+                        </a:rPr>
+                        <a:t>読まれない傾向。</a:t>
+                      </a:r>
+                      <a:endParaRPr lang="en-US" sz="800" b="0" u="none" strike="noStrike">
+                        <a:solidFill>
+                          <a:srgbClr val="000000"/>
+                        </a:solidFill>
+                        <a:effectLst/>
+                        <a:uFillTx/>
+                        <a:latin typeface="Arial"/>
+                      </a:endParaRPr>
+                    </a:p>
+                  </a:txBody>
+                  <a:tcPr marL="6480" marR="6480" anchor="ctr">
+                    <a:lnL w="6480">
+                      <a:solidFill>
+                        <a:srgbClr val="000000"/>
+                      </a:solidFill>
+                      <a:prstDash val="solid"/>
+                    </a:lnL>
+                    <a:lnR w="6480">
+                      <a:solidFill>
+                        <a:srgbClr val="000000"/>
+                      </a:solidFill>
+                      <a:prstDash val="solid"/>
+                    </a:lnR>
+                    <a:lnT w="12240">
+                      <a:noFill/>
+                      <a:prstDash val="solid"/>
+                    </a:lnT>
+                    <a:lnB w="6480">
+                      <a:solidFill>
+                        <a:srgbClr val="000000"/>
+                      </a:solidFill>
+                      <a:prstDash val="solid"/>
+                    </a:lnB>
+                    <a:solidFill>
+                      <a:schemeClr val="lt1"/>
+                    </a:solidFill>
+                  </a:tcPr>
+                </a:tc>
+                <a:tc>
+                  <a:txBody>
+                    <a:bodyPr/>
+                    <a:lstStyle/>
+                    <a:p>
+                      <a:pPr algn="ctr" defTabSz="914400">
+                        <a:lnSpc>
+                          <a:spcPct val="100000"/>
+                        </a:lnSpc>
+                      </a:pPr>
+                      <a:r>
+                        <a:rPr lang="ja-JP" sz="800" b="0" u="none" strike="noStrike">
+                          <a:solidFill>
+                            <a:srgbClr val="000000"/>
+                          </a:solidFill>
+                          <a:effectLst/>
+                          <a:uFillTx/>
+                          <a:latin typeface="メイリオ"/>
+                          <a:ea typeface="メイリオ"/>
+                        </a:rPr>
+                        <a:t>「電話恐怖症」を持つ人も。</a:t>
+                      </a:r>
+                      <a:endParaRPr lang="en-US" sz="800" b="0" u="none" strike="noStrike">
+                        <a:solidFill>
+                          <a:srgbClr val="000000"/>
+                        </a:solidFill>
+                        <a:effectLst/>
+                        <a:uFillTx/>
+                        <a:latin typeface="Arial"/>
+                      </a:endParaRPr>
+                    </a:p>
+                  </a:txBody>
+                  <a:tcPr marL="6480" marR="6480" anchor="ctr">
+                    <a:lnL w="6480">
+                      <a:solidFill>
+                        <a:srgbClr val="000000"/>
+                      </a:solidFill>
+                      <a:prstDash val="solid"/>
+                    </a:lnL>
+                    <a:lnR w="6480">
+                      <a:solidFill>
+                        <a:srgbClr val="000000"/>
+                      </a:solidFill>
+                      <a:prstDash val="solid"/>
+                    </a:lnR>
+                    <a:lnT w="12240">
+                      <a:noFill/>
+                      <a:prstDash val="solid"/>
+                    </a:lnT>
+                    <a:lnB w="6480">
+                      <a:solidFill>
+                        <a:srgbClr val="000000"/>
+                      </a:solidFill>
+                      <a:prstDash val="solid"/>
+                    </a:lnB>
+                    <a:solidFill>
+                      <a:schemeClr val="lt1"/>
+                    </a:solidFill>
+                  </a:tcPr>
+                </a:tc>
+                <a:tc vMerge="1">
+                  <a:txBody>
+                    <a:bodyPr/>
+                    <a:lstStyle/>
+                    <a:p>
+                      <a:endParaRPr lang="en-US" sz="1800" b="0" u="none" strike="noStrike">
+                        <a:solidFill>
+                          <a:srgbClr val="000000"/>
+                        </a:solidFill>
+                        <a:effectLst/>
+                        <a:uFillTx/>
+                        <a:latin typeface="Arial"/>
+                      </a:endParaRPr>
+                    </a:p>
+                  </a:txBody>
+                  <a:tcPr marL="90000" marR="90000">
+                    <a:lnL>
+                      <a:noFill/>
+                    </a:lnL>
+                    <a:lnR>
+                      <a:noFill/>
+                    </a:lnR>
+                    <a:lnT>
+                      <a:noFill/>
+                    </a:lnT>
+                    <a:lnB>
+                      <a:noFill/>
+                    </a:lnB>
+                    <a:solidFill>
+                      <a:srgbClr val="729FCF"/>
+                    </a:solidFill>
+                  </a:tcPr>
+                </a:tc>
+                <a:extLst>
+                  <a:ext uri="{0D108BD9-81ED-4DB2-BD59-A6C34878D82A}">
+                    <a16:rowId xmlns:a16="http://schemas.microsoft.com/office/drawing/2014/main" val="10002"/>
+                  </a:ext>
+                </a:extLst>
+              </a:tr>
+              <a:tr h="499320">
+                <a:tc rowSpan="2">
+                  <a:txBody>
+                    <a:bodyPr/>
+                    <a:lstStyle/>
+                    <a:p>
+                      <a:pPr defTabSz="914400">
+                        <a:lnSpc>
+                          <a:spcPct val="100000"/>
+                        </a:lnSpc>
+                      </a:pPr>
+                      <a:r>
+                        <a:rPr lang="ja-JP" sz="1050" b="1" u="none" strike="noStrike">
+                          <a:solidFill>
+                            <a:srgbClr val="000000"/>
+                          </a:solidFill>
+                          <a:effectLst/>
+                          <a:uFillTx/>
+                          <a:latin typeface="メイリオ"/>
+                          <a:ea typeface="メイリオ"/>
+                        </a:rPr>
+                        <a:t>　　　</a:t>
+                      </a:r>
+                      <a:r>
+                        <a:rPr lang="en-US" sz="1050" b="1" u="none" strike="noStrike">
+                          <a:solidFill>
+                            <a:srgbClr val="000000"/>
+                          </a:solidFill>
+                          <a:effectLst/>
+                          <a:uFillTx/>
+                          <a:latin typeface="メイリオ"/>
+                          <a:ea typeface="メイリオ"/>
+                        </a:rPr>
+                        <a:t>30</a:t>
+                      </a:r>
+                      <a:r>
+                        <a:rPr lang="ja-JP" sz="1050" b="1" u="none" strike="noStrike">
+                          <a:solidFill>
+                            <a:srgbClr val="000000"/>
+                          </a:solidFill>
+                          <a:effectLst/>
+                          <a:uFillTx/>
+                          <a:latin typeface="メイリオ"/>
+                          <a:ea typeface="メイリオ"/>
+                        </a:rPr>
+                        <a:t>代〜</a:t>
+                      </a:r>
+                      <a:r>
+                        <a:rPr lang="en-US" sz="1050" b="1" u="none" strike="noStrike">
+                          <a:solidFill>
+                            <a:srgbClr val="000000"/>
+                          </a:solidFill>
+                          <a:effectLst/>
+                          <a:uFillTx/>
+                          <a:latin typeface="メイリオ"/>
+                          <a:ea typeface="メイリオ"/>
+                        </a:rPr>
+                        <a:t>40</a:t>
+                      </a:r>
+                      <a:r>
+                        <a:rPr lang="ja-JP" sz="1050" b="1" u="none" strike="noStrike">
+                          <a:solidFill>
+                            <a:srgbClr val="000000"/>
+                          </a:solidFill>
+                          <a:effectLst/>
+                          <a:uFillTx/>
+                          <a:latin typeface="メイリオ"/>
+                          <a:ea typeface="メイリオ"/>
+                        </a:rPr>
+                        <a:t>代</a:t>
+                      </a:r>
+                      <a:endParaRPr lang="en-US" sz="1050" b="0" u="none" strike="noStrike">
+                        <a:solidFill>
+                          <a:srgbClr val="000000"/>
+                        </a:solidFill>
+                        <a:effectLst/>
+                        <a:uFillTx/>
+                        <a:latin typeface="Arial"/>
+                      </a:endParaRPr>
+                    </a:p>
+                  </a:txBody>
+                  <a:tcPr marL="6480" marR="6480" anchor="ctr">
+                    <a:lnL w="6480">
+                      <a:solidFill>
+                        <a:srgbClr val="000000"/>
+                      </a:solidFill>
+                      <a:prstDash val="solid"/>
+                    </a:lnL>
+                    <a:lnR w="6480">
+                      <a:solidFill>
+                        <a:srgbClr val="000000"/>
+                      </a:solidFill>
+                      <a:prstDash val="solid"/>
+                    </a:lnR>
+                    <a:lnT w="6480">
+                      <a:solidFill>
+                        <a:srgbClr val="000000"/>
+                      </a:solidFill>
+                      <a:prstDash val="solid"/>
+                    </a:lnT>
+                    <a:lnB w="6480">
+                      <a:solidFill>
+                        <a:srgbClr val="000000"/>
+                      </a:solidFill>
+                      <a:prstDash val="solid"/>
+                    </a:lnB>
+                    <a:solidFill>
+                      <a:srgbClr val="DAE9F8"/>
+                    </a:solidFill>
+                  </a:tcPr>
+                </a:tc>
+                <a:tc>
+                  <a:txBody>
+                    <a:bodyPr/>
+                    <a:lstStyle/>
+                    <a:p>
+                      <a:pPr algn="ctr" defTabSz="914400">
+                        <a:lnSpc>
+                          <a:spcPct val="100000"/>
+                        </a:lnSpc>
+                      </a:pPr>
+                      <a:r>
+                        <a:rPr lang="ja-JP" sz="1000" b="1" u="none" strike="noStrike">
+                          <a:solidFill>
+                            <a:srgbClr val="000000"/>
+                          </a:solidFill>
+                          <a:effectLst/>
+                          <a:uFillTx/>
+                          <a:latin typeface="メイリオ"/>
+                          <a:ea typeface="メイリオ"/>
+                        </a:rPr>
+                        <a:t>利用率：</a:t>
+                      </a:r>
+                      <a:r>
+                        <a:rPr lang="en-US" sz="1000" b="1" u="none" strike="noStrike">
+                          <a:solidFill>
+                            <a:srgbClr val="000000"/>
+                          </a:solidFill>
+                          <a:effectLst/>
+                          <a:uFillTx/>
+                          <a:latin typeface="メイリオ"/>
+                          <a:ea typeface="メイリオ"/>
+                        </a:rPr>
+                        <a:t>90%</a:t>
+                      </a:r>
+                      <a:r>
+                        <a:rPr lang="ja-JP" sz="1000" b="1" u="none" strike="noStrike">
+                          <a:solidFill>
+                            <a:srgbClr val="000000"/>
+                          </a:solidFill>
+                          <a:effectLst/>
+                          <a:uFillTx/>
+                          <a:latin typeface="メイリオ"/>
+                          <a:ea typeface="メイリオ"/>
+                        </a:rPr>
+                        <a:t>以上</a:t>
+                      </a:r>
+                      <a:endParaRPr lang="en-US" sz="1000" b="0" u="none" strike="noStrike">
+                        <a:solidFill>
+                          <a:srgbClr val="000000"/>
+                        </a:solidFill>
+                        <a:effectLst/>
+                        <a:uFillTx/>
+                        <a:latin typeface="Arial"/>
+                      </a:endParaRPr>
+                    </a:p>
+                  </a:txBody>
+                  <a:tcPr marL="6480" marR="6480" anchor="ctr">
+                    <a:lnL w="6480">
+                      <a:solidFill>
+                        <a:srgbClr val="000000"/>
+                      </a:solidFill>
+                      <a:prstDash val="solid"/>
+                    </a:lnL>
+                    <a:lnR w="6480">
+                      <a:solidFill>
+                        <a:srgbClr val="000000"/>
+                      </a:solidFill>
+                      <a:prstDash val="solid"/>
+                    </a:lnR>
+                    <a:lnT w="6480">
+                      <a:solidFill>
+                        <a:srgbClr val="000000"/>
+                      </a:solidFill>
+                      <a:prstDash val="solid"/>
+                    </a:lnT>
+                    <a:lnB w="6480">
+                      <a:noFill/>
+                      <a:prstDash val="solid"/>
+                    </a:lnB>
+                    <a:solidFill>
+                      <a:srgbClr val="FFFF99"/>
+                    </a:solidFill>
+                  </a:tcPr>
+                </a:tc>
+                <a:tc>
+                  <a:txBody>
+                    <a:bodyPr/>
+                    <a:lstStyle/>
+                    <a:p>
+                      <a:pPr algn="ctr" defTabSz="914400">
+                        <a:lnSpc>
+                          <a:spcPct val="100000"/>
+                        </a:lnSpc>
+                      </a:pPr>
+                      <a:r>
+                        <a:rPr lang="ja-JP" sz="1000" b="1" u="none" strike="noStrike">
+                          <a:solidFill>
+                            <a:srgbClr val="000000"/>
+                          </a:solidFill>
+                          <a:effectLst/>
+                          <a:uFillTx/>
+                          <a:latin typeface="メイリオ"/>
+                          <a:ea typeface="メイリオ"/>
+                        </a:rPr>
+                        <a:t>利用率：中〜高</a:t>
+                      </a:r>
+                      <a:endParaRPr lang="en-US" sz="1000" b="0" u="none" strike="noStrike">
+                        <a:solidFill>
+                          <a:srgbClr val="000000"/>
+                        </a:solidFill>
+                        <a:effectLst/>
+                        <a:uFillTx/>
+                        <a:latin typeface="Arial"/>
+                      </a:endParaRPr>
+                    </a:p>
+                  </a:txBody>
+                  <a:tcPr marL="6480" marR="6480" anchor="ctr">
+                    <a:lnL w="6480">
+                      <a:solidFill>
+                        <a:srgbClr val="000000"/>
+                      </a:solidFill>
+                      <a:prstDash val="solid"/>
+                    </a:lnL>
+                    <a:lnR w="6480">
+                      <a:solidFill>
+                        <a:srgbClr val="000000"/>
+                      </a:solidFill>
+                      <a:prstDash val="solid"/>
+                    </a:lnR>
+                    <a:lnT w="6480">
+                      <a:solidFill>
+                        <a:srgbClr val="000000"/>
+                      </a:solidFill>
+                      <a:prstDash val="solid"/>
+                    </a:lnT>
+                    <a:lnB w="6480">
+                      <a:noFill/>
+                      <a:prstDash val="solid"/>
+                    </a:lnB>
+                    <a:solidFill>
+                      <a:schemeClr val="lt1"/>
+                    </a:solidFill>
+                  </a:tcPr>
+                </a:tc>
+                <a:tc>
+                  <a:txBody>
+                    <a:bodyPr/>
+                    <a:lstStyle/>
+                    <a:p>
+                      <a:pPr algn="ctr" defTabSz="914400">
+                        <a:lnSpc>
+                          <a:spcPct val="100000"/>
+                        </a:lnSpc>
+                      </a:pPr>
+                      <a:r>
+                        <a:rPr lang="ja-JP" sz="1000" b="1" u="none" strike="noStrike">
+                          <a:solidFill>
+                            <a:srgbClr val="000000"/>
+                          </a:solidFill>
+                          <a:effectLst/>
+                          <a:uFillTx/>
+                          <a:latin typeface="メイリオ"/>
+                          <a:ea typeface="メイリオ"/>
+                        </a:rPr>
+                        <a:t>利用率：中</a:t>
+                      </a:r>
+                      <a:endParaRPr lang="en-US" sz="1000" b="0" u="none" strike="noStrike">
+                        <a:solidFill>
+                          <a:srgbClr val="000000"/>
+                        </a:solidFill>
+                        <a:effectLst/>
+                        <a:uFillTx/>
+                        <a:latin typeface="Arial"/>
+                      </a:endParaRPr>
+                    </a:p>
+                  </a:txBody>
+                  <a:tcPr marL="6480" marR="6480" anchor="ctr">
+                    <a:lnL w="6480">
+                      <a:solidFill>
+                        <a:srgbClr val="000000"/>
+                      </a:solidFill>
+                      <a:prstDash val="solid"/>
+                    </a:lnL>
+                    <a:lnR w="6480">
+                      <a:solidFill>
+                        <a:srgbClr val="000000"/>
+                      </a:solidFill>
+                      <a:prstDash val="solid"/>
+                    </a:lnR>
+                    <a:lnT w="6480">
+                      <a:solidFill>
+                        <a:srgbClr val="000000"/>
+                      </a:solidFill>
+                      <a:prstDash val="solid"/>
+                    </a:lnT>
+                    <a:lnB w="6480">
+                      <a:noFill/>
+                      <a:prstDash val="solid"/>
+                    </a:lnB>
+                    <a:solidFill>
+                      <a:schemeClr val="lt1"/>
+                    </a:solidFill>
+                  </a:tcPr>
+                </a:tc>
+                <a:tc rowSpan="2">
+                  <a:txBody>
+                    <a:bodyPr/>
+                    <a:lstStyle/>
+                    <a:p>
+                      <a:pPr algn="ctr" defTabSz="914400">
+                        <a:lnSpc>
+                          <a:spcPct val="100000"/>
+                        </a:lnSpc>
+                      </a:pPr>
+                      <a:r>
+                        <a:rPr lang="en-US" sz="800" b="0" u="none" strike="noStrike">
+                          <a:solidFill>
+                            <a:srgbClr val="000000"/>
+                          </a:solidFill>
+                          <a:effectLst/>
+                          <a:uFillTx/>
+                          <a:latin typeface="メイリオ"/>
+                          <a:ea typeface="メイリオ"/>
+                        </a:rPr>
+                        <a:t>Facebook</a:t>
+                      </a:r>
+                      <a:r>
+                        <a:rPr lang="ja-JP" sz="800" b="0" u="none" strike="noStrike">
+                          <a:solidFill>
+                            <a:srgbClr val="000000"/>
+                          </a:solidFill>
+                          <a:effectLst/>
+                          <a:uFillTx/>
+                          <a:latin typeface="メイリオ"/>
+                          <a:ea typeface="メイリオ"/>
+                        </a:rPr>
+                        <a:t>や</a:t>
+                      </a:r>
+                      <a:r>
+                        <a:rPr lang="en-US" sz="800" b="0" u="none" strike="noStrike">
+                          <a:solidFill>
+                            <a:srgbClr val="000000"/>
+                          </a:solidFill>
+                          <a:effectLst/>
+                          <a:uFillTx/>
+                          <a:latin typeface="メイリオ"/>
+                          <a:ea typeface="メイリオ"/>
+                        </a:rPr>
+                        <a:t>X</a:t>
+                      </a:r>
+                      <a:r>
+                        <a:rPr lang="ja-JP" sz="800" b="0" u="none" strike="noStrike">
+                          <a:solidFill>
+                            <a:srgbClr val="000000"/>
+                          </a:solidFill>
+                          <a:effectLst/>
+                          <a:uFillTx/>
+                          <a:latin typeface="メイリオ"/>
+                          <a:ea typeface="メイリオ"/>
+                        </a:rPr>
+                        <a:t>での情報収集が活発。</a:t>
+                      </a:r>
+                      <a:endParaRPr lang="en-US" sz="800" b="0" u="none" strike="noStrike">
+                        <a:solidFill>
+                          <a:srgbClr val="000000"/>
+                        </a:solidFill>
+                        <a:effectLst/>
+                        <a:uFillTx/>
+                        <a:latin typeface="Arial"/>
+                      </a:endParaRPr>
+                    </a:p>
+                  </a:txBody>
+                  <a:tcPr marL="6480" marR="6480" anchor="ctr">
+                    <a:lnL w="6480">
+                      <a:solidFill>
+                        <a:srgbClr val="000000"/>
+                      </a:solidFill>
+                      <a:prstDash val="solid"/>
+                    </a:lnL>
+                    <a:lnR w="6480">
+                      <a:solidFill>
+                        <a:srgbClr val="000000"/>
+                      </a:solidFill>
+                      <a:prstDash val="solid"/>
+                    </a:lnR>
+                    <a:lnT w="6480">
+                      <a:solidFill>
+                        <a:srgbClr val="000000"/>
+                      </a:solidFill>
+                      <a:prstDash val="solid"/>
+                    </a:lnT>
+                    <a:lnB w="6480">
+                      <a:solidFill>
+                        <a:srgbClr val="000000"/>
+                      </a:solidFill>
+                      <a:prstDash val="solid"/>
+                    </a:lnB>
+                    <a:noFill/>
+                  </a:tcPr>
+                </a:tc>
+                <a:extLst>
+                  <a:ext uri="{0D108BD9-81ED-4DB2-BD59-A6C34878D82A}">
+                    <a16:rowId xmlns:a16="http://schemas.microsoft.com/office/drawing/2014/main" val="10003"/>
+                  </a:ext>
+                </a:extLst>
+              </a:tr>
+              <a:tr h="499320">
+                <a:tc vMerge="1">
+                  <a:txBody>
+                    <a:bodyPr/>
+                    <a:lstStyle/>
+                    <a:p>
+                      <a:endParaRPr lang="en-US" sz="1800" b="0" u="none" strike="noStrike">
+                        <a:solidFill>
+                          <a:srgbClr val="000000"/>
+                        </a:solidFill>
+                        <a:effectLst/>
+                        <a:uFillTx/>
+                        <a:latin typeface="Arial"/>
+                      </a:endParaRPr>
+                    </a:p>
+                  </a:txBody>
+                  <a:tcPr marL="90000" marR="90000">
+                    <a:lnL>
+                      <a:noFill/>
+                    </a:lnL>
+                    <a:lnR>
+                      <a:noFill/>
+                    </a:lnR>
+                    <a:lnT>
+                      <a:noFill/>
+                    </a:lnT>
+                    <a:lnB>
+                      <a:noFill/>
+                    </a:lnB>
+                    <a:solidFill>
+                      <a:srgbClr val="729FCF"/>
+                    </a:solidFill>
+                  </a:tcPr>
+                </a:tc>
+                <a:tc>
+                  <a:txBody>
+                    <a:bodyPr/>
+                    <a:lstStyle/>
+                    <a:p>
+                      <a:pPr algn="ctr" defTabSz="914400">
+                        <a:lnSpc>
+                          <a:spcPct val="100000"/>
+                        </a:lnSpc>
+                      </a:pPr>
+                      <a:r>
+                        <a:rPr lang="ja-JP" sz="800" b="0" u="none" strike="noStrike">
+                          <a:solidFill>
+                            <a:srgbClr val="000000"/>
+                          </a:solidFill>
+                          <a:effectLst/>
+                          <a:uFillTx/>
+                          <a:latin typeface="メイリオ"/>
+                          <a:ea typeface="メイリオ"/>
+                        </a:rPr>
+                        <a:t>プライベートの連絡網。</a:t>
+                      </a:r>
+                      <a:endParaRPr lang="en-US" sz="800" b="0" u="none" strike="noStrike">
+                        <a:solidFill>
+                          <a:srgbClr val="000000"/>
+                        </a:solidFill>
+                        <a:effectLst/>
+                        <a:uFillTx/>
+                        <a:latin typeface="Arial"/>
+                      </a:endParaRPr>
+                    </a:p>
+                  </a:txBody>
+                  <a:tcPr marL="6480" marR="6480" anchor="ctr">
+                    <a:lnL w="6480">
+                      <a:solidFill>
+                        <a:srgbClr val="000000"/>
+                      </a:solidFill>
+                      <a:prstDash val="solid"/>
+                    </a:lnL>
+                    <a:lnR w="6480">
+                      <a:solidFill>
+                        <a:srgbClr val="000000"/>
+                      </a:solidFill>
+                      <a:prstDash val="solid"/>
+                    </a:lnR>
+                    <a:lnT w="12240">
+                      <a:noFill/>
+                      <a:prstDash val="solid"/>
+                    </a:lnT>
+                    <a:lnB w="6480">
+                      <a:solidFill>
+                        <a:srgbClr val="000000"/>
+                      </a:solidFill>
+                      <a:prstDash val="solid"/>
+                    </a:lnB>
+                    <a:solidFill>
+                      <a:srgbClr val="FFFF99"/>
+                    </a:solidFill>
+                  </a:tcPr>
+                </a:tc>
+                <a:tc>
+                  <a:txBody>
+                    <a:bodyPr/>
+                    <a:lstStyle/>
+                    <a:p>
+                      <a:pPr algn="ctr" defTabSz="914400">
+                        <a:lnSpc>
+                          <a:spcPct val="100000"/>
+                        </a:lnSpc>
+                      </a:pPr>
+                      <a:r>
+                        <a:rPr lang="ja-JP" sz="800" b="0" u="none" strike="noStrike">
+                          <a:solidFill>
+                            <a:srgbClr val="000000"/>
+                          </a:solidFill>
+                          <a:effectLst/>
+                          <a:uFillTx/>
+                          <a:latin typeface="メイリオ"/>
+                          <a:ea typeface="メイリオ"/>
+                        </a:rPr>
+                        <a:t>仕事や、メルマガでの</a:t>
+                      </a:r>
+                      <a:endParaRPr lang="en-US" sz="800" b="0" u="none" strike="noStrike">
+                        <a:solidFill>
+                          <a:srgbClr val="000000"/>
+                        </a:solidFill>
+                        <a:effectLst/>
+                        <a:uFillTx/>
+                        <a:latin typeface="Arial"/>
+                      </a:endParaRPr>
+                    </a:p>
+                    <a:p>
+                      <a:pPr algn="ctr" defTabSz="914400">
+                        <a:lnSpc>
+                          <a:spcPct val="100000"/>
+                        </a:lnSpc>
+                      </a:pPr>
+                      <a:r>
+                        <a:rPr lang="ja-JP" sz="800" b="0" u="none" strike="noStrike">
+                          <a:solidFill>
+                            <a:srgbClr val="000000"/>
+                          </a:solidFill>
+                          <a:effectLst/>
+                          <a:uFillTx/>
+                          <a:latin typeface="メイリオ"/>
+                          <a:ea typeface="メイリオ"/>
+                        </a:rPr>
+                        <a:t>セールス情報に抵抗なし。</a:t>
+                      </a:r>
+                      <a:endParaRPr lang="en-US" sz="800" b="0" u="none" strike="noStrike">
+                        <a:solidFill>
+                          <a:srgbClr val="000000"/>
+                        </a:solidFill>
+                        <a:effectLst/>
+                        <a:uFillTx/>
+                        <a:latin typeface="Arial"/>
+                      </a:endParaRPr>
+                    </a:p>
+                  </a:txBody>
+                  <a:tcPr marL="6480" marR="6480" anchor="ctr">
+                    <a:lnL w="6480">
+                      <a:solidFill>
+                        <a:srgbClr val="000000"/>
+                      </a:solidFill>
+                      <a:prstDash val="solid"/>
+                    </a:lnL>
+                    <a:lnR w="6480">
+                      <a:solidFill>
+                        <a:srgbClr val="000000"/>
+                      </a:solidFill>
+                      <a:prstDash val="solid"/>
+                    </a:lnR>
+                    <a:lnT w="12240">
+                      <a:noFill/>
+                      <a:prstDash val="solid"/>
+                    </a:lnT>
+                    <a:lnB w="6480">
+                      <a:solidFill>
+                        <a:srgbClr val="000000"/>
+                      </a:solidFill>
+                      <a:prstDash val="solid"/>
+                    </a:lnB>
+                    <a:solidFill>
+                      <a:schemeClr val="lt1"/>
+                    </a:solidFill>
+                  </a:tcPr>
+                </a:tc>
+                <a:tc>
+                  <a:txBody>
+                    <a:bodyPr/>
+                    <a:lstStyle/>
+                    <a:p>
+                      <a:pPr algn="ctr" defTabSz="914400">
+                        <a:lnSpc>
+                          <a:spcPct val="100000"/>
+                        </a:lnSpc>
+                      </a:pPr>
+                      <a:r>
+                        <a:rPr lang="ja-JP" sz="800" b="0" u="none" strike="noStrike">
+                          <a:solidFill>
+                            <a:srgbClr val="000000"/>
+                          </a:solidFill>
+                          <a:effectLst/>
+                          <a:uFillTx/>
+                          <a:latin typeface="メイリオ"/>
+                          <a:ea typeface="メイリオ"/>
+                        </a:rPr>
+                        <a:t>プライベートでは減少傾向も</a:t>
+                      </a:r>
+                      <a:endParaRPr lang="en-US" sz="800" b="0" u="none" strike="noStrike">
+                        <a:solidFill>
+                          <a:srgbClr val="000000"/>
+                        </a:solidFill>
+                        <a:effectLst/>
+                        <a:uFillTx/>
+                        <a:latin typeface="Arial"/>
+                      </a:endParaRPr>
+                    </a:p>
+                    <a:p>
+                      <a:pPr algn="ctr" defTabSz="914400">
+                        <a:lnSpc>
+                          <a:spcPct val="100000"/>
+                        </a:lnSpc>
+                      </a:pPr>
+                      <a:r>
+                        <a:rPr lang="ja-JP" sz="800" b="0" u="none" strike="noStrike">
+                          <a:solidFill>
+                            <a:srgbClr val="000000"/>
+                          </a:solidFill>
+                          <a:effectLst/>
+                          <a:uFillTx/>
+                          <a:latin typeface="メイリオ"/>
+                          <a:ea typeface="メイリオ"/>
+                        </a:rPr>
+                        <a:t>仕事では必須。</a:t>
+                      </a:r>
+                      <a:endParaRPr lang="en-US" sz="800" b="0" u="none" strike="noStrike">
+                        <a:solidFill>
+                          <a:srgbClr val="000000"/>
+                        </a:solidFill>
+                        <a:effectLst/>
+                        <a:uFillTx/>
+                        <a:latin typeface="Arial"/>
+                      </a:endParaRPr>
+                    </a:p>
+                  </a:txBody>
+                  <a:tcPr marL="6480" marR="6480" anchor="ctr">
+                    <a:lnL w="6480">
+                      <a:solidFill>
+                        <a:srgbClr val="000000"/>
+                      </a:solidFill>
+                      <a:prstDash val="solid"/>
+                    </a:lnL>
+                    <a:lnR w="6480">
+                      <a:solidFill>
+                        <a:srgbClr val="000000"/>
+                      </a:solidFill>
+                      <a:prstDash val="solid"/>
+                    </a:lnR>
+                    <a:lnT w="12240">
+                      <a:noFill/>
+                      <a:prstDash val="solid"/>
+                    </a:lnT>
+                    <a:lnB w="6480">
+                      <a:solidFill>
+                        <a:srgbClr val="000000"/>
+                      </a:solidFill>
+                      <a:prstDash val="solid"/>
+                    </a:lnB>
+                    <a:solidFill>
+                      <a:schemeClr val="lt1"/>
+                    </a:solidFill>
+                  </a:tcPr>
+                </a:tc>
+                <a:tc vMerge="1">
+                  <a:txBody>
+                    <a:bodyPr/>
+                    <a:lstStyle/>
+                    <a:p>
+                      <a:endParaRPr lang="en-US" sz="1800" b="0" u="none" strike="noStrike">
+                        <a:solidFill>
+                          <a:srgbClr val="000000"/>
+                        </a:solidFill>
+                        <a:effectLst/>
+                        <a:uFillTx/>
+                        <a:latin typeface="Arial"/>
+                      </a:endParaRPr>
+                    </a:p>
+                  </a:txBody>
+                  <a:tcPr marL="90000" marR="90000">
+                    <a:lnL>
+                      <a:noFill/>
+                    </a:lnL>
+                    <a:lnR>
+                      <a:noFill/>
+                    </a:lnR>
+                    <a:lnT>
+                      <a:noFill/>
+                    </a:lnT>
+                    <a:lnB>
+                      <a:noFill/>
+                    </a:lnB>
+                    <a:solidFill>
+                      <a:srgbClr val="729FCF"/>
+                    </a:solidFill>
+                  </a:tcPr>
+                </a:tc>
+                <a:extLst>
+                  <a:ext uri="{0D108BD9-81ED-4DB2-BD59-A6C34878D82A}">
+                    <a16:rowId xmlns:a16="http://schemas.microsoft.com/office/drawing/2014/main" val="10004"/>
+                  </a:ext>
+                </a:extLst>
+              </a:tr>
+              <a:tr h="499320">
+                <a:tc rowSpan="2">
+                  <a:txBody>
+                    <a:bodyPr/>
+                    <a:lstStyle/>
+                    <a:p>
+                      <a:pPr defTabSz="914400">
+                        <a:lnSpc>
+                          <a:spcPct val="100000"/>
+                        </a:lnSpc>
+                      </a:pPr>
+                      <a:r>
+                        <a:rPr lang="ja-JP" sz="1050" b="1" u="none" strike="noStrike">
+                          <a:solidFill>
+                            <a:srgbClr val="000000"/>
+                          </a:solidFill>
+                          <a:effectLst/>
+                          <a:uFillTx/>
+                          <a:latin typeface="メイリオ"/>
+                          <a:ea typeface="メイリオ"/>
+                        </a:rPr>
+                        <a:t>　　　</a:t>
+                      </a:r>
+                      <a:r>
+                        <a:rPr lang="en-US" sz="1050" b="1" u="none" strike="noStrike">
+                          <a:solidFill>
+                            <a:srgbClr val="000000"/>
+                          </a:solidFill>
+                          <a:effectLst/>
+                          <a:uFillTx/>
+                          <a:latin typeface="メイリオ"/>
+                          <a:ea typeface="メイリオ"/>
+                        </a:rPr>
+                        <a:t>50</a:t>
+                      </a:r>
+                      <a:r>
+                        <a:rPr lang="ja-JP" sz="1050" b="1" u="none" strike="noStrike">
+                          <a:solidFill>
+                            <a:srgbClr val="000000"/>
+                          </a:solidFill>
+                          <a:effectLst/>
+                          <a:uFillTx/>
+                          <a:latin typeface="メイリオ"/>
+                          <a:ea typeface="メイリオ"/>
+                        </a:rPr>
+                        <a:t>代〜</a:t>
+                      </a:r>
+                      <a:r>
+                        <a:rPr lang="en-US" sz="1050" b="1" u="none" strike="noStrike">
+                          <a:solidFill>
+                            <a:srgbClr val="000000"/>
+                          </a:solidFill>
+                          <a:effectLst/>
+                          <a:uFillTx/>
+                          <a:latin typeface="メイリオ"/>
+                          <a:ea typeface="メイリオ"/>
+                        </a:rPr>
+                        <a:t>60</a:t>
+                      </a:r>
+                      <a:r>
+                        <a:rPr lang="ja-JP" sz="1050" b="1" u="none" strike="noStrike">
+                          <a:solidFill>
+                            <a:srgbClr val="000000"/>
+                          </a:solidFill>
+                          <a:effectLst/>
+                          <a:uFillTx/>
+                          <a:latin typeface="メイリオ"/>
+                          <a:ea typeface="メイリオ"/>
+                        </a:rPr>
+                        <a:t>代</a:t>
+                      </a:r>
+                      <a:endParaRPr lang="en-US" sz="1050" b="0" u="none" strike="noStrike">
+                        <a:solidFill>
+                          <a:srgbClr val="000000"/>
+                        </a:solidFill>
+                        <a:effectLst/>
+                        <a:uFillTx/>
+                        <a:latin typeface="Arial"/>
+                      </a:endParaRPr>
+                    </a:p>
+                  </a:txBody>
+                  <a:tcPr marL="6480" marR="6480" anchor="ctr">
+                    <a:lnL w="6480">
+                      <a:solidFill>
+                        <a:srgbClr val="000000"/>
+                      </a:solidFill>
+                      <a:prstDash val="solid"/>
+                    </a:lnL>
+                    <a:lnR w="6480">
+                      <a:solidFill>
+                        <a:srgbClr val="000000"/>
+                      </a:solidFill>
+                      <a:prstDash val="solid"/>
+                    </a:lnR>
+                    <a:lnT w="6480">
+                      <a:solidFill>
+                        <a:srgbClr val="000000"/>
+                      </a:solidFill>
+                      <a:prstDash val="solid"/>
+                    </a:lnT>
+                    <a:lnB w="6480">
+                      <a:solidFill>
+                        <a:srgbClr val="000000"/>
+                      </a:solidFill>
+                      <a:prstDash val="solid"/>
+                    </a:lnB>
+                    <a:solidFill>
+                      <a:srgbClr val="DAE9F8"/>
+                    </a:solidFill>
+                  </a:tcPr>
+                </a:tc>
+                <a:tc>
+                  <a:txBody>
+                    <a:bodyPr/>
+                    <a:lstStyle/>
+                    <a:p>
+                      <a:pPr algn="ctr" defTabSz="914400">
+                        <a:lnSpc>
+                          <a:spcPct val="100000"/>
+                        </a:lnSpc>
+                      </a:pPr>
+                      <a:r>
+                        <a:rPr lang="ja-JP" sz="1000" b="1" u="none" strike="noStrike">
+                          <a:solidFill>
+                            <a:srgbClr val="000000"/>
+                          </a:solidFill>
+                          <a:effectLst/>
+                          <a:uFillTx/>
+                          <a:latin typeface="メイリオ"/>
+                          <a:ea typeface="メイリオ"/>
+                        </a:rPr>
+                        <a:t>利用率：</a:t>
+                      </a:r>
+                      <a:r>
+                        <a:rPr lang="en-US" sz="1000" b="1" u="none" strike="noStrike">
+                          <a:solidFill>
+                            <a:srgbClr val="000000"/>
+                          </a:solidFill>
+                          <a:effectLst/>
+                          <a:uFillTx/>
+                          <a:latin typeface="メイリオ"/>
+                          <a:ea typeface="メイリオ"/>
+                        </a:rPr>
+                        <a:t>80%</a:t>
+                      </a:r>
+                      <a:r>
+                        <a:rPr lang="ja-JP" sz="1000" b="1" u="none" strike="noStrike">
+                          <a:solidFill>
+                            <a:srgbClr val="000000"/>
+                          </a:solidFill>
+                          <a:effectLst/>
+                          <a:uFillTx/>
+                          <a:latin typeface="メイリオ"/>
+                          <a:ea typeface="メイリオ"/>
+                        </a:rPr>
+                        <a:t>〜</a:t>
+                      </a:r>
+                      <a:r>
+                        <a:rPr lang="en-US" sz="1000" b="1" u="none" strike="noStrike">
+                          <a:solidFill>
+                            <a:srgbClr val="000000"/>
+                          </a:solidFill>
+                          <a:effectLst/>
+                          <a:uFillTx/>
+                          <a:latin typeface="メイリオ"/>
+                          <a:ea typeface="メイリオ"/>
+                        </a:rPr>
+                        <a:t>90%</a:t>
+                      </a:r>
+                      <a:endParaRPr lang="en-US" sz="1000" b="0" u="none" strike="noStrike">
+                        <a:solidFill>
+                          <a:srgbClr val="000000"/>
+                        </a:solidFill>
+                        <a:effectLst/>
+                        <a:uFillTx/>
+                        <a:latin typeface="Arial"/>
+                      </a:endParaRPr>
+                    </a:p>
+                  </a:txBody>
+                  <a:tcPr marL="6480" marR="6480" anchor="ctr">
+                    <a:lnL w="6480">
+                      <a:solidFill>
+                        <a:srgbClr val="000000"/>
+                      </a:solidFill>
+                      <a:prstDash val="solid"/>
+                    </a:lnL>
+                    <a:lnR w="6480">
+                      <a:solidFill>
+                        <a:srgbClr val="000000"/>
+                      </a:solidFill>
+                      <a:prstDash val="solid"/>
+                    </a:lnR>
+                    <a:lnT w="6480">
+                      <a:solidFill>
+                        <a:srgbClr val="000000"/>
+                      </a:solidFill>
+                      <a:prstDash val="solid"/>
+                    </a:lnT>
+                    <a:lnB w="6480">
+                      <a:noFill/>
+                      <a:prstDash val="solid"/>
+                    </a:lnB>
+                    <a:solidFill>
+                      <a:srgbClr val="FFFF99"/>
+                    </a:solidFill>
+                  </a:tcPr>
+                </a:tc>
+                <a:tc>
+                  <a:txBody>
+                    <a:bodyPr/>
+                    <a:lstStyle/>
+                    <a:p>
+                      <a:pPr algn="ctr" defTabSz="914400">
+                        <a:lnSpc>
+                          <a:spcPct val="100000"/>
+                        </a:lnSpc>
+                      </a:pPr>
+                      <a:r>
+                        <a:rPr lang="ja-JP" sz="1000" b="1" u="none" strike="noStrike">
+                          <a:solidFill>
+                            <a:srgbClr val="000000"/>
+                          </a:solidFill>
+                          <a:effectLst/>
+                          <a:uFillTx/>
+                          <a:latin typeface="メイリオ"/>
+                          <a:ea typeface="メイリオ"/>
+                        </a:rPr>
+                        <a:t>利用率：高い</a:t>
+                      </a:r>
+                      <a:endParaRPr lang="en-US" sz="1000" b="0" u="none" strike="noStrike">
+                        <a:solidFill>
+                          <a:srgbClr val="000000"/>
+                        </a:solidFill>
+                        <a:effectLst/>
+                        <a:uFillTx/>
+                        <a:latin typeface="Arial"/>
+                      </a:endParaRPr>
+                    </a:p>
+                  </a:txBody>
+                  <a:tcPr marL="6480" marR="6480" anchor="ctr">
+                    <a:lnL w="6480">
+                      <a:solidFill>
+                        <a:srgbClr val="000000"/>
+                      </a:solidFill>
+                      <a:prstDash val="solid"/>
+                    </a:lnL>
+                    <a:lnR w="6480">
+                      <a:solidFill>
+                        <a:srgbClr val="000000"/>
+                      </a:solidFill>
+                      <a:prstDash val="solid"/>
+                    </a:lnR>
+                    <a:lnT w="6480">
+                      <a:solidFill>
+                        <a:srgbClr val="000000"/>
+                      </a:solidFill>
+                      <a:prstDash val="solid"/>
+                    </a:lnT>
+                    <a:lnB w="6480">
+                      <a:noFill/>
+                      <a:prstDash val="solid"/>
+                    </a:lnB>
+                    <a:solidFill>
+                      <a:schemeClr val="lt1"/>
+                    </a:solidFill>
+                  </a:tcPr>
+                </a:tc>
+                <a:tc>
+                  <a:txBody>
+                    <a:bodyPr/>
+                    <a:lstStyle/>
+                    <a:p>
+                      <a:pPr algn="ctr" defTabSz="914400">
+                        <a:lnSpc>
+                          <a:spcPct val="100000"/>
+                        </a:lnSpc>
+                      </a:pPr>
+                      <a:r>
+                        <a:rPr lang="ja-JP" sz="1000" b="1" u="none" strike="noStrike">
+                          <a:solidFill>
+                            <a:srgbClr val="000000"/>
+                          </a:solidFill>
+                          <a:effectLst/>
+                          <a:uFillTx/>
+                          <a:latin typeface="メイリオ"/>
+                          <a:ea typeface="メイリオ"/>
+                        </a:rPr>
+                        <a:t>利用率：高い</a:t>
+                      </a:r>
+                      <a:endParaRPr lang="en-US" sz="1000" b="0" u="none" strike="noStrike">
+                        <a:solidFill>
+                          <a:srgbClr val="000000"/>
+                        </a:solidFill>
+                        <a:effectLst/>
+                        <a:uFillTx/>
+                        <a:latin typeface="Arial"/>
+                      </a:endParaRPr>
+                    </a:p>
+                  </a:txBody>
+                  <a:tcPr marL="6480" marR="6480" anchor="ctr">
+                    <a:lnL w="6480">
+                      <a:solidFill>
+                        <a:srgbClr val="000000"/>
+                      </a:solidFill>
+                      <a:prstDash val="solid"/>
+                    </a:lnL>
+                    <a:lnR w="6480">
+                      <a:solidFill>
+                        <a:srgbClr val="000000"/>
+                      </a:solidFill>
+                      <a:prstDash val="solid"/>
+                    </a:lnR>
+                    <a:lnT w="6480">
+                      <a:solidFill>
+                        <a:srgbClr val="000000"/>
+                      </a:solidFill>
+                      <a:prstDash val="solid"/>
+                    </a:lnT>
+                    <a:lnB w="6480">
+                      <a:noFill/>
+                      <a:prstDash val="solid"/>
+                    </a:lnB>
+                    <a:solidFill>
+                      <a:schemeClr val="lt1"/>
+                    </a:solidFill>
+                  </a:tcPr>
+                </a:tc>
+                <a:tc rowSpan="2">
+                  <a:txBody>
+                    <a:bodyPr/>
+                    <a:lstStyle/>
+                    <a:p>
+                      <a:pPr algn="ctr" defTabSz="914400">
+                        <a:lnSpc>
+                          <a:spcPct val="100000"/>
+                        </a:lnSpc>
+                      </a:pPr>
+                      <a:r>
+                        <a:rPr lang="en-US" sz="800" b="0" u="none" strike="noStrike">
+                          <a:solidFill>
+                            <a:srgbClr val="000000"/>
+                          </a:solidFill>
+                          <a:effectLst/>
+                          <a:uFillTx/>
+                          <a:latin typeface="メイリオ"/>
+                          <a:ea typeface="メイリオ"/>
+                        </a:rPr>
+                        <a:t>YouTube</a:t>
+                      </a:r>
+                      <a:r>
+                        <a:rPr lang="ja-JP" sz="800" b="0" u="none" strike="noStrike">
+                          <a:solidFill>
+                            <a:srgbClr val="000000"/>
+                          </a:solidFill>
+                          <a:effectLst/>
+                          <a:uFillTx/>
+                          <a:latin typeface="メイリオ"/>
+                          <a:ea typeface="メイリオ"/>
+                        </a:rPr>
+                        <a:t>での趣味動画視聴も普及。</a:t>
+                      </a:r>
+                      <a:endParaRPr lang="en-US" sz="800" b="0" u="none" strike="noStrike">
+                        <a:solidFill>
+                          <a:srgbClr val="000000"/>
+                        </a:solidFill>
+                        <a:effectLst/>
+                        <a:uFillTx/>
+                        <a:latin typeface="Arial"/>
+                      </a:endParaRPr>
+                    </a:p>
+                  </a:txBody>
+                  <a:tcPr marL="6480" marR="6480" anchor="ctr">
+                    <a:lnL w="6480">
+                      <a:solidFill>
+                        <a:srgbClr val="000000"/>
+                      </a:solidFill>
+                      <a:prstDash val="solid"/>
+                    </a:lnL>
+                    <a:lnR w="6480">
+                      <a:solidFill>
+                        <a:srgbClr val="000000"/>
+                      </a:solidFill>
+                      <a:prstDash val="solid"/>
+                    </a:lnR>
+                    <a:lnT w="6480">
+                      <a:solidFill>
+                        <a:srgbClr val="000000"/>
+                      </a:solidFill>
+                      <a:prstDash val="solid"/>
+                    </a:lnT>
+                    <a:lnB w="6480">
+                      <a:solidFill>
+                        <a:srgbClr val="000000"/>
+                      </a:solidFill>
+                      <a:prstDash val="solid"/>
+                    </a:lnB>
+                    <a:noFill/>
+                  </a:tcPr>
+                </a:tc>
+                <a:extLst>
+                  <a:ext uri="{0D108BD9-81ED-4DB2-BD59-A6C34878D82A}">
+                    <a16:rowId xmlns:a16="http://schemas.microsoft.com/office/drawing/2014/main" val="10005"/>
+                  </a:ext>
+                </a:extLst>
+              </a:tr>
+              <a:tr h="499320">
+                <a:tc vMerge="1">
+                  <a:txBody>
+                    <a:bodyPr/>
+                    <a:lstStyle/>
+                    <a:p>
+                      <a:endParaRPr lang="en-US" sz="1800" b="0" u="none" strike="noStrike">
+                        <a:solidFill>
+                          <a:srgbClr val="000000"/>
+                        </a:solidFill>
+                        <a:effectLst/>
+                        <a:uFillTx/>
+                        <a:latin typeface="Arial"/>
+                      </a:endParaRPr>
+                    </a:p>
+                  </a:txBody>
+                  <a:tcPr marL="90000" marR="90000">
+                    <a:lnL>
+                      <a:noFill/>
+                    </a:lnL>
+                    <a:lnR>
+                      <a:noFill/>
+                    </a:lnR>
+                    <a:lnT>
+                      <a:noFill/>
+                    </a:lnT>
+                    <a:lnB>
+                      <a:noFill/>
+                    </a:lnB>
+                    <a:solidFill>
+                      <a:srgbClr val="729FCF"/>
+                    </a:solidFill>
+                  </a:tcPr>
+                </a:tc>
+                <a:tc>
+                  <a:txBody>
+                    <a:bodyPr/>
+                    <a:lstStyle/>
+                    <a:p>
+                      <a:pPr algn="ctr" defTabSz="914400">
+                        <a:lnSpc>
+                          <a:spcPct val="100000"/>
+                        </a:lnSpc>
+                      </a:pPr>
+                      <a:r>
+                        <a:rPr lang="ja-JP" sz="800" b="0" u="none" strike="noStrike">
+                          <a:solidFill>
+                            <a:srgbClr val="000000"/>
+                          </a:solidFill>
+                          <a:effectLst/>
+                          <a:uFillTx/>
+                          <a:latin typeface="メイリオ"/>
+                          <a:ea typeface="メイリオ"/>
+                        </a:rPr>
+                        <a:t>家族や友人との連絡で定着。</a:t>
+                      </a:r>
+                      <a:endParaRPr lang="en-US" sz="800" b="0" u="none" strike="noStrike">
+                        <a:solidFill>
+                          <a:srgbClr val="000000"/>
+                        </a:solidFill>
+                        <a:effectLst/>
+                        <a:uFillTx/>
+                        <a:latin typeface="Arial"/>
+                      </a:endParaRPr>
+                    </a:p>
+                  </a:txBody>
+                  <a:tcPr marL="6480" marR="6480" anchor="ctr">
+                    <a:lnL w="6480">
+                      <a:solidFill>
+                        <a:srgbClr val="000000"/>
+                      </a:solidFill>
+                      <a:prstDash val="solid"/>
+                    </a:lnL>
+                    <a:lnR w="6480">
+                      <a:solidFill>
+                        <a:srgbClr val="000000"/>
+                      </a:solidFill>
+                      <a:prstDash val="solid"/>
+                    </a:lnR>
+                    <a:lnT w="12240">
+                      <a:noFill/>
+                      <a:prstDash val="solid"/>
+                    </a:lnT>
+                    <a:lnB w="6480">
+                      <a:solidFill>
+                        <a:srgbClr val="000000"/>
+                      </a:solidFill>
+                      <a:prstDash val="solid"/>
+                    </a:lnB>
+                    <a:solidFill>
+                      <a:srgbClr val="FFFF99"/>
+                    </a:solidFill>
+                  </a:tcPr>
+                </a:tc>
+                <a:tc>
+                  <a:txBody>
+                    <a:bodyPr/>
+                    <a:lstStyle/>
+                    <a:p>
+                      <a:pPr algn="ctr" defTabSz="914400">
+                        <a:lnSpc>
+                          <a:spcPct val="100000"/>
+                        </a:lnSpc>
+                      </a:pPr>
+                      <a:r>
+                        <a:rPr lang="ja-JP" sz="800" b="0" u="none" strike="noStrike">
+                          <a:solidFill>
+                            <a:srgbClr val="000000"/>
+                          </a:solidFill>
+                          <a:effectLst/>
+                          <a:uFillTx/>
+                          <a:latin typeface="メイリオ"/>
+                          <a:ea typeface="メイリオ"/>
+                        </a:rPr>
+                        <a:t>最も好まれる企業からの</a:t>
+                      </a:r>
+                      <a:endParaRPr lang="en-US" sz="800" b="0" u="none" strike="noStrike">
+                        <a:solidFill>
+                          <a:srgbClr val="000000"/>
+                        </a:solidFill>
+                        <a:effectLst/>
+                        <a:uFillTx/>
+                        <a:latin typeface="Arial"/>
+                      </a:endParaRPr>
+                    </a:p>
+                    <a:p>
+                      <a:pPr algn="ctr" defTabSz="914400">
+                        <a:lnSpc>
+                          <a:spcPct val="100000"/>
+                        </a:lnSpc>
+                      </a:pPr>
+                      <a:r>
+                        <a:rPr lang="ja-JP" sz="800" b="0" u="none" strike="noStrike">
+                          <a:solidFill>
+                            <a:srgbClr val="000000"/>
+                          </a:solidFill>
+                          <a:effectLst/>
+                          <a:uFillTx/>
+                          <a:latin typeface="メイリオ"/>
+                          <a:ea typeface="メイリオ"/>
+                        </a:rPr>
+                        <a:t>情報受取ツール。</a:t>
+                      </a:r>
+                      <a:endParaRPr lang="en-US" sz="800" b="0" u="none" strike="noStrike">
+                        <a:solidFill>
+                          <a:srgbClr val="000000"/>
+                        </a:solidFill>
+                        <a:effectLst/>
+                        <a:uFillTx/>
+                        <a:latin typeface="Arial"/>
+                      </a:endParaRPr>
+                    </a:p>
+                  </a:txBody>
+                  <a:tcPr marL="6480" marR="6480" anchor="ctr">
+                    <a:lnL w="6480">
+                      <a:solidFill>
+                        <a:srgbClr val="000000"/>
+                      </a:solidFill>
+                      <a:prstDash val="solid"/>
+                    </a:lnL>
+                    <a:lnR w="6480">
+                      <a:solidFill>
+                        <a:srgbClr val="000000"/>
+                      </a:solidFill>
+                      <a:prstDash val="solid"/>
+                    </a:lnR>
+                    <a:lnT w="12240">
+                      <a:noFill/>
+                      <a:prstDash val="solid"/>
+                    </a:lnT>
+                    <a:lnB w="6480">
+                      <a:solidFill>
+                        <a:srgbClr val="000000"/>
+                      </a:solidFill>
+                      <a:prstDash val="solid"/>
+                    </a:lnB>
+                    <a:solidFill>
+                      <a:schemeClr val="lt1"/>
+                    </a:solidFill>
+                  </a:tcPr>
+                </a:tc>
+                <a:tc>
+                  <a:txBody>
+                    <a:bodyPr/>
+                    <a:lstStyle/>
+                    <a:p>
+                      <a:pPr algn="ctr" defTabSz="914400">
+                        <a:lnSpc>
+                          <a:spcPct val="100000"/>
+                        </a:lnSpc>
+                      </a:pPr>
+                      <a:r>
+                        <a:rPr lang="ja-JP" sz="800" b="0" u="none" strike="noStrike">
+                          <a:solidFill>
+                            <a:srgbClr val="000000"/>
+                          </a:solidFill>
+                          <a:effectLst/>
+                          <a:uFillTx/>
+                          <a:latin typeface="メイリオ"/>
+                          <a:ea typeface="メイリオ"/>
+                        </a:rPr>
+                        <a:t>予約や急ぎの用件で信頼性が高い。</a:t>
+                      </a:r>
+                      <a:endParaRPr lang="en-US" sz="800" b="0" u="none" strike="noStrike">
+                        <a:solidFill>
+                          <a:srgbClr val="000000"/>
+                        </a:solidFill>
+                        <a:effectLst/>
+                        <a:uFillTx/>
+                        <a:latin typeface="Arial"/>
+                      </a:endParaRPr>
+                    </a:p>
+                  </a:txBody>
+                  <a:tcPr marL="6480" marR="6480" anchor="ctr">
+                    <a:lnL w="6480">
+                      <a:solidFill>
+                        <a:srgbClr val="000000"/>
+                      </a:solidFill>
+                      <a:prstDash val="solid"/>
+                    </a:lnL>
+                    <a:lnR w="6480">
+                      <a:solidFill>
+                        <a:srgbClr val="000000"/>
+                      </a:solidFill>
+                      <a:prstDash val="solid"/>
+                    </a:lnR>
+                    <a:lnT w="12240">
+                      <a:noFill/>
+                      <a:prstDash val="solid"/>
+                    </a:lnT>
+                    <a:lnB w="6480">
+                      <a:solidFill>
+                        <a:srgbClr val="000000"/>
+                      </a:solidFill>
+                      <a:prstDash val="solid"/>
+                    </a:lnB>
+                    <a:solidFill>
+                      <a:schemeClr val="lt1"/>
+                    </a:solidFill>
+                  </a:tcPr>
+                </a:tc>
+                <a:tc vMerge="1">
+                  <a:txBody>
+                    <a:bodyPr/>
+                    <a:lstStyle/>
+                    <a:p>
+                      <a:endParaRPr lang="en-US" sz="1800" b="0" u="none" strike="noStrike">
+                        <a:solidFill>
+                          <a:srgbClr val="000000"/>
+                        </a:solidFill>
+                        <a:effectLst/>
+                        <a:uFillTx/>
+                        <a:latin typeface="Arial"/>
+                      </a:endParaRPr>
+                    </a:p>
+                  </a:txBody>
+                  <a:tcPr marL="90000" marR="90000">
+                    <a:lnL>
+                      <a:noFill/>
+                    </a:lnL>
+                    <a:lnR>
+                      <a:noFill/>
+                    </a:lnR>
+                    <a:lnT>
+                      <a:noFill/>
+                    </a:lnT>
+                    <a:lnB>
+                      <a:noFill/>
+                    </a:lnB>
+                    <a:solidFill>
+                      <a:srgbClr val="729FCF"/>
+                    </a:solidFill>
+                  </a:tcPr>
+                </a:tc>
+                <a:extLst>
+                  <a:ext uri="{0D108BD9-81ED-4DB2-BD59-A6C34878D82A}">
+                    <a16:rowId xmlns:a16="http://schemas.microsoft.com/office/drawing/2014/main" val="10006"/>
+                  </a:ext>
+                </a:extLst>
+              </a:tr>
+              <a:tr h="499320">
+                <a:tc rowSpan="2">
+                  <a:txBody>
+                    <a:bodyPr/>
+                    <a:lstStyle/>
+                    <a:p>
+                      <a:pPr algn="ctr" defTabSz="914400">
+                        <a:lnSpc>
+                          <a:spcPct val="100000"/>
+                        </a:lnSpc>
+                      </a:pPr>
+                      <a:r>
+                        <a:rPr lang="en-US" sz="1050" b="1" u="none" strike="noStrike">
+                          <a:solidFill>
+                            <a:srgbClr val="000000"/>
+                          </a:solidFill>
+                          <a:effectLst/>
+                          <a:uFillTx/>
+                          <a:latin typeface="メイリオ"/>
+                          <a:ea typeface="メイリオ"/>
+                        </a:rPr>
+                        <a:t>70</a:t>
+                      </a:r>
+                      <a:r>
+                        <a:rPr lang="ja-JP" sz="1050" b="1" u="none" strike="noStrike">
+                          <a:solidFill>
+                            <a:srgbClr val="000000"/>
+                          </a:solidFill>
+                          <a:effectLst/>
+                          <a:uFillTx/>
+                          <a:latin typeface="メイリオ"/>
+                          <a:ea typeface="メイリオ"/>
+                        </a:rPr>
+                        <a:t>代以上</a:t>
+                      </a:r>
+                      <a:endParaRPr lang="en-US" sz="1050" b="0" u="none" strike="noStrike">
+                        <a:solidFill>
+                          <a:srgbClr val="000000"/>
+                        </a:solidFill>
+                        <a:effectLst/>
+                        <a:uFillTx/>
+                        <a:latin typeface="Arial"/>
+                      </a:endParaRPr>
+                    </a:p>
+                  </a:txBody>
+                  <a:tcPr marL="6480" marR="6480" anchor="ctr">
+                    <a:lnL w="6480">
+                      <a:solidFill>
+                        <a:srgbClr val="000000"/>
+                      </a:solidFill>
+                      <a:prstDash val="solid"/>
+                    </a:lnL>
+                    <a:lnR w="6480">
+                      <a:solidFill>
+                        <a:srgbClr val="000000"/>
+                      </a:solidFill>
+                      <a:prstDash val="solid"/>
+                    </a:lnR>
+                    <a:lnT w="6480">
+                      <a:solidFill>
+                        <a:srgbClr val="000000"/>
+                      </a:solidFill>
+                      <a:prstDash val="solid"/>
+                    </a:lnT>
+                    <a:lnB w="6480">
+                      <a:solidFill>
+                        <a:srgbClr val="000000"/>
+                      </a:solidFill>
+                      <a:prstDash val="solid"/>
+                    </a:lnB>
+                    <a:solidFill>
+                      <a:srgbClr val="DAE9F8"/>
+                    </a:solidFill>
+                  </a:tcPr>
+                </a:tc>
+                <a:tc>
+                  <a:txBody>
+                    <a:bodyPr/>
+                    <a:lstStyle/>
+                    <a:p>
+                      <a:pPr algn="ctr" defTabSz="914400">
+                        <a:lnSpc>
+                          <a:spcPct val="100000"/>
+                        </a:lnSpc>
+                      </a:pPr>
+                      <a:r>
+                        <a:rPr lang="ja-JP" sz="1000" b="1" u="none" strike="noStrike">
+                          <a:solidFill>
+                            <a:srgbClr val="000000"/>
+                          </a:solidFill>
+                          <a:effectLst/>
+                          <a:uFillTx/>
+                          <a:latin typeface="メイリオ"/>
+                          <a:ea typeface="メイリオ"/>
+                        </a:rPr>
+                        <a:t>利用率：</a:t>
+                      </a:r>
+                      <a:r>
+                        <a:rPr lang="en-US" sz="1000" b="1" u="none" strike="noStrike">
+                          <a:solidFill>
+                            <a:srgbClr val="000000"/>
+                          </a:solidFill>
+                          <a:effectLst/>
+                          <a:uFillTx/>
+                          <a:latin typeface="メイリオ"/>
+                          <a:ea typeface="メイリオ"/>
+                        </a:rPr>
+                        <a:t>70%</a:t>
+                      </a:r>
+                      <a:r>
+                        <a:rPr lang="ja-JP" sz="1000" b="1" u="none" strike="noStrike">
+                          <a:solidFill>
+                            <a:srgbClr val="000000"/>
+                          </a:solidFill>
+                          <a:effectLst/>
+                          <a:uFillTx/>
+                          <a:latin typeface="メイリオ"/>
+                          <a:ea typeface="メイリオ"/>
+                        </a:rPr>
+                        <a:t>前後</a:t>
+                      </a:r>
+                      <a:endParaRPr lang="en-US" sz="1000" b="0" u="none" strike="noStrike">
+                        <a:solidFill>
+                          <a:srgbClr val="000000"/>
+                        </a:solidFill>
+                        <a:effectLst/>
+                        <a:uFillTx/>
+                        <a:latin typeface="Arial"/>
+                      </a:endParaRPr>
+                    </a:p>
+                  </a:txBody>
+                  <a:tcPr marL="6480" marR="6480" anchor="ctr">
+                    <a:lnL w="6480">
+                      <a:solidFill>
+                        <a:srgbClr val="000000"/>
+                      </a:solidFill>
+                      <a:prstDash val="solid"/>
+                    </a:lnL>
+                    <a:lnR w="6480">
+                      <a:solidFill>
+                        <a:srgbClr val="000000"/>
+                      </a:solidFill>
+                      <a:prstDash val="solid"/>
+                    </a:lnR>
+                    <a:lnT w="6480">
+                      <a:solidFill>
+                        <a:srgbClr val="000000"/>
+                      </a:solidFill>
+                      <a:prstDash val="solid"/>
+                    </a:lnT>
+                    <a:lnB w="6480">
+                      <a:noFill/>
+                      <a:prstDash val="solid"/>
+                    </a:lnB>
+                    <a:solidFill>
+                      <a:srgbClr val="FFFF99"/>
+                    </a:solidFill>
+                  </a:tcPr>
+                </a:tc>
+                <a:tc>
+                  <a:txBody>
+                    <a:bodyPr/>
+                    <a:lstStyle/>
+                    <a:p>
+                      <a:pPr algn="ctr" defTabSz="914400">
+                        <a:lnSpc>
+                          <a:spcPct val="100000"/>
+                        </a:lnSpc>
+                      </a:pPr>
+                      <a:r>
+                        <a:rPr lang="ja-JP" sz="1000" b="1" u="none" strike="noStrike">
+                          <a:solidFill>
+                            <a:srgbClr val="000000"/>
+                          </a:solidFill>
+                          <a:effectLst/>
+                          <a:uFillTx/>
+                          <a:latin typeface="メイリオ"/>
+                          <a:ea typeface="メイリオ"/>
+                        </a:rPr>
+                        <a:t>利用率：低い</a:t>
+                      </a:r>
+                      <a:endParaRPr lang="en-US" sz="1000" b="0" u="none" strike="noStrike">
+                        <a:solidFill>
+                          <a:srgbClr val="000000"/>
+                        </a:solidFill>
+                        <a:effectLst/>
+                        <a:uFillTx/>
+                        <a:latin typeface="Arial"/>
+                      </a:endParaRPr>
+                    </a:p>
+                  </a:txBody>
+                  <a:tcPr marL="6480" marR="6480" anchor="ctr">
+                    <a:lnL w="6480">
+                      <a:solidFill>
+                        <a:srgbClr val="000000"/>
+                      </a:solidFill>
+                      <a:prstDash val="solid"/>
+                    </a:lnL>
+                    <a:lnR w="6480">
+                      <a:solidFill>
+                        <a:srgbClr val="000000"/>
+                      </a:solidFill>
+                      <a:prstDash val="solid"/>
+                    </a:lnR>
+                    <a:lnT w="6480">
+                      <a:solidFill>
+                        <a:srgbClr val="000000"/>
+                      </a:solidFill>
+                      <a:prstDash val="solid"/>
+                    </a:lnT>
+                    <a:lnB w="6480">
+                      <a:noFill/>
+                      <a:prstDash val="solid"/>
+                    </a:lnB>
+                    <a:solidFill>
+                      <a:schemeClr val="lt1"/>
+                    </a:solidFill>
+                  </a:tcPr>
+                </a:tc>
+                <a:tc>
+                  <a:txBody>
+                    <a:bodyPr/>
+                    <a:lstStyle/>
+                    <a:p>
+                      <a:pPr algn="ctr" defTabSz="914400">
+                        <a:lnSpc>
+                          <a:spcPct val="100000"/>
+                        </a:lnSpc>
+                      </a:pPr>
+                      <a:r>
+                        <a:rPr lang="ja-JP" sz="1000" b="1" u="none" strike="noStrike">
+                          <a:solidFill>
+                            <a:srgbClr val="000000"/>
+                          </a:solidFill>
+                          <a:effectLst/>
+                          <a:uFillTx/>
+                          <a:latin typeface="メイリオ"/>
+                          <a:ea typeface="メイリオ"/>
+                        </a:rPr>
+                        <a:t>利用率：最も高い</a:t>
+                      </a:r>
+                      <a:endParaRPr lang="en-US" sz="1000" b="0" u="none" strike="noStrike">
+                        <a:solidFill>
+                          <a:srgbClr val="000000"/>
+                        </a:solidFill>
+                        <a:effectLst/>
+                        <a:uFillTx/>
+                        <a:latin typeface="Arial"/>
+                      </a:endParaRPr>
+                    </a:p>
+                  </a:txBody>
+                  <a:tcPr marL="6480" marR="6480" anchor="ctr">
+                    <a:lnL w="6480">
+                      <a:solidFill>
+                        <a:srgbClr val="000000"/>
+                      </a:solidFill>
+                      <a:prstDash val="solid"/>
+                    </a:lnL>
+                    <a:lnR w="6480">
+                      <a:solidFill>
+                        <a:srgbClr val="000000"/>
+                      </a:solidFill>
+                      <a:prstDash val="solid"/>
+                    </a:lnR>
+                    <a:lnT w="6480">
+                      <a:solidFill>
+                        <a:srgbClr val="000000"/>
+                      </a:solidFill>
+                      <a:prstDash val="solid"/>
+                    </a:lnT>
+                    <a:lnB w="6480">
+                      <a:noFill/>
+                      <a:prstDash val="solid"/>
+                    </a:lnB>
+                    <a:solidFill>
+                      <a:schemeClr val="lt1"/>
+                    </a:solidFill>
+                  </a:tcPr>
+                </a:tc>
+                <a:tc rowSpan="2">
+                  <a:txBody>
+                    <a:bodyPr/>
+                    <a:lstStyle/>
+                    <a:p>
+                      <a:pPr algn="ctr" defTabSz="914400">
+                        <a:lnSpc>
+                          <a:spcPct val="100000"/>
+                        </a:lnSpc>
+                      </a:pPr>
+                      <a:r>
+                        <a:rPr lang="ja-JP" sz="800" b="0" u="none" strike="noStrike">
+                          <a:solidFill>
+                            <a:srgbClr val="000000"/>
+                          </a:solidFill>
+                          <a:effectLst/>
+                          <a:uFillTx/>
+                          <a:latin typeface="メイリオ"/>
+                          <a:ea typeface="メイリオ"/>
+                        </a:rPr>
+                        <a:t>連絡手段としての電話が</a:t>
+                      </a:r>
+                      <a:endParaRPr lang="en-US" sz="800" b="0" u="none" strike="noStrike">
+                        <a:solidFill>
+                          <a:srgbClr val="000000"/>
+                        </a:solidFill>
+                        <a:effectLst/>
+                        <a:uFillTx/>
+                        <a:latin typeface="Arial"/>
+                      </a:endParaRPr>
+                    </a:p>
+                    <a:p>
+                      <a:pPr algn="ctr" defTabSz="914400">
+                        <a:lnSpc>
+                          <a:spcPct val="100000"/>
+                        </a:lnSpc>
+                      </a:pPr>
+                      <a:r>
+                        <a:rPr lang="ja-JP" sz="800" b="0" u="none" strike="noStrike">
+                          <a:solidFill>
+                            <a:srgbClr val="000000"/>
+                          </a:solidFill>
+                          <a:effectLst/>
+                          <a:uFillTx/>
+                          <a:latin typeface="メイリオ"/>
+                          <a:ea typeface="メイリオ"/>
+                        </a:rPr>
+                        <a:t>最優先される層。</a:t>
+                      </a:r>
+                      <a:endParaRPr lang="en-US" sz="800" b="0" u="none" strike="noStrike">
+                        <a:solidFill>
+                          <a:srgbClr val="000000"/>
+                        </a:solidFill>
+                        <a:effectLst/>
+                        <a:uFillTx/>
+                        <a:latin typeface="Arial"/>
+                      </a:endParaRPr>
+                    </a:p>
+                  </a:txBody>
+                  <a:tcPr marL="6480" marR="6480" anchor="ctr">
+                    <a:lnL w="6480">
+                      <a:solidFill>
+                        <a:srgbClr val="000000"/>
+                      </a:solidFill>
+                      <a:prstDash val="solid"/>
+                    </a:lnL>
+                    <a:lnR w="6480">
+                      <a:solidFill>
+                        <a:srgbClr val="000000"/>
+                      </a:solidFill>
+                      <a:prstDash val="solid"/>
+                    </a:lnR>
+                    <a:lnT w="6480">
+                      <a:solidFill>
+                        <a:srgbClr val="000000"/>
+                      </a:solidFill>
+                      <a:prstDash val="solid"/>
+                    </a:lnT>
+                    <a:lnB w="6480">
+                      <a:solidFill>
+                        <a:srgbClr val="000000"/>
+                      </a:solidFill>
+                      <a:prstDash val="solid"/>
+                    </a:lnB>
+                    <a:noFill/>
+                  </a:tcPr>
+                </a:tc>
+                <a:extLst>
+                  <a:ext uri="{0D108BD9-81ED-4DB2-BD59-A6C34878D82A}">
+                    <a16:rowId xmlns:a16="http://schemas.microsoft.com/office/drawing/2014/main" val="10007"/>
+                  </a:ext>
+                </a:extLst>
+              </a:tr>
+              <a:tr h="499320">
+                <a:tc vMerge="1">
+                  <a:txBody>
+                    <a:bodyPr/>
+                    <a:lstStyle/>
+                    <a:p>
+                      <a:endParaRPr lang="en-US" sz="1800" b="0" u="none" strike="noStrike">
+                        <a:solidFill>
+                          <a:srgbClr val="000000"/>
+                        </a:solidFill>
+                        <a:effectLst/>
+                        <a:uFillTx/>
+                        <a:latin typeface="Arial"/>
+                      </a:endParaRPr>
+                    </a:p>
+                  </a:txBody>
+                  <a:tcPr marL="90000" marR="90000">
+                    <a:lnL>
+                      <a:noFill/>
+                    </a:lnL>
+                    <a:lnR>
+                      <a:noFill/>
+                    </a:lnR>
+                    <a:lnT>
+                      <a:noFill/>
+                    </a:lnT>
+                    <a:lnB>
+                      <a:noFill/>
+                    </a:lnB>
+                    <a:solidFill>
+                      <a:srgbClr val="729FCF"/>
+                    </a:solidFill>
+                  </a:tcPr>
+                </a:tc>
+                <a:tc>
+                  <a:txBody>
+                    <a:bodyPr/>
+                    <a:lstStyle/>
+                    <a:p>
+                      <a:pPr algn="ctr" defTabSz="914400">
+                        <a:lnSpc>
+                          <a:spcPct val="100000"/>
+                        </a:lnSpc>
+                      </a:pPr>
+                      <a:r>
+                        <a:rPr lang="ja-JP" sz="800" b="0" u="none" strike="noStrike">
+                          <a:solidFill>
+                            <a:srgbClr val="000000"/>
+                          </a:solidFill>
+                          <a:effectLst/>
+                          <a:uFillTx/>
+                          <a:latin typeface="メイリオ"/>
+                          <a:ea typeface="メイリオ"/>
+                        </a:rPr>
+                        <a:t>高齢者層にも普及が進む。</a:t>
+                      </a:r>
+                      <a:endParaRPr lang="en-US" sz="800" b="0" u="none" strike="noStrike">
+                        <a:solidFill>
+                          <a:srgbClr val="000000"/>
+                        </a:solidFill>
+                        <a:effectLst/>
+                        <a:uFillTx/>
+                        <a:latin typeface="Arial"/>
+                      </a:endParaRPr>
+                    </a:p>
+                  </a:txBody>
+                  <a:tcPr marL="6480" marR="6480" anchor="ctr">
+                    <a:lnL w="6480">
+                      <a:solidFill>
+                        <a:srgbClr val="000000"/>
+                      </a:solidFill>
+                      <a:prstDash val="solid"/>
+                    </a:lnL>
+                    <a:lnR w="6480">
+                      <a:solidFill>
+                        <a:srgbClr val="000000"/>
+                      </a:solidFill>
+                      <a:prstDash val="solid"/>
+                    </a:lnR>
+                    <a:lnT w="12240">
+                      <a:noFill/>
+                      <a:prstDash val="solid"/>
+                    </a:lnT>
+                    <a:lnB w="6480">
+                      <a:solidFill>
+                        <a:srgbClr val="000000"/>
+                      </a:solidFill>
+                      <a:prstDash val="solid"/>
+                    </a:lnB>
+                    <a:solidFill>
+                      <a:srgbClr val="FFFF99"/>
+                    </a:solidFill>
+                  </a:tcPr>
+                </a:tc>
+                <a:tc>
+                  <a:txBody>
+                    <a:bodyPr/>
+                    <a:lstStyle/>
+                    <a:p>
+                      <a:pPr algn="ctr" defTabSz="914400">
+                        <a:lnSpc>
+                          <a:spcPct val="100000"/>
+                        </a:lnSpc>
+                      </a:pPr>
+                      <a:r>
+                        <a:rPr lang="ja-JP" sz="800" b="0" u="none" strike="noStrike">
+                          <a:solidFill>
+                            <a:srgbClr val="000000"/>
+                          </a:solidFill>
+                          <a:effectLst/>
+                          <a:uFillTx/>
+                          <a:latin typeface="メイリオ"/>
+                          <a:ea typeface="メイリオ"/>
+                        </a:rPr>
+                        <a:t>操作に不慣れで到達率が下がる。</a:t>
+                      </a:r>
+                      <a:endParaRPr lang="en-US" sz="800" b="0" u="none" strike="noStrike">
+                        <a:solidFill>
+                          <a:srgbClr val="000000"/>
+                        </a:solidFill>
+                        <a:effectLst/>
+                        <a:uFillTx/>
+                        <a:latin typeface="Arial"/>
+                      </a:endParaRPr>
+                    </a:p>
+                  </a:txBody>
+                  <a:tcPr marL="6480" marR="6480" anchor="ctr">
+                    <a:lnL w="6480">
+                      <a:solidFill>
+                        <a:srgbClr val="000000"/>
+                      </a:solidFill>
+                      <a:prstDash val="solid"/>
+                    </a:lnL>
+                    <a:lnR w="6480">
+                      <a:solidFill>
+                        <a:srgbClr val="000000"/>
+                      </a:solidFill>
+                      <a:prstDash val="solid"/>
+                    </a:lnR>
+                    <a:lnT w="12240">
+                      <a:noFill/>
+                      <a:prstDash val="solid"/>
+                    </a:lnT>
+                    <a:lnB w="6480">
+                      <a:solidFill>
+                        <a:srgbClr val="000000"/>
+                      </a:solidFill>
+                      <a:prstDash val="solid"/>
+                    </a:lnB>
+                    <a:solidFill>
+                      <a:schemeClr val="lt1"/>
+                    </a:solidFill>
+                  </a:tcPr>
+                </a:tc>
+                <a:tc>
+                  <a:txBody>
+                    <a:bodyPr/>
+                    <a:lstStyle/>
+                    <a:p>
+                      <a:pPr algn="ctr" defTabSz="914400">
+                        <a:lnSpc>
+                          <a:spcPct val="100000"/>
+                        </a:lnSpc>
+                      </a:pPr>
+                      <a:r>
+                        <a:rPr lang="ja-JP" sz="800" b="0" u="none" strike="noStrike">
+                          <a:solidFill>
+                            <a:srgbClr val="000000"/>
+                          </a:solidFill>
+                          <a:effectLst/>
+                          <a:uFillTx/>
+                          <a:latin typeface="メイリオ"/>
+                          <a:ea typeface="メイリオ"/>
+                        </a:rPr>
+                        <a:t>重要な連絡や問い合わせは</a:t>
+                      </a:r>
+                      <a:endParaRPr lang="en-US" sz="800" b="0" u="none" strike="noStrike">
+                        <a:solidFill>
+                          <a:srgbClr val="000000"/>
+                        </a:solidFill>
+                        <a:effectLst/>
+                        <a:uFillTx/>
+                        <a:latin typeface="Arial"/>
+                      </a:endParaRPr>
+                    </a:p>
+                    <a:p>
+                      <a:pPr algn="ctr" defTabSz="914400">
+                        <a:lnSpc>
+                          <a:spcPct val="100000"/>
+                        </a:lnSpc>
+                      </a:pPr>
+                      <a:r>
+                        <a:rPr lang="ja-JP" sz="800" b="0" u="none" strike="noStrike">
+                          <a:solidFill>
+                            <a:srgbClr val="000000"/>
+                          </a:solidFill>
+                          <a:effectLst/>
+                          <a:uFillTx/>
+                          <a:latin typeface="メイリオ"/>
+                          <a:ea typeface="メイリオ"/>
+                        </a:rPr>
+                        <a:t>電話がメイン。</a:t>
+                      </a:r>
+                      <a:endParaRPr lang="en-US" sz="800" b="0" u="none" strike="noStrike">
+                        <a:solidFill>
+                          <a:srgbClr val="000000"/>
+                        </a:solidFill>
+                        <a:effectLst/>
+                        <a:uFillTx/>
+                        <a:latin typeface="Arial"/>
+                      </a:endParaRPr>
+                    </a:p>
+                  </a:txBody>
+                  <a:tcPr marL="6480" marR="6480" anchor="ctr">
+                    <a:lnL w="6480">
+                      <a:solidFill>
+                        <a:srgbClr val="000000"/>
+                      </a:solidFill>
+                      <a:prstDash val="solid"/>
+                    </a:lnL>
+                    <a:lnR w="6480">
+                      <a:solidFill>
+                        <a:srgbClr val="000000"/>
+                      </a:solidFill>
+                      <a:prstDash val="solid"/>
+                    </a:lnR>
+                    <a:lnT w="12240">
+                      <a:noFill/>
+                      <a:prstDash val="solid"/>
+                    </a:lnT>
+                    <a:lnB w="6480">
+                      <a:solidFill>
+                        <a:srgbClr val="000000"/>
+                      </a:solidFill>
+                      <a:prstDash val="solid"/>
+                    </a:lnB>
+                    <a:solidFill>
+                      <a:schemeClr val="lt1"/>
+                    </a:solidFill>
+                  </a:tcPr>
+                </a:tc>
+                <a:tc vMerge="1">
+                  <a:txBody>
+                    <a:bodyPr/>
+                    <a:lstStyle/>
+                    <a:p>
+                      <a:endParaRPr lang="en-US" sz="1800" b="0" u="none" strike="noStrike">
+                        <a:solidFill>
+                          <a:srgbClr val="000000"/>
+                        </a:solidFill>
+                        <a:effectLst/>
+                        <a:uFillTx/>
+                        <a:latin typeface="Arial"/>
+                      </a:endParaRPr>
+                    </a:p>
+                  </a:txBody>
+                  <a:tcPr marL="90000" marR="90000">
+                    <a:lnL>
+                      <a:noFill/>
+                    </a:lnL>
+                    <a:lnR>
+                      <a:noFill/>
+                    </a:lnR>
+                    <a:lnT>
+                      <a:noFill/>
+                    </a:lnT>
+                    <a:lnB>
+                      <a:noFill/>
+                    </a:lnB>
+                    <a:solidFill>
+                      <a:srgbClr val="729FCF"/>
+                    </a:solidFill>
+                  </a:tcPr>
+                </a:tc>
+                <a:extLst>
+                  <a:ext uri="{0D108BD9-81ED-4DB2-BD59-A6C34878D82A}">
+                    <a16:rowId xmlns:a16="http://schemas.microsoft.com/office/drawing/2014/main" val="10008"/>
+                  </a:ext>
+                </a:extLst>
+              </a:tr>
+            </a:tbl>
+          </a:graphicData>
+        </a:graphic>
+      </p:graphicFrame>
+    </p:spTree>
+  </p:cSld>
+  <p:clrMapOvr>
+    <a:masterClrMapping/>
+  </p:clrMapOvr>
+</p:sld>
+</file>
+
+<file path=ppt/slides/slide21.xml><?xml version="1.0" encoding="utf-8"?>
+<p:sld xmlns:a="http://schemas.openxmlformats.org/drawingml/2006/main" xmlns:p="http://schemas.openxmlformats.org/presentationml/2006/main" xmlns:r="http://schemas.openxmlformats.org/officeDocument/2006/relationships">
+  <p:cSld>
+    <p:spTree>
+      <p:nvGrpSpPr>
+        <p:cNvPr id="1" name=""/>
+        <p:cNvGrpSpPr/>
+        <p:nvPr/>
+      </p:nvGrpSpPr>
+      <p:grpSpPr/>
+      <p:sp>
+        <p:nvSpPr>
           <p:cNvPr id="876" name="Google Shape;752;p28"/>
           <p:cNvSpPr/>
           <p:nvPr/>
@@ -27093,7 +27653,7 @@
 </p:sld>
 </file>
 
-<file path=ppt/slides/slide21.xml><?xml version="1.0" encoding="utf-8"?>
+<file path=ppt/slides/slide22.xml><?xml version="1.0" encoding="utf-8"?>
 <p:sld xmlns:a="http://schemas.openxmlformats.org/drawingml/2006/main" xmlns:p="http://schemas.openxmlformats.org/presentationml/2006/main" xmlns:r="http://schemas.openxmlformats.org/officeDocument/2006/relationships">
   <p:cSld>
     <p:spTree>
@@ -28231,7 +28791,7 @@
 </p:sld>
 </file>
 
-<file path=ppt/slides/slide22.xml><?xml version="1.0" encoding="utf-8"?>
+<file path=ppt/slides/slide23.xml><?xml version="1.0" encoding="utf-8"?>
 <p:sld xmlns:a="http://schemas.openxmlformats.org/drawingml/2006/main" xmlns:p="http://schemas.openxmlformats.org/presentationml/2006/main" xmlns:r="http://schemas.openxmlformats.org/officeDocument/2006/relationships">
   <p:cSld>
     <p:spTree>
@@ -28571,7 +29131,7 @@
 </p:sld>
 </file>
 
-<file path=ppt/slides/slide23.xml><?xml version="1.0" encoding="utf-8"?>
+<file path=ppt/slides/slide24.xml><?xml version="1.0" encoding="utf-8"?>
 <p:sld xmlns:a="http://schemas.openxmlformats.org/drawingml/2006/main" xmlns:p="http://schemas.openxmlformats.org/presentationml/2006/main" xmlns:r="http://schemas.openxmlformats.org/officeDocument/2006/relationships">
   <p:cSld>
     <p:spTree>
@@ -29959,7 +30519,7 @@
 </p:sld>
 </file>
 
-<file path=ppt/slides/slide24.xml><?xml version="1.0" encoding="utf-8"?>
+<file path=ppt/slides/slide25.xml><?xml version="1.0" encoding="utf-8"?>
 <p:sld xmlns:a="http://schemas.openxmlformats.org/drawingml/2006/main" xmlns:p="http://schemas.openxmlformats.org/presentationml/2006/main" xmlns:r="http://schemas.openxmlformats.org/officeDocument/2006/relationships">
   <p:cSld>
     <p:spTree>
@@ -30709,7 +31269,7 @@
 </p:sld>
 </file>
 
-<file path=ppt/slides/slide25.xml><?xml version="1.0" encoding="utf-8"?>
+<file path=ppt/slides/slide26.xml><?xml version="1.0" encoding="utf-8"?>
 <p:sld xmlns:a="http://schemas.openxmlformats.org/drawingml/2006/main" xmlns:p="http://schemas.openxmlformats.org/presentationml/2006/main" xmlns:r="http://schemas.openxmlformats.org/officeDocument/2006/relationships">
   <p:cSld>
     <p:spTree>
@@ -31213,7 +31773,7 @@
 </p:sld>
 </file>
 
-<file path=ppt/slides/slide26.xml><?xml version="1.0" encoding="utf-8"?>
+<file path=ppt/slides/slide27.xml><?xml version="1.0" encoding="utf-8"?>
 <p:sld xmlns:a="http://schemas.openxmlformats.org/drawingml/2006/main" xmlns:p="http://schemas.openxmlformats.org/presentationml/2006/main" xmlns:r="http://schemas.openxmlformats.org/officeDocument/2006/relationships">
   <p:cSld>
     <p:spTree>
@@ -33290,7 +33850,7 @@
 </p:sld>
 </file>
 
-<file path=ppt/slides/slide27.xml><?xml version="1.0" encoding="utf-8"?>
+<file path=ppt/slides/slide28.xml><?xml version="1.0" encoding="utf-8"?>
 <p:sld xmlns:a="http://schemas.openxmlformats.org/drawingml/2006/main" xmlns:p="http://schemas.openxmlformats.org/presentationml/2006/main" xmlns:r="http://schemas.openxmlformats.org/officeDocument/2006/relationships">
   <p:cSld>
     <p:spTree>
@@ -34198,7 +34758,7 @@
 </p:sld>
 </file>
 
-<file path=ppt/slides/slide28.xml><?xml version="1.0" encoding="utf-8"?>
+<file path=ppt/slides/slide29.xml><?xml version="1.0" encoding="utf-8"?>
 <p:sld xmlns:a="http://schemas.openxmlformats.org/drawingml/2006/main" xmlns:p="http://schemas.openxmlformats.org/presentationml/2006/main" xmlns:r="http://schemas.openxmlformats.org/officeDocument/2006/relationships">
   <p:cSld>
     <p:spTree>
